--- a/Nexoraa_Hackathon_Pitch_V6.pptx
+++ b/Nexoraa_Hackathon_Pitch_V6.pptx
@@ -2,14 +2,16 @@
 <file path=ppt/presentation.xml><?xml version="1.0" encoding="utf-8"?>
 <p:presentation xmlns:a="http://schemas.openxmlformats.org/drawingml/2006/main" xmlns:r="http://schemas.openxmlformats.org/officeDocument/2006/relationships" xmlns:p="http://schemas.openxmlformats.org/presentationml/2006/main" saveSubsetFonts="1" autoCompressPictures="0">
   <p:sldMasterIdLst>
-    <p:sldMasterId id="2147483648" r:id="rId1"/>
+    <p:sldMasterId id="2147483903" r:id="rId1"/>
   </p:sldMasterIdLst>
   <p:sldIdLst>
     <p:sldId id="256" r:id="rId2"/>
     <p:sldId id="257" r:id="rId3"/>
     <p:sldId id="258" r:id="rId4"/>
     <p:sldId id="259" r:id="rId5"/>
-    <p:sldId id="260" r:id="rId6"/>
+    <p:sldId id="261" r:id="rId6"/>
+    <p:sldId id="260" r:id="rId7"/>
+    <p:sldId id="262" r:id="rId8"/>
   </p:sldIdLst>
   <p:sldSz cx="12192000" cy="6858000"/>
   <p:notesSz cx="6858000" cy="9144000"/>
@@ -156,18 +158,25 @@
         </p:nvSpPr>
         <p:spPr>
           <a:xfrm>
-            <a:off x="685800" y="2130425"/>
-            <a:ext cx="7772400" cy="1470025"/>
+            <a:off x="1370693" y="1769540"/>
+            <a:ext cx="9440034" cy="1828801"/>
           </a:xfrm>
         </p:spPr>
         <p:txBody>
-          <a:bodyPr/>
-          <a:lstStyle/>
+          <a:bodyPr anchor="b">
+            <a:normAutofit/>
+          </a:bodyPr>
+          <a:lstStyle>
+            <a:lvl1pPr algn="ctr">
+              <a:defRPr sz="5400"/>
+            </a:lvl1pPr>
+          </a:lstStyle>
           <a:p>
             <a:r>
               <a:rPr lang="en-US"/>
               <a:t>Click to edit Master title style</a:t>
             </a:r>
+            <a:endParaRPr lang="en-US" dirty="0"/>
           </a:p>
         </p:txBody>
       </p:sp>
@@ -183,14 +192,22 @@
         </p:nvSpPr>
         <p:spPr>
           <a:xfrm>
-            <a:off x="1371600" y="3886200"/>
-            <a:ext cx="6400800" cy="1752600"/>
+            <a:off x="1370693" y="3598339"/>
+            <a:ext cx="9440034" cy="1049867"/>
           </a:xfrm>
         </p:spPr>
         <p:txBody>
-          <a:bodyPr/>
+          <a:bodyPr anchor="t"/>
           <a:lstStyle>
             <a:lvl1pPr marL="0" indent="0" algn="ctr">
+              <a:buNone/>
+              <a:defRPr>
+                <a:solidFill>
+                  <a:schemeClr val="tx1"/>
+                </a:solidFill>
+              </a:defRPr>
+            </a:lvl1pPr>
+            <a:lvl2pPr marL="457200" indent="0" algn="ctr">
               <a:buNone/>
               <a:defRPr>
                 <a:solidFill>
@@ -199,8 +216,8 @@
                   </a:schemeClr>
                 </a:solidFill>
               </a:defRPr>
-            </a:lvl1pPr>
-            <a:lvl2pPr marL="457200" indent="0" algn="ctr">
+            </a:lvl2pPr>
+            <a:lvl3pPr marL="914400" indent="0" algn="ctr">
               <a:buNone/>
               <a:defRPr>
                 <a:solidFill>
@@ -209,8 +226,8 @@
                   </a:schemeClr>
                 </a:solidFill>
               </a:defRPr>
-            </a:lvl2pPr>
-            <a:lvl3pPr marL="914400" indent="0" algn="ctr">
+            </a:lvl3pPr>
+            <a:lvl4pPr marL="1371600" indent="0" algn="ctr">
               <a:buNone/>
               <a:defRPr>
                 <a:solidFill>
@@ -219,8 +236,8 @@
                   </a:schemeClr>
                 </a:solidFill>
               </a:defRPr>
-            </a:lvl3pPr>
-            <a:lvl4pPr marL="1371600" indent="0" algn="ctr">
+            </a:lvl4pPr>
+            <a:lvl5pPr marL="1828800" indent="0" algn="ctr">
               <a:buNone/>
               <a:defRPr>
                 <a:solidFill>
@@ -229,8 +246,8 @@
                   </a:schemeClr>
                 </a:solidFill>
               </a:defRPr>
-            </a:lvl4pPr>
-            <a:lvl5pPr marL="1828800" indent="0" algn="ctr">
+            </a:lvl5pPr>
+            <a:lvl6pPr marL="2286000" indent="0" algn="ctr">
               <a:buNone/>
               <a:defRPr>
                 <a:solidFill>
@@ -239,8 +256,8 @@
                   </a:schemeClr>
                 </a:solidFill>
               </a:defRPr>
-            </a:lvl5pPr>
-            <a:lvl6pPr marL="2286000" indent="0" algn="ctr">
+            </a:lvl6pPr>
+            <a:lvl7pPr marL="2743200" indent="0" algn="ctr">
               <a:buNone/>
               <a:defRPr>
                 <a:solidFill>
@@ -249,8 +266,8 @@
                   </a:schemeClr>
                 </a:solidFill>
               </a:defRPr>
-            </a:lvl6pPr>
-            <a:lvl7pPr marL="2743200" indent="0" algn="ctr">
+            </a:lvl7pPr>
+            <a:lvl8pPr marL="3200400" indent="0" algn="ctr">
               <a:buNone/>
               <a:defRPr>
                 <a:solidFill>
@@ -259,8 +276,8 @@
                   </a:schemeClr>
                 </a:solidFill>
               </a:defRPr>
-            </a:lvl7pPr>
-            <a:lvl8pPr marL="3200400" indent="0" algn="ctr">
+            </a:lvl8pPr>
+            <a:lvl9pPr marL="3657600" indent="0" algn="ctr">
               <a:buNone/>
               <a:defRPr>
                 <a:solidFill>
@@ -269,16 +286,6 @@
                   </a:schemeClr>
                 </a:solidFill>
               </a:defRPr>
-            </a:lvl8pPr>
-            <a:lvl9pPr marL="3657600" indent="0" algn="ctr">
-              <a:buNone/>
-              <a:defRPr>
-                <a:solidFill>
-                  <a:schemeClr val="tx1">
-                    <a:tint val="75000"/>
-                  </a:schemeClr>
-                </a:solidFill>
-              </a:defRPr>
             </a:lvl9pPr>
           </a:lstStyle>
           <a:p>
@@ -286,6 +293,7 @@
               <a:rPr lang="en-US"/>
               <a:t>Click to edit Master subtitle style</a:t>
             </a:r>
+            <a:endParaRPr lang="en-US" dirty="0"/>
           </a:p>
         </p:txBody>
       </p:sp>
@@ -306,7 +314,7 @@
           <a:p>
             <a:fld id="{5BCAD085-E8A6-8845-BD4E-CB4CCA059FC4}" type="datetimeFigureOut">
               <a:rPr lang="en-US" smtClean="0"/>
-              <a:t>3/8/2026</a:t>
+              <a:t>3/9/2026</a:t>
             </a:fld>
             <a:endParaRPr lang="en-US"/>
           </a:p>
@@ -357,7 +365,7 @@
     </p:spTree>
     <p:extLst>
       <p:ext uri="{BB962C8B-B14F-4D97-AF65-F5344CB8AC3E}">
-        <p14:creationId xmlns:p14="http://schemas.microsoft.com/office/powerpoint/2010/main" val="3168075583"/>
+        <p14:creationId xmlns:p14="http://schemas.microsoft.com/office/powerpoint/2010/main" val="2520659975"/>
       </p:ext>
     </p:extLst>
   </p:cSld>
@@ -368,6 +376,2582 @@
 </file>
 
 <file path=ppt/slideLayouts/slideLayout10.xml><?xml version="1.0" encoding="utf-8"?>
+<p:sldLayout xmlns:a="http://schemas.openxmlformats.org/drawingml/2006/main" xmlns:r="http://schemas.openxmlformats.org/officeDocument/2006/relationships" xmlns:p="http://schemas.openxmlformats.org/presentationml/2006/main" preserve="1">
+  <p:cSld name="Panoramic Picture with Caption">
+    <p:spTree>
+      <p:nvGrpSpPr>
+        <p:cNvPr id="1" name=""/>
+        <p:cNvGrpSpPr/>
+        <p:nvPr/>
+      </p:nvGrpSpPr>
+      <p:grpSpPr>
+        <a:xfrm>
+          <a:off x="0" y="0"/>
+          <a:ext cx="0" cy="0"/>
+          <a:chOff x="0" y="0"/>
+          <a:chExt cx="0" cy="0"/>
+        </a:xfrm>
+      </p:grpSpPr>
+      <p:pic>
+        <p:nvPicPr>
+          <p:cNvPr id="16" name="Picture 15" descr="Slate-V2-HD-panoPhotoInset.png"/>
+          <p:cNvPicPr>
+            <a:picLocks noChangeAspect="1"/>
+          </p:cNvPicPr>
+          <p:nvPr/>
+        </p:nvPicPr>
+        <p:blipFill>
+          <a:blip r:embed="rId2">
+            <a:extLst>
+              <a:ext uri="{28A0092B-C50C-407E-A947-70E740481C1C}">
+                <a14:useLocalDpi xmlns:a14="http://schemas.microsoft.com/office/drawing/2010/main" val="0"/>
+              </a:ext>
+            </a:extLst>
+          </a:blip>
+          <a:stretch>
+            <a:fillRect/>
+          </a:stretch>
+        </p:blipFill>
+        <p:spPr>
+          <a:xfrm>
+            <a:off x="1013883" y="547807"/>
+            <a:ext cx="10141799" cy="3816806"/>
+          </a:xfrm>
+          <a:prstGeom prst="rect">
+            <a:avLst/>
+          </a:prstGeom>
+        </p:spPr>
+      </p:pic>
+      <p:sp>
+        <p:nvSpPr>
+          <p:cNvPr id="2" name="Title 1"/>
+          <p:cNvSpPr>
+            <a:spLocks noGrp="1"/>
+          </p:cNvSpPr>
+          <p:nvPr>
+            <p:ph type="title"/>
+          </p:nvPr>
+        </p:nvSpPr>
+        <p:spPr>
+          <a:xfrm>
+            <a:off x="913806" y="4565255"/>
+            <a:ext cx="10355326" cy="543472"/>
+          </a:xfrm>
+        </p:spPr>
+        <p:txBody>
+          <a:bodyPr anchor="b">
+            <a:normAutofit/>
+          </a:bodyPr>
+          <a:lstStyle>
+            <a:lvl1pPr algn="ctr">
+              <a:defRPr sz="2800"/>
+            </a:lvl1pPr>
+          </a:lstStyle>
+          <a:p>
+            <a:r>
+              <a:rPr lang="en-US"/>
+              <a:t>Click to edit Master title style</a:t>
+            </a:r>
+            <a:endParaRPr lang="en-US" dirty="0"/>
+          </a:p>
+        </p:txBody>
+      </p:sp>
+      <p:sp>
+        <p:nvSpPr>
+          <p:cNvPr id="3" name="Picture Placeholder 2"/>
+          <p:cNvSpPr>
+            <a:spLocks noGrp="1" noChangeAspect="1"/>
+          </p:cNvSpPr>
+          <p:nvPr>
+            <p:ph type="pic" idx="1"/>
+          </p:nvPr>
+        </p:nvSpPr>
+        <p:spPr>
+          <a:xfrm>
+            <a:off x="1169349" y="695009"/>
+            <a:ext cx="9845346" cy="3525671"/>
+          </a:xfrm>
+          <a:effectLst>
+            <a:outerShdw blurRad="38100" dist="25400" dir="4440000">
+              <a:srgbClr val="000000">
+                <a:alpha val="36000"/>
+              </a:srgbClr>
+            </a:outerShdw>
+          </a:effectLst>
+        </p:spPr>
+        <p:txBody>
+          <a:bodyPr anchor="t">
+            <a:normAutofit/>
+          </a:bodyPr>
+          <a:lstStyle>
+            <a:lvl1pPr marL="0" indent="0" algn="ctr">
+              <a:buNone/>
+              <a:defRPr sz="2000"/>
+            </a:lvl1pPr>
+            <a:lvl2pPr marL="457200" indent="0">
+              <a:buNone/>
+              <a:defRPr sz="2000"/>
+            </a:lvl2pPr>
+            <a:lvl3pPr marL="914400" indent="0">
+              <a:buNone/>
+              <a:defRPr sz="2000"/>
+            </a:lvl3pPr>
+            <a:lvl4pPr marL="1371600" indent="0">
+              <a:buNone/>
+              <a:defRPr sz="2000"/>
+            </a:lvl4pPr>
+            <a:lvl5pPr marL="1828800" indent="0">
+              <a:buNone/>
+              <a:defRPr sz="2000"/>
+            </a:lvl5pPr>
+            <a:lvl6pPr marL="2286000" indent="0">
+              <a:buNone/>
+              <a:defRPr sz="2000"/>
+            </a:lvl6pPr>
+            <a:lvl7pPr marL="2743200" indent="0">
+              <a:buNone/>
+              <a:defRPr sz="2000"/>
+            </a:lvl7pPr>
+            <a:lvl8pPr marL="3200400" indent="0">
+              <a:buNone/>
+              <a:defRPr sz="2000"/>
+            </a:lvl8pPr>
+            <a:lvl9pPr marL="3657600" indent="0">
+              <a:buNone/>
+              <a:defRPr sz="2000"/>
+            </a:lvl9pPr>
+          </a:lstStyle>
+          <a:p>
+            <a:r>
+              <a:rPr lang="en-US"/>
+              <a:t>Click icon to add picture</a:t>
+            </a:r>
+            <a:endParaRPr lang="en-US" dirty="0"/>
+          </a:p>
+        </p:txBody>
+      </p:sp>
+      <p:sp>
+        <p:nvSpPr>
+          <p:cNvPr id="4" name="Text Placeholder 3"/>
+          <p:cNvSpPr>
+            <a:spLocks noGrp="1"/>
+          </p:cNvSpPr>
+          <p:nvPr>
+            <p:ph type="body" sz="half" idx="2"/>
+          </p:nvPr>
+        </p:nvSpPr>
+        <p:spPr>
+          <a:xfrm>
+            <a:off x="913795" y="5108728"/>
+            <a:ext cx="10353762" cy="682472"/>
+          </a:xfrm>
+        </p:spPr>
+        <p:txBody>
+          <a:bodyPr anchor="t"/>
+          <a:lstStyle>
+            <a:lvl1pPr marL="0" indent="0" algn="ctr">
+              <a:buNone/>
+              <a:defRPr sz="1600"/>
+            </a:lvl1pPr>
+            <a:lvl2pPr marL="457200" indent="0">
+              <a:buNone/>
+              <a:defRPr sz="1400"/>
+            </a:lvl2pPr>
+            <a:lvl3pPr marL="914400" indent="0">
+              <a:buNone/>
+              <a:defRPr sz="1200"/>
+            </a:lvl3pPr>
+            <a:lvl4pPr marL="1371600" indent="0">
+              <a:buNone/>
+              <a:defRPr sz="1000"/>
+            </a:lvl4pPr>
+            <a:lvl5pPr marL="1828800" indent="0">
+              <a:buNone/>
+              <a:defRPr sz="1000"/>
+            </a:lvl5pPr>
+            <a:lvl6pPr marL="2286000" indent="0">
+              <a:buNone/>
+              <a:defRPr sz="1000"/>
+            </a:lvl6pPr>
+            <a:lvl7pPr marL="2743200" indent="0">
+              <a:buNone/>
+              <a:defRPr sz="1000"/>
+            </a:lvl7pPr>
+            <a:lvl8pPr marL="3200400" indent="0">
+              <a:buNone/>
+              <a:defRPr sz="1000"/>
+            </a:lvl8pPr>
+            <a:lvl9pPr marL="3657600" indent="0">
+              <a:buNone/>
+              <a:defRPr sz="1000"/>
+            </a:lvl9pPr>
+          </a:lstStyle>
+          <a:p>
+            <a:pPr lvl="0"/>
+            <a:r>
+              <a:rPr lang="en-US"/>
+              <a:t>Click to edit Master text styles</a:t>
+            </a:r>
+          </a:p>
+        </p:txBody>
+      </p:sp>
+      <p:sp>
+        <p:nvSpPr>
+          <p:cNvPr id="5" name="Date Placeholder 4"/>
+          <p:cNvSpPr>
+            <a:spLocks noGrp="1"/>
+          </p:cNvSpPr>
+          <p:nvPr>
+            <p:ph type="dt" sz="half" idx="10"/>
+          </p:nvPr>
+        </p:nvSpPr>
+        <p:spPr/>
+        <p:txBody>
+          <a:bodyPr/>
+          <a:lstStyle/>
+          <a:p>
+            <a:fld id="{5BCAD085-E8A6-8845-BD4E-CB4CCA059FC4}" type="datetimeFigureOut">
+              <a:rPr lang="en-US" smtClean="0"/>
+              <a:t>3/9/2026</a:t>
+            </a:fld>
+            <a:endParaRPr lang="en-US"/>
+          </a:p>
+        </p:txBody>
+      </p:sp>
+      <p:sp>
+        <p:nvSpPr>
+          <p:cNvPr id="6" name="Footer Placeholder 5"/>
+          <p:cNvSpPr>
+            <a:spLocks noGrp="1"/>
+          </p:cNvSpPr>
+          <p:nvPr>
+            <p:ph type="ftr" sz="quarter" idx="11"/>
+          </p:nvPr>
+        </p:nvSpPr>
+        <p:spPr/>
+        <p:txBody>
+          <a:bodyPr/>
+          <a:lstStyle/>
+          <a:p>
+            <a:endParaRPr lang="en-US"/>
+          </a:p>
+        </p:txBody>
+      </p:sp>
+      <p:sp>
+        <p:nvSpPr>
+          <p:cNvPr id="7" name="Slide Number Placeholder 6"/>
+          <p:cNvSpPr>
+            <a:spLocks noGrp="1"/>
+          </p:cNvSpPr>
+          <p:nvPr>
+            <p:ph type="sldNum" sz="quarter" idx="12"/>
+          </p:nvPr>
+        </p:nvSpPr>
+        <p:spPr/>
+        <p:txBody>
+          <a:bodyPr/>
+          <a:lstStyle/>
+          <a:p>
+            <a:fld id="{C1FF6DA9-008F-8B48-92A6-B652298478BF}" type="slidenum">
+              <a:rPr lang="en-US" smtClean="0"/>
+              <a:t>‹#›</a:t>
+            </a:fld>
+            <a:endParaRPr lang="en-US"/>
+          </a:p>
+        </p:txBody>
+      </p:sp>
+    </p:spTree>
+    <p:extLst>
+      <p:ext uri="{BB962C8B-B14F-4D97-AF65-F5344CB8AC3E}">
+        <p14:creationId xmlns:p14="http://schemas.microsoft.com/office/powerpoint/2010/main" val="1810724491"/>
+      </p:ext>
+    </p:extLst>
+  </p:cSld>
+  <p:clrMapOvr>
+    <a:masterClrMapping/>
+  </p:clrMapOvr>
+</p:sldLayout>
+</file>
+
+<file path=ppt/slideLayouts/slideLayout11.xml><?xml version="1.0" encoding="utf-8"?>
+<p:sldLayout xmlns:a="http://schemas.openxmlformats.org/drawingml/2006/main" xmlns:r="http://schemas.openxmlformats.org/officeDocument/2006/relationships" xmlns:p="http://schemas.openxmlformats.org/presentationml/2006/main" preserve="1">
+  <p:cSld name="Title and Caption">
+    <p:spTree>
+      <p:nvGrpSpPr>
+        <p:cNvPr id="1" name=""/>
+        <p:cNvGrpSpPr/>
+        <p:nvPr/>
+      </p:nvGrpSpPr>
+      <p:grpSpPr>
+        <a:xfrm>
+          <a:off x="0" y="0"/>
+          <a:ext cx="0" cy="0"/>
+          <a:chOff x="0" y="0"/>
+          <a:chExt cx="0" cy="0"/>
+        </a:xfrm>
+      </p:grpSpPr>
+      <p:sp>
+        <p:nvSpPr>
+          <p:cNvPr id="2" name="Title 1"/>
+          <p:cNvSpPr>
+            <a:spLocks noGrp="1"/>
+          </p:cNvSpPr>
+          <p:nvPr>
+            <p:ph type="title"/>
+          </p:nvPr>
+        </p:nvSpPr>
+        <p:spPr>
+          <a:xfrm>
+            <a:off x="913795" y="608437"/>
+            <a:ext cx="10353762" cy="3534344"/>
+          </a:xfrm>
+        </p:spPr>
+        <p:txBody>
+          <a:bodyPr anchor="ctr"/>
+          <a:lstStyle>
+            <a:lvl1pPr>
+              <a:defRPr sz="3200"/>
+            </a:lvl1pPr>
+          </a:lstStyle>
+          <a:p>
+            <a:r>
+              <a:rPr lang="en-US"/>
+              <a:t>Click to edit Master title style</a:t>
+            </a:r>
+            <a:endParaRPr lang="en-US" dirty="0"/>
+          </a:p>
+        </p:txBody>
+      </p:sp>
+      <p:sp>
+        <p:nvSpPr>
+          <p:cNvPr id="4" name="Text Placeholder 3"/>
+          <p:cNvSpPr>
+            <a:spLocks noGrp="1"/>
+          </p:cNvSpPr>
+          <p:nvPr>
+            <p:ph type="body" sz="half" idx="2"/>
+          </p:nvPr>
+        </p:nvSpPr>
+        <p:spPr>
+          <a:xfrm>
+            <a:off x="913794" y="4295180"/>
+            <a:ext cx="10353763" cy="1501826"/>
+          </a:xfrm>
+        </p:spPr>
+        <p:txBody>
+          <a:bodyPr anchor="ctr"/>
+          <a:lstStyle>
+            <a:lvl1pPr marL="0" indent="0" algn="ctr">
+              <a:buNone/>
+              <a:defRPr sz="1600"/>
+            </a:lvl1pPr>
+            <a:lvl2pPr marL="457200" indent="0">
+              <a:buNone/>
+              <a:defRPr sz="1400"/>
+            </a:lvl2pPr>
+            <a:lvl3pPr marL="914400" indent="0">
+              <a:buNone/>
+              <a:defRPr sz="1200"/>
+            </a:lvl3pPr>
+            <a:lvl4pPr marL="1371600" indent="0">
+              <a:buNone/>
+              <a:defRPr sz="1000"/>
+            </a:lvl4pPr>
+            <a:lvl5pPr marL="1828800" indent="0">
+              <a:buNone/>
+              <a:defRPr sz="1000"/>
+            </a:lvl5pPr>
+            <a:lvl6pPr marL="2286000" indent="0">
+              <a:buNone/>
+              <a:defRPr sz="1000"/>
+            </a:lvl6pPr>
+            <a:lvl7pPr marL="2743200" indent="0">
+              <a:buNone/>
+              <a:defRPr sz="1000"/>
+            </a:lvl7pPr>
+            <a:lvl8pPr marL="3200400" indent="0">
+              <a:buNone/>
+              <a:defRPr sz="1000"/>
+            </a:lvl8pPr>
+            <a:lvl9pPr marL="3657600" indent="0">
+              <a:buNone/>
+              <a:defRPr sz="1000"/>
+            </a:lvl9pPr>
+          </a:lstStyle>
+          <a:p>
+            <a:pPr lvl="0"/>
+            <a:r>
+              <a:rPr lang="en-US"/>
+              <a:t>Click to edit Master text styles</a:t>
+            </a:r>
+          </a:p>
+        </p:txBody>
+      </p:sp>
+      <p:sp>
+        <p:nvSpPr>
+          <p:cNvPr id="5" name="Date Placeholder 4"/>
+          <p:cNvSpPr>
+            <a:spLocks noGrp="1"/>
+          </p:cNvSpPr>
+          <p:nvPr>
+            <p:ph type="dt" sz="half" idx="10"/>
+          </p:nvPr>
+        </p:nvSpPr>
+        <p:spPr/>
+        <p:txBody>
+          <a:bodyPr/>
+          <a:lstStyle/>
+          <a:p>
+            <a:fld id="{5BCAD085-E8A6-8845-BD4E-CB4CCA059FC4}" type="datetimeFigureOut">
+              <a:rPr lang="en-US" smtClean="0"/>
+              <a:t>3/9/2026</a:t>
+            </a:fld>
+            <a:endParaRPr lang="en-US"/>
+          </a:p>
+        </p:txBody>
+      </p:sp>
+      <p:sp>
+        <p:nvSpPr>
+          <p:cNvPr id="6" name="Footer Placeholder 5"/>
+          <p:cNvSpPr>
+            <a:spLocks noGrp="1"/>
+          </p:cNvSpPr>
+          <p:nvPr>
+            <p:ph type="ftr" sz="quarter" idx="11"/>
+          </p:nvPr>
+        </p:nvSpPr>
+        <p:spPr/>
+        <p:txBody>
+          <a:bodyPr/>
+          <a:lstStyle/>
+          <a:p>
+            <a:endParaRPr lang="en-US"/>
+          </a:p>
+        </p:txBody>
+      </p:sp>
+      <p:sp>
+        <p:nvSpPr>
+          <p:cNvPr id="7" name="Slide Number Placeholder 6"/>
+          <p:cNvSpPr>
+            <a:spLocks noGrp="1"/>
+          </p:cNvSpPr>
+          <p:nvPr>
+            <p:ph type="sldNum" sz="quarter" idx="12"/>
+          </p:nvPr>
+        </p:nvSpPr>
+        <p:spPr/>
+        <p:txBody>
+          <a:bodyPr/>
+          <a:lstStyle/>
+          <a:p>
+            <a:fld id="{C1FF6DA9-008F-8B48-92A6-B652298478BF}" type="slidenum">
+              <a:rPr lang="en-US" smtClean="0"/>
+              <a:t>‹#›</a:t>
+            </a:fld>
+            <a:endParaRPr lang="en-US"/>
+          </a:p>
+        </p:txBody>
+      </p:sp>
+    </p:spTree>
+    <p:extLst>
+      <p:ext uri="{BB962C8B-B14F-4D97-AF65-F5344CB8AC3E}">
+        <p14:creationId xmlns:p14="http://schemas.microsoft.com/office/powerpoint/2010/main" val="2491666708"/>
+      </p:ext>
+    </p:extLst>
+  </p:cSld>
+  <p:clrMapOvr>
+    <a:masterClrMapping/>
+  </p:clrMapOvr>
+</p:sldLayout>
+</file>
+
+<file path=ppt/slideLayouts/slideLayout12.xml><?xml version="1.0" encoding="utf-8"?>
+<p:sldLayout xmlns:a="http://schemas.openxmlformats.org/drawingml/2006/main" xmlns:r="http://schemas.openxmlformats.org/officeDocument/2006/relationships" xmlns:p="http://schemas.openxmlformats.org/presentationml/2006/main" preserve="1">
+  <p:cSld name="Quote with Caption">
+    <p:spTree>
+      <p:nvGrpSpPr>
+        <p:cNvPr id="1" name=""/>
+        <p:cNvGrpSpPr/>
+        <p:nvPr/>
+      </p:nvGrpSpPr>
+      <p:grpSpPr>
+        <a:xfrm>
+          <a:off x="0" y="0"/>
+          <a:ext cx="0" cy="0"/>
+          <a:chOff x="0" y="0"/>
+          <a:chExt cx="0" cy="0"/>
+        </a:xfrm>
+      </p:grpSpPr>
+      <p:sp>
+        <p:nvSpPr>
+          <p:cNvPr id="2" name="Title 1"/>
+          <p:cNvSpPr>
+            <a:spLocks noGrp="1"/>
+          </p:cNvSpPr>
+          <p:nvPr>
+            <p:ph type="title"/>
+          </p:nvPr>
+        </p:nvSpPr>
+        <p:spPr>
+          <a:xfrm>
+            <a:off x="1446212" y="609600"/>
+            <a:ext cx="9302752" cy="2992904"/>
+          </a:xfrm>
+        </p:spPr>
+        <p:txBody>
+          <a:bodyPr anchor="ctr"/>
+          <a:lstStyle>
+            <a:lvl1pPr>
+              <a:defRPr sz="3200"/>
+            </a:lvl1pPr>
+          </a:lstStyle>
+          <a:p>
+            <a:r>
+              <a:rPr lang="en-US"/>
+              <a:t>Click to edit Master title style</a:t>
+            </a:r>
+            <a:endParaRPr lang="en-US" dirty="0"/>
+          </a:p>
+        </p:txBody>
+      </p:sp>
+      <p:sp>
+        <p:nvSpPr>
+          <p:cNvPr id="12" name="Text Placeholder 3"/>
+          <p:cNvSpPr>
+            <a:spLocks noGrp="1"/>
+          </p:cNvSpPr>
+          <p:nvPr>
+            <p:ph type="body" sz="half" idx="13"/>
+          </p:nvPr>
+        </p:nvSpPr>
+        <p:spPr>
+          <a:xfrm>
+            <a:off x="1720644" y="3610032"/>
+            <a:ext cx="8752299" cy="532749"/>
+          </a:xfrm>
+        </p:spPr>
+        <p:txBody>
+          <a:bodyPr anchor="t">
+            <a:normAutofit/>
+          </a:bodyPr>
+          <a:lstStyle>
+            <a:lvl1pPr marL="0" indent="0" algn="r">
+              <a:buNone/>
+              <a:defRPr sz="1400"/>
+            </a:lvl1pPr>
+            <a:lvl2pPr marL="457200" indent="0">
+              <a:buNone/>
+              <a:defRPr sz="1400"/>
+            </a:lvl2pPr>
+            <a:lvl3pPr marL="914400" indent="0">
+              <a:buNone/>
+              <a:defRPr sz="1200"/>
+            </a:lvl3pPr>
+            <a:lvl4pPr marL="1371600" indent="0">
+              <a:buNone/>
+              <a:defRPr sz="1000"/>
+            </a:lvl4pPr>
+            <a:lvl5pPr marL="1828800" indent="0">
+              <a:buNone/>
+              <a:defRPr sz="1000"/>
+            </a:lvl5pPr>
+            <a:lvl6pPr marL="2286000" indent="0">
+              <a:buNone/>
+              <a:defRPr sz="1000"/>
+            </a:lvl6pPr>
+            <a:lvl7pPr marL="2743200" indent="0">
+              <a:buNone/>
+              <a:defRPr sz="1000"/>
+            </a:lvl7pPr>
+            <a:lvl8pPr marL="3200400" indent="0">
+              <a:buNone/>
+              <a:defRPr sz="1000"/>
+            </a:lvl8pPr>
+            <a:lvl9pPr marL="3657600" indent="0">
+              <a:buNone/>
+              <a:defRPr sz="1000"/>
+            </a:lvl9pPr>
+          </a:lstStyle>
+          <a:p>
+            <a:pPr lvl="0"/>
+            <a:r>
+              <a:rPr lang="en-US"/>
+              <a:t>Click to edit Master text styles</a:t>
+            </a:r>
+          </a:p>
+        </p:txBody>
+      </p:sp>
+      <p:sp>
+        <p:nvSpPr>
+          <p:cNvPr id="4" name="Text Placeholder 3"/>
+          <p:cNvSpPr>
+            <a:spLocks noGrp="1"/>
+          </p:cNvSpPr>
+          <p:nvPr>
+            <p:ph type="body" sz="half" idx="2"/>
+          </p:nvPr>
+        </p:nvSpPr>
+        <p:spPr>
+          <a:xfrm>
+            <a:off x="913794" y="4304353"/>
+            <a:ext cx="10353763" cy="1489496"/>
+          </a:xfrm>
+        </p:spPr>
+        <p:txBody>
+          <a:bodyPr anchor="ctr">
+            <a:normAutofit/>
+          </a:bodyPr>
+          <a:lstStyle>
+            <a:lvl1pPr marL="0" indent="0" algn="ctr">
+              <a:buNone/>
+              <a:defRPr sz="1600"/>
+            </a:lvl1pPr>
+            <a:lvl2pPr marL="457200" indent="0">
+              <a:buNone/>
+              <a:defRPr sz="1400"/>
+            </a:lvl2pPr>
+            <a:lvl3pPr marL="914400" indent="0">
+              <a:buNone/>
+              <a:defRPr sz="1200"/>
+            </a:lvl3pPr>
+            <a:lvl4pPr marL="1371600" indent="0">
+              <a:buNone/>
+              <a:defRPr sz="1000"/>
+            </a:lvl4pPr>
+            <a:lvl5pPr marL="1828800" indent="0">
+              <a:buNone/>
+              <a:defRPr sz="1000"/>
+            </a:lvl5pPr>
+            <a:lvl6pPr marL="2286000" indent="0">
+              <a:buNone/>
+              <a:defRPr sz="1000"/>
+            </a:lvl6pPr>
+            <a:lvl7pPr marL="2743200" indent="0">
+              <a:buNone/>
+              <a:defRPr sz="1000"/>
+            </a:lvl7pPr>
+            <a:lvl8pPr marL="3200400" indent="0">
+              <a:buNone/>
+              <a:defRPr sz="1000"/>
+            </a:lvl8pPr>
+            <a:lvl9pPr marL="3657600" indent="0">
+              <a:buNone/>
+              <a:defRPr sz="1000"/>
+            </a:lvl9pPr>
+          </a:lstStyle>
+          <a:p>
+            <a:pPr lvl="0"/>
+            <a:r>
+              <a:rPr lang="en-US"/>
+              <a:t>Click to edit Master text styles</a:t>
+            </a:r>
+          </a:p>
+        </p:txBody>
+      </p:sp>
+      <p:sp>
+        <p:nvSpPr>
+          <p:cNvPr id="5" name="Date Placeholder 4"/>
+          <p:cNvSpPr>
+            <a:spLocks noGrp="1"/>
+          </p:cNvSpPr>
+          <p:nvPr>
+            <p:ph type="dt" sz="half" idx="10"/>
+          </p:nvPr>
+        </p:nvSpPr>
+        <p:spPr/>
+        <p:txBody>
+          <a:bodyPr/>
+          <a:lstStyle/>
+          <a:p>
+            <a:fld id="{5BCAD085-E8A6-8845-BD4E-CB4CCA059FC4}" type="datetimeFigureOut">
+              <a:rPr lang="en-US" smtClean="0"/>
+              <a:t>3/9/2026</a:t>
+            </a:fld>
+            <a:endParaRPr lang="en-US"/>
+          </a:p>
+        </p:txBody>
+      </p:sp>
+      <p:sp>
+        <p:nvSpPr>
+          <p:cNvPr id="6" name="Footer Placeholder 5"/>
+          <p:cNvSpPr>
+            <a:spLocks noGrp="1"/>
+          </p:cNvSpPr>
+          <p:nvPr>
+            <p:ph type="ftr" sz="quarter" idx="11"/>
+          </p:nvPr>
+        </p:nvSpPr>
+        <p:spPr/>
+        <p:txBody>
+          <a:bodyPr/>
+          <a:lstStyle/>
+          <a:p>
+            <a:endParaRPr lang="en-US"/>
+          </a:p>
+        </p:txBody>
+      </p:sp>
+      <p:sp>
+        <p:nvSpPr>
+          <p:cNvPr id="7" name="Slide Number Placeholder 6"/>
+          <p:cNvSpPr>
+            <a:spLocks noGrp="1"/>
+          </p:cNvSpPr>
+          <p:nvPr>
+            <p:ph type="sldNum" sz="quarter" idx="12"/>
+          </p:nvPr>
+        </p:nvSpPr>
+        <p:spPr/>
+        <p:txBody>
+          <a:bodyPr/>
+          <a:lstStyle/>
+          <a:p>
+            <a:fld id="{C1FF6DA9-008F-8B48-92A6-B652298478BF}" type="slidenum">
+              <a:rPr lang="en-US" smtClean="0"/>
+              <a:t>‹#›</a:t>
+            </a:fld>
+            <a:endParaRPr lang="en-US"/>
+          </a:p>
+        </p:txBody>
+      </p:sp>
+      <p:sp>
+        <p:nvSpPr>
+          <p:cNvPr id="11" name="TextBox 10"/>
+          <p:cNvSpPr txBox="1"/>
+          <p:nvPr/>
+        </p:nvSpPr>
+        <p:spPr>
+          <a:xfrm>
+            <a:off x="990600" y="884796"/>
+            <a:ext cx="609600" cy="584776"/>
+          </a:xfrm>
+          <a:prstGeom prst="rect">
+            <a:avLst/>
+          </a:prstGeom>
+        </p:spPr>
+        <p:txBody>
+          <a:bodyPr vert="horz" lIns="91440" tIns="45720" rIns="91440" bIns="45720" rtlCol="0" anchor="ctr">
+            <a:noAutofit/>
+          </a:bodyPr>
+          <a:lstStyle>
+            <a:lvl1pPr>
+              <a:spcBef>
+                <a:spcPct val="0"/>
+              </a:spcBef>
+              <a:buNone/>
+              <a:defRPr sz="3200" b="0" cap="all">
+                <a:ln w="3175" cmpd="sng">
+                  <a:noFill/>
+                </a:ln>
+                <a:effectLst>
+                  <a:glow rad="38100">
+                    <a:schemeClr val="bg1">
+                      <a:lumMod val="65000"/>
+                      <a:lumOff val="35000"/>
+                      <a:alpha val="40000"/>
+                    </a:schemeClr>
+                  </a:glow>
+                  <a:outerShdw blurRad="28575" dist="38100" dir="14040000" algn="tl" rotWithShape="0">
+                    <a:srgbClr val="000000">
+                      <a:alpha val="25000"/>
+                    </a:srgbClr>
+                  </a:outerShdw>
+                </a:effectLst>
+              </a:defRPr>
+            </a:lvl1pPr>
+            <a:lvl2pPr>
+              <a:defRPr>
+                <a:solidFill>
+                  <a:schemeClr val="tx2"/>
+                </a:solidFill>
+              </a:defRPr>
+            </a:lvl2pPr>
+            <a:lvl3pPr>
+              <a:defRPr>
+                <a:solidFill>
+                  <a:schemeClr val="tx2"/>
+                </a:solidFill>
+              </a:defRPr>
+            </a:lvl3pPr>
+            <a:lvl4pPr>
+              <a:defRPr>
+                <a:solidFill>
+                  <a:schemeClr val="tx2"/>
+                </a:solidFill>
+              </a:defRPr>
+            </a:lvl4pPr>
+            <a:lvl5pPr>
+              <a:defRPr>
+                <a:solidFill>
+                  <a:schemeClr val="tx2"/>
+                </a:solidFill>
+              </a:defRPr>
+            </a:lvl5pPr>
+            <a:lvl6pPr>
+              <a:defRPr>
+                <a:solidFill>
+                  <a:schemeClr val="tx2"/>
+                </a:solidFill>
+              </a:defRPr>
+            </a:lvl6pPr>
+            <a:lvl7pPr>
+              <a:defRPr>
+                <a:solidFill>
+                  <a:schemeClr val="tx2"/>
+                </a:solidFill>
+              </a:defRPr>
+            </a:lvl7pPr>
+            <a:lvl8pPr>
+              <a:defRPr>
+                <a:solidFill>
+                  <a:schemeClr val="tx2"/>
+                </a:solidFill>
+              </a:defRPr>
+            </a:lvl8pPr>
+            <a:lvl9pPr>
+              <a:defRPr>
+                <a:solidFill>
+                  <a:schemeClr val="tx2"/>
+                </a:solidFill>
+              </a:defRPr>
+            </a:lvl9pPr>
+          </a:lstStyle>
+          <a:p>
+            <a:pPr lvl="0"/>
+            <a:r>
+              <a:rPr lang="en-US" sz="8000" dirty="0">
+                <a:solidFill>
+                  <a:schemeClr val="tx1"/>
+                </a:solidFill>
+                <a:effectLst/>
+              </a:rPr>
+              <a:t>“</a:t>
+            </a:r>
+          </a:p>
+        </p:txBody>
+      </p:sp>
+      <p:sp>
+        <p:nvSpPr>
+          <p:cNvPr id="13" name="TextBox 12"/>
+          <p:cNvSpPr txBox="1"/>
+          <p:nvPr/>
+        </p:nvSpPr>
+        <p:spPr>
+          <a:xfrm>
+            <a:off x="10504716" y="2928258"/>
+            <a:ext cx="609600" cy="584776"/>
+          </a:xfrm>
+          <a:prstGeom prst="rect">
+            <a:avLst/>
+          </a:prstGeom>
+        </p:spPr>
+        <p:txBody>
+          <a:bodyPr vert="horz" lIns="91440" tIns="45720" rIns="91440" bIns="45720" rtlCol="0" anchor="ctr">
+            <a:noAutofit/>
+          </a:bodyPr>
+          <a:lstStyle>
+            <a:lvl1pPr>
+              <a:spcBef>
+                <a:spcPct val="0"/>
+              </a:spcBef>
+              <a:buNone/>
+              <a:defRPr sz="3200" b="0" cap="all">
+                <a:ln w="3175" cmpd="sng">
+                  <a:noFill/>
+                </a:ln>
+                <a:effectLst>
+                  <a:glow rad="38100">
+                    <a:schemeClr val="bg1">
+                      <a:lumMod val="65000"/>
+                      <a:lumOff val="35000"/>
+                      <a:alpha val="40000"/>
+                    </a:schemeClr>
+                  </a:glow>
+                  <a:outerShdw blurRad="28575" dist="38100" dir="14040000" algn="tl" rotWithShape="0">
+                    <a:srgbClr val="000000">
+                      <a:alpha val="25000"/>
+                    </a:srgbClr>
+                  </a:outerShdw>
+                </a:effectLst>
+              </a:defRPr>
+            </a:lvl1pPr>
+            <a:lvl2pPr>
+              <a:defRPr>
+                <a:solidFill>
+                  <a:schemeClr val="tx2"/>
+                </a:solidFill>
+              </a:defRPr>
+            </a:lvl2pPr>
+            <a:lvl3pPr>
+              <a:defRPr>
+                <a:solidFill>
+                  <a:schemeClr val="tx2"/>
+                </a:solidFill>
+              </a:defRPr>
+            </a:lvl3pPr>
+            <a:lvl4pPr>
+              <a:defRPr>
+                <a:solidFill>
+                  <a:schemeClr val="tx2"/>
+                </a:solidFill>
+              </a:defRPr>
+            </a:lvl4pPr>
+            <a:lvl5pPr>
+              <a:defRPr>
+                <a:solidFill>
+                  <a:schemeClr val="tx2"/>
+                </a:solidFill>
+              </a:defRPr>
+            </a:lvl5pPr>
+            <a:lvl6pPr>
+              <a:defRPr>
+                <a:solidFill>
+                  <a:schemeClr val="tx2"/>
+                </a:solidFill>
+              </a:defRPr>
+            </a:lvl6pPr>
+            <a:lvl7pPr>
+              <a:defRPr>
+                <a:solidFill>
+                  <a:schemeClr val="tx2"/>
+                </a:solidFill>
+              </a:defRPr>
+            </a:lvl7pPr>
+            <a:lvl8pPr>
+              <a:defRPr>
+                <a:solidFill>
+                  <a:schemeClr val="tx2"/>
+                </a:solidFill>
+              </a:defRPr>
+            </a:lvl8pPr>
+            <a:lvl9pPr>
+              <a:defRPr>
+                <a:solidFill>
+                  <a:schemeClr val="tx2"/>
+                </a:solidFill>
+              </a:defRPr>
+            </a:lvl9pPr>
+          </a:lstStyle>
+          <a:p>
+            <a:pPr lvl="0" algn="r"/>
+            <a:r>
+              <a:rPr lang="en-US" sz="8000" dirty="0">
+                <a:solidFill>
+                  <a:schemeClr val="tx1"/>
+                </a:solidFill>
+                <a:effectLst/>
+              </a:rPr>
+              <a:t>”</a:t>
+            </a:r>
+          </a:p>
+        </p:txBody>
+      </p:sp>
+    </p:spTree>
+    <p:extLst>
+      <p:ext uri="{BB962C8B-B14F-4D97-AF65-F5344CB8AC3E}">
+        <p14:creationId xmlns:p14="http://schemas.microsoft.com/office/powerpoint/2010/main" val="2983370122"/>
+      </p:ext>
+    </p:extLst>
+  </p:cSld>
+  <p:clrMapOvr>
+    <a:masterClrMapping/>
+  </p:clrMapOvr>
+</p:sldLayout>
+</file>
+
+<file path=ppt/slideLayouts/slideLayout13.xml><?xml version="1.0" encoding="utf-8"?>
+<p:sldLayout xmlns:a="http://schemas.openxmlformats.org/drawingml/2006/main" xmlns:r="http://schemas.openxmlformats.org/officeDocument/2006/relationships" xmlns:p="http://schemas.openxmlformats.org/presentationml/2006/main" preserve="1">
+  <p:cSld name="Name Card">
+    <p:spTree>
+      <p:nvGrpSpPr>
+        <p:cNvPr id="1" name=""/>
+        <p:cNvGrpSpPr/>
+        <p:nvPr/>
+      </p:nvGrpSpPr>
+      <p:grpSpPr>
+        <a:xfrm>
+          <a:off x="0" y="0"/>
+          <a:ext cx="0" cy="0"/>
+          <a:chOff x="0" y="0"/>
+          <a:chExt cx="0" cy="0"/>
+        </a:xfrm>
+      </p:grpSpPr>
+      <p:sp>
+        <p:nvSpPr>
+          <p:cNvPr id="2" name="Title 1"/>
+          <p:cNvSpPr>
+            <a:spLocks noGrp="1"/>
+          </p:cNvSpPr>
+          <p:nvPr>
+            <p:ph type="title"/>
+          </p:nvPr>
+        </p:nvSpPr>
+        <p:spPr>
+          <a:xfrm>
+            <a:off x="913794" y="2126942"/>
+            <a:ext cx="10353763" cy="2511835"/>
+          </a:xfrm>
+        </p:spPr>
+        <p:txBody>
+          <a:bodyPr anchor="b"/>
+          <a:lstStyle>
+            <a:lvl1pPr>
+              <a:defRPr sz="3200"/>
+            </a:lvl1pPr>
+          </a:lstStyle>
+          <a:p>
+            <a:r>
+              <a:rPr lang="en-US"/>
+              <a:t>Click to edit Master title style</a:t>
+            </a:r>
+            <a:endParaRPr lang="en-US" dirty="0"/>
+          </a:p>
+        </p:txBody>
+      </p:sp>
+      <p:sp>
+        <p:nvSpPr>
+          <p:cNvPr id="4" name="Text Placeholder 3"/>
+          <p:cNvSpPr>
+            <a:spLocks noGrp="1"/>
+          </p:cNvSpPr>
+          <p:nvPr>
+            <p:ph type="body" sz="half" idx="2"/>
+          </p:nvPr>
+        </p:nvSpPr>
+        <p:spPr>
+          <a:xfrm>
+            <a:off x="913784" y="4650556"/>
+            <a:ext cx="10352199" cy="1140644"/>
+          </a:xfrm>
+        </p:spPr>
+        <p:txBody>
+          <a:bodyPr anchor="t"/>
+          <a:lstStyle>
+            <a:lvl1pPr marL="0" indent="0" algn="ctr">
+              <a:buNone/>
+              <a:defRPr sz="1600"/>
+            </a:lvl1pPr>
+            <a:lvl2pPr marL="457200" indent="0">
+              <a:buNone/>
+              <a:defRPr sz="1400"/>
+            </a:lvl2pPr>
+            <a:lvl3pPr marL="914400" indent="0">
+              <a:buNone/>
+              <a:defRPr sz="1200"/>
+            </a:lvl3pPr>
+            <a:lvl4pPr marL="1371600" indent="0">
+              <a:buNone/>
+              <a:defRPr sz="1000"/>
+            </a:lvl4pPr>
+            <a:lvl5pPr marL="1828800" indent="0">
+              <a:buNone/>
+              <a:defRPr sz="1000"/>
+            </a:lvl5pPr>
+            <a:lvl6pPr marL="2286000" indent="0">
+              <a:buNone/>
+              <a:defRPr sz="1000"/>
+            </a:lvl6pPr>
+            <a:lvl7pPr marL="2743200" indent="0">
+              <a:buNone/>
+              <a:defRPr sz="1000"/>
+            </a:lvl7pPr>
+            <a:lvl8pPr marL="3200400" indent="0">
+              <a:buNone/>
+              <a:defRPr sz="1000"/>
+            </a:lvl8pPr>
+            <a:lvl9pPr marL="3657600" indent="0">
+              <a:buNone/>
+              <a:defRPr sz="1000"/>
+            </a:lvl9pPr>
+          </a:lstStyle>
+          <a:p>
+            <a:pPr lvl="0"/>
+            <a:r>
+              <a:rPr lang="en-US"/>
+              <a:t>Click to edit Master text styles</a:t>
+            </a:r>
+          </a:p>
+        </p:txBody>
+      </p:sp>
+      <p:sp>
+        <p:nvSpPr>
+          <p:cNvPr id="5" name="Date Placeholder 4"/>
+          <p:cNvSpPr>
+            <a:spLocks noGrp="1"/>
+          </p:cNvSpPr>
+          <p:nvPr>
+            <p:ph type="dt" sz="half" idx="10"/>
+          </p:nvPr>
+        </p:nvSpPr>
+        <p:spPr/>
+        <p:txBody>
+          <a:bodyPr/>
+          <a:lstStyle/>
+          <a:p>
+            <a:fld id="{5BCAD085-E8A6-8845-BD4E-CB4CCA059FC4}" type="datetimeFigureOut">
+              <a:rPr lang="en-US" smtClean="0"/>
+              <a:t>3/9/2026</a:t>
+            </a:fld>
+            <a:endParaRPr lang="en-US"/>
+          </a:p>
+        </p:txBody>
+      </p:sp>
+      <p:sp>
+        <p:nvSpPr>
+          <p:cNvPr id="6" name="Footer Placeholder 5"/>
+          <p:cNvSpPr>
+            <a:spLocks noGrp="1"/>
+          </p:cNvSpPr>
+          <p:nvPr>
+            <p:ph type="ftr" sz="quarter" idx="11"/>
+          </p:nvPr>
+        </p:nvSpPr>
+        <p:spPr/>
+        <p:txBody>
+          <a:bodyPr/>
+          <a:lstStyle/>
+          <a:p>
+            <a:endParaRPr lang="en-US"/>
+          </a:p>
+        </p:txBody>
+      </p:sp>
+      <p:sp>
+        <p:nvSpPr>
+          <p:cNvPr id="7" name="Slide Number Placeholder 6"/>
+          <p:cNvSpPr>
+            <a:spLocks noGrp="1"/>
+          </p:cNvSpPr>
+          <p:nvPr>
+            <p:ph type="sldNum" sz="quarter" idx="12"/>
+          </p:nvPr>
+        </p:nvSpPr>
+        <p:spPr/>
+        <p:txBody>
+          <a:bodyPr/>
+          <a:lstStyle/>
+          <a:p>
+            <a:fld id="{C1FF6DA9-008F-8B48-92A6-B652298478BF}" type="slidenum">
+              <a:rPr lang="en-US" smtClean="0"/>
+              <a:t>‹#›</a:t>
+            </a:fld>
+            <a:endParaRPr lang="en-US"/>
+          </a:p>
+        </p:txBody>
+      </p:sp>
+    </p:spTree>
+    <p:extLst>
+      <p:ext uri="{BB962C8B-B14F-4D97-AF65-F5344CB8AC3E}">
+        <p14:creationId xmlns:p14="http://schemas.microsoft.com/office/powerpoint/2010/main" val="3551128649"/>
+      </p:ext>
+    </p:extLst>
+  </p:cSld>
+  <p:clrMapOvr>
+    <a:masterClrMapping/>
+  </p:clrMapOvr>
+</p:sldLayout>
+</file>
+
+<file path=ppt/slideLayouts/slideLayout14.xml><?xml version="1.0" encoding="utf-8"?>
+<p:sldLayout xmlns:a="http://schemas.openxmlformats.org/drawingml/2006/main" xmlns:r="http://schemas.openxmlformats.org/officeDocument/2006/relationships" xmlns:p="http://schemas.openxmlformats.org/presentationml/2006/main" preserve="1">
+  <p:cSld name="3 Column">
+    <p:spTree>
+      <p:nvGrpSpPr>
+        <p:cNvPr id="1" name=""/>
+        <p:cNvGrpSpPr/>
+        <p:nvPr/>
+      </p:nvGrpSpPr>
+      <p:grpSpPr>
+        <a:xfrm>
+          <a:off x="0" y="0"/>
+          <a:ext cx="0" cy="0"/>
+          <a:chOff x="0" y="0"/>
+          <a:chExt cx="0" cy="0"/>
+        </a:xfrm>
+      </p:grpSpPr>
+      <p:sp>
+        <p:nvSpPr>
+          <p:cNvPr id="15" name="Title 1"/>
+          <p:cNvSpPr>
+            <a:spLocks noGrp="1"/>
+          </p:cNvSpPr>
+          <p:nvPr>
+            <p:ph type="title"/>
+          </p:nvPr>
+        </p:nvSpPr>
+        <p:spPr>
+          <a:xfrm>
+            <a:off x="913795" y="609600"/>
+            <a:ext cx="10353762" cy="970450"/>
+          </a:xfrm>
+        </p:spPr>
+        <p:txBody>
+          <a:bodyPr/>
+          <a:lstStyle/>
+          <a:p>
+            <a:r>
+              <a:rPr lang="en-US"/>
+              <a:t>Click to edit Master title style</a:t>
+            </a:r>
+            <a:endParaRPr lang="en-US" dirty="0"/>
+          </a:p>
+        </p:txBody>
+      </p:sp>
+      <p:sp>
+        <p:nvSpPr>
+          <p:cNvPr id="7" name="Text Placeholder 2"/>
+          <p:cNvSpPr>
+            <a:spLocks noGrp="1"/>
+          </p:cNvSpPr>
+          <p:nvPr>
+            <p:ph type="body" idx="1"/>
+          </p:nvPr>
+        </p:nvSpPr>
+        <p:spPr>
+          <a:xfrm>
+            <a:off x="913795" y="1885950"/>
+            <a:ext cx="3300984" cy="576262"/>
+          </a:xfrm>
+        </p:spPr>
+        <p:txBody>
+          <a:bodyPr anchor="b">
+            <a:noAutofit/>
+          </a:bodyPr>
+          <a:lstStyle>
+            <a:lvl1pPr marL="0" indent="0" algn="ctr">
+              <a:buNone/>
+              <a:defRPr sz="2400" b="0">
+                <a:solidFill>
+                  <a:schemeClr val="tx1"/>
+                </a:solidFill>
+              </a:defRPr>
+            </a:lvl1pPr>
+            <a:lvl2pPr marL="457200" indent="0">
+              <a:buNone/>
+              <a:defRPr sz="2000" b="1"/>
+            </a:lvl2pPr>
+            <a:lvl3pPr marL="914400" indent="0">
+              <a:buNone/>
+              <a:defRPr sz="1800" b="1"/>
+            </a:lvl3pPr>
+            <a:lvl4pPr marL="1371600" indent="0">
+              <a:buNone/>
+              <a:defRPr sz="1600" b="1"/>
+            </a:lvl4pPr>
+            <a:lvl5pPr marL="1828800" indent="0">
+              <a:buNone/>
+              <a:defRPr sz="1600" b="1"/>
+            </a:lvl5pPr>
+            <a:lvl6pPr marL="2286000" indent="0">
+              <a:buNone/>
+              <a:defRPr sz="1600" b="1"/>
+            </a:lvl6pPr>
+            <a:lvl7pPr marL="2743200" indent="0">
+              <a:buNone/>
+              <a:defRPr sz="1600" b="1"/>
+            </a:lvl7pPr>
+            <a:lvl8pPr marL="3200400" indent="0">
+              <a:buNone/>
+              <a:defRPr sz="1600" b="1"/>
+            </a:lvl8pPr>
+            <a:lvl9pPr marL="3657600" indent="0">
+              <a:buNone/>
+              <a:defRPr sz="1600" b="1"/>
+            </a:lvl9pPr>
+          </a:lstStyle>
+          <a:p>
+            <a:pPr lvl="0"/>
+            <a:r>
+              <a:rPr lang="en-US"/>
+              <a:t>Click to edit Master text styles</a:t>
+            </a:r>
+          </a:p>
+        </p:txBody>
+      </p:sp>
+      <p:sp>
+        <p:nvSpPr>
+          <p:cNvPr id="8" name="Text Placeholder 3"/>
+          <p:cNvSpPr>
+            <a:spLocks noGrp="1"/>
+          </p:cNvSpPr>
+          <p:nvPr>
+            <p:ph type="body" sz="half" idx="15"/>
+          </p:nvPr>
+        </p:nvSpPr>
+        <p:spPr>
+          <a:xfrm>
+            <a:off x="913795" y="2571750"/>
+            <a:ext cx="3300984" cy="3219450"/>
+          </a:xfrm>
+        </p:spPr>
+        <p:txBody>
+          <a:bodyPr anchor="t">
+            <a:normAutofit/>
+          </a:bodyPr>
+          <a:lstStyle>
+            <a:lvl1pPr marL="0" indent="0" algn="ctr">
+              <a:buNone/>
+              <a:defRPr sz="1400"/>
+            </a:lvl1pPr>
+            <a:lvl2pPr marL="457200" indent="0">
+              <a:buNone/>
+              <a:defRPr sz="1200"/>
+            </a:lvl2pPr>
+            <a:lvl3pPr marL="914400" indent="0">
+              <a:buNone/>
+              <a:defRPr sz="1000"/>
+            </a:lvl3pPr>
+            <a:lvl4pPr marL="1371600" indent="0">
+              <a:buNone/>
+              <a:defRPr sz="900"/>
+            </a:lvl4pPr>
+            <a:lvl5pPr marL="1828800" indent="0">
+              <a:buNone/>
+              <a:defRPr sz="900"/>
+            </a:lvl5pPr>
+            <a:lvl6pPr marL="2286000" indent="0">
+              <a:buNone/>
+              <a:defRPr sz="900"/>
+            </a:lvl6pPr>
+            <a:lvl7pPr marL="2743200" indent="0">
+              <a:buNone/>
+              <a:defRPr sz="900"/>
+            </a:lvl7pPr>
+            <a:lvl8pPr marL="3200400" indent="0">
+              <a:buNone/>
+              <a:defRPr sz="900"/>
+            </a:lvl8pPr>
+            <a:lvl9pPr marL="3657600" indent="0">
+              <a:buNone/>
+              <a:defRPr sz="900"/>
+            </a:lvl9pPr>
+          </a:lstStyle>
+          <a:p>
+            <a:pPr lvl="0"/>
+            <a:r>
+              <a:rPr lang="en-US"/>
+              <a:t>Click to edit Master text styles</a:t>
+            </a:r>
+          </a:p>
+        </p:txBody>
+      </p:sp>
+      <p:sp>
+        <p:nvSpPr>
+          <p:cNvPr id="9" name="Text Placeholder 4"/>
+          <p:cNvSpPr>
+            <a:spLocks noGrp="1"/>
+          </p:cNvSpPr>
+          <p:nvPr>
+            <p:ph type="body" sz="quarter" idx="3"/>
+          </p:nvPr>
+        </p:nvSpPr>
+        <p:spPr>
+          <a:xfrm>
+            <a:off x="4446711" y="1885950"/>
+            <a:ext cx="3300984" cy="576262"/>
+          </a:xfrm>
+        </p:spPr>
+        <p:txBody>
+          <a:bodyPr anchor="b">
+            <a:noAutofit/>
+          </a:bodyPr>
+          <a:lstStyle>
+            <a:lvl1pPr marL="0" indent="0" algn="ctr">
+              <a:buNone/>
+              <a:defRPr sz="2400" b="0">
+                <a:solidFill>
+                  <a:schemeClr val="tx1"/>
+                </a:solidFill>
+              </a:defRPr>
+            </a:lvl1pPr>
+            <a:lvl2pPr marL="457200" indent="0">
+              <a:buNone/>
+              <a:defRPr sz="2000" b="1"/>
+            </a:lvl2pPr>
+            <a:lvl3pPr marL="914400" indent="0">
+              <a:buNone/>
+              <a:defRPr sz="1800" b="1"/>
+            </a:lvl3pPr>
+            <a:lvl4pPr marL="1371600" indent="0">
+              <a:buNone/>
+              <a:defRPr sz="1600" b="1"/>
+            </a:lvl4pPr>
+            <a:lvl5pPr marL="1828800" indent="0">
+              <a:buNone/>
+              <a:defRPr sz="1600" b="1"/>
+            </a:lvl5pPr>
+            <a:lvl6pPr marL="2286000" indent="0">
+              <a:buNone/>
+              <a:defRPr sz="1600" b="1"/>
+            </a:lvl6pPr>
+            <a:lvl7pPr marL="2743200" indent="0">
+              <a:buNone/>
+              <a:defRPr sz="1600" b="1"/>
+            </a:lvl7pPr>
+            <a:lvl8pPr marL="3200400" indent="0">
+              <a:buNone/>
+              <a:defRPr sz="1600" b="1"/>
+            </a:lvl8pPr>
+            <a:lvl9pPr marL="3657600" indent="0">
+              <a:buNone/>
+              <a:defRPr sz="1600" b="1"/>
+            </a:lvl9pPr>
+          </a:lstStyle>
+          <a:p>
+            <a:pPr lvl="0"/>
+            <a:r>
+              <a:rPr lang="en-US"/>
+              <a:t>Click to edit Master text styles</a:t>
+            </a:r>
+          </a:p>
+        </p:txBody>
+      </p:sp>
+      <p:sp>
+        <p:nvSpPr>
+          <p:cNvPr id="10" name="Text Placeholder 3"/>
+          <p:cNvSpPr>
+            <a:spLocks noGrp="1"/>
+          </p:cNvSpPr>
+          <p:nvPr>
+            <p:ph type="body" sz="half" idx="16"/>
+          </p:nvPr>
+        </p:nvSpPr>
+        <p:spPr>
+          <a:xfrm>
+            <a:off x="4441435" y="2571750"/>
+            <a:ext cx="3300984" cy="3219450"/>
+          </a:xfrm>
+        </p:spPr>
+        <p:txBody>
+          <a:bodyPr anchor="t">
+            <a:normAutofit/>
+          </a:bodyPr>
+          <a:lstStyle>
+            <a:lvl1pPr marL="0" indent="0" algn="ctr">
+              <a:buNone/>
+              <a:defRPr sz="1400"/>
+            </a:lvl1pPr>
+            <a:lvl2pPr marL="457200" indent="0">
+              <a:buNone/>
+              <a:defRPr sz="1200"/>
+            </a:lvl2pPr>
+            <a:lvl3pPr marL="914400" indent="0">
+              <a:buNone/>
+              <a:defRPr sz="1000"/>
+            </a:lvl3pPr>
+            <a:lvl4pPr marL="1371600" indent="0">
+              <a:buNone/>
+              <a:defRPr sz="900"/>
+            </a:lvl4pPr>
+            <a:lvl5pPr marL="1828800" indent="0">
+              <a:buNone/>
+              <a:defRPr sz="900"/>
+            </a:lvl5pPr>
+            <a:lvl6pPr marL="2286000" indent="0">
+              <a:buNone/>
+              <a:defRPr sz="900"/>
+            </a:lvl6pPr>
+            <a:lvl7pPr marL="2743200" indent="0">
+              <a:buNone/>
+              <a:defRPr sz="900"/>
+            </a:lvl7pPr>
+            <a:lvl8pPr marL="3200400" indent="0">
+              <a:buNone/>
+              <a:defRPr sz="900"/>
+            </a:lvl8pPr>
+            <a:lvl9pPr marL="3657600" indent="0">
+              <a:buNone/>
+              <a:defRPr sz="900"/>
+            </a:lvl9pPr>
+          </a:lstStyle>
+          <a:p>
+            <a:pPr lvl="0"/>
+            <a:r>
+              <a:rPr lang="en-US"/>
+              <a:t>Click to edit Master text styles</a:t>
+            </a:r>
+          </a:p>
+        </p:txBody>
+      </p:sp>
+      <p:sp>
+        <p:nvSpPr>
+          <p:cNvPr id="11" name="Text Placeholder 4"/>
+          <p:cNvSpPr>
+            <a:spLocks noGrp="1"/>
+          </p:cNvSpPr>
+          <p:nvPr>
+            <p:ph type="body" sz="quarter" idx="13"/>
+          </p:nvPr>
+        </p:nvSpPr>
+        <p:spPr>
+          <a:xfrm>
+            <a:off x="7966572" y="1885950"/>
+            <a:ext cx="3300984" cy="576262"/>
+          </a:xfrm>
+        </p:spPr>
+        <p:txBody>
+          <a:bodyPr anchor="b">
+            <a:noAutofit/>
+          </a:bodyPr>
+          <a:lstStyle>
+            <a:lvl1pPr marL="0" indent="0" algn="ctr">
+              <a:buNone/>
+              <a:defRPr sz="2400" b="0">
+                <a:solidFill>
+                  <a:schemeClr val="tx1"/>
+                </a:solidFill>
+              </a:defRPr>
+            </a:lvl1pPr>
+            <a:lvl2pPr marL="457200" indent="0">
+              <a:buNone/>
+              <a:defRPr sz="2000" b="1"/>
+            </a:lvl2pPr>
+            <a:lvl3pPr marL="914400" indent="0">
+              <a:buNone/>
+              <a:defRPr sz="1800" b="1"/>
+            </a:lvl3pPr>
+            <a:lvl4pPr marL="1371600" indent="0">
+              <a:buNone/>
+              <a:defRPr sz="1600" b="1"/>
+            </a:lvl4pPr>
+            <a:lvl5pPr marL="1828800" indent="0">
+              <a:buNone/>
+              <a:defRPr sz="1600" b="1"/>
+            </a:lvl5pPr>
+            <a:lvl6pPr marL="2286000" indent="0">
+              <a:buNone/>
+              <a:defRPr sz="1600" b="1"/>
+            </a:lvl6pPr>
+            <a:lvl7pPr marL="2743200" indent="0">
+              <a:buNone/>
+              <a:defRPr sz="1600" b="1"/>
+            </a:lvl7pPr>
+            <a:lvl8pPr marL="3200400" indent="0">
+              <a:buNone/>
+              <a:defRPr sz="1600" b="1"/>
+            </a:lvl8pPr>
+            <a:lvl9pPr marL="3657600" indent="0">
+              <a:buNone/>
+              <a:defRPr sz="1600" b="1"/>
+            </a:lvl9pPr>
+          </a:lstStyle>
+          <a:p>
+            <a:pPr lvl="0"/>
+            <a:r>
+              <a:rPr lang="en-US"/>
+              <a:t>Click to edit Master text styles</a:t>
+            </a:r>
+          </a:p>
+        </p:txBody>
+      </p:sp>
+      <p:sp>
+        <p:nvSpPr>
+          <p:cNvPr id="12" name="Text Placeholder 3"/>
+          <p:cNvSpPr>
+            <a:spLocks noGrp="1"/>
+          </p:cNvSpPr>
+          <p:nvPr>
+            <p:ph type="body" sz="half" idx="17"/>
+          </p:nvPr>
+        </p:nvSpPr>
+        <p:spPr>
+          <a:xfrm>
+            <a:off x="7966572" y="2571750"/>
+            <a:ext cx="3300984" cy="3219450"/>
+          </a:xfrm>
+        </p:spPr>
+        <p:txBody>
+          <a:bodyPr anchor="t">
+            <a:normAutofit/>
+          </a:bodyPr>
+          <a:lstStyle>
+            <a:lvl1pPr marL="0" indent="0" algn="ctr">
+              <a:buNone/>
+              <a:defRPr sz="1400"/>
+            </a:lvl1pPr>
+            <a:lvl2pPr marL="457200" indent="0">
+              <a:buNone/>
+              <a:defRPr sz="1200"/>
+            </a:lvl2pPr>
+            <a:lvl3pPr marL="914400" indent="0">
+              <a:buNone/>
+              <a:defRPr sz="1000"/>
+            </a:lvl3pPr>
+            <a:lvl4pPr marL="1371600" indent="0">
+              <a:buNone/>
+              <a:defRPr sz="900"/>
+            </a:lvl4pPr>
+            <a:lvl5pPr marL="1828800" indent="0">
+              <a:buNone/>
+              <a:defRPr sz="900"/>
+            </a:lvl5pPr>
+            <a:lvl6pPr marL="2286000" indent="0">
+              <a:buNone/>
+              <a:defRPr sz="900"/>
+            </a:lvl6pPr>
+            <a:lvl7pPr marL="2743200" indent="0">
+              <a:buNone/>
+              <a:defRPr sz="900"/>
+            </a:lvl7pPr>
+            <a:lvl8pPr marL="3200400" indent="0">
+              <a:buNone/>
+              <a:defRPr sz="900"/>
+            </a:lvl8pPr>
+            <a:lvl9pPr marL="3657600" indent="0">
+              <a:buNone/>
+              <a:defRPr sz="900"/>
+            </a:lvl9pPr>
+          </a:lstStyle>
+          <a:p>
+            <a:pPr lvl="0"/>
+            <a:r>
+              <a:rPr lang="en-US"/>
+              <a:t>Click to edit Master text styles</a:t>
+            </a:r>
+          </a:p>
+        </p:txBody>
+      </p:sp>
+      <p:sp>
+        <p:nvSpPr>
+          <p:cNvPr id="3" name="Date Placeholder 2"/>
+          <p:cNvSpPr>
+            <a:spLocks noGrp="1"/>
+          </p:cNvSpPr>
+          <p:nvPr>
+            <p:ph type="dt" sz="half" idx="10"/>
+          </p:nvPr>
+        </p:nvSpPr>
+        <p:spPr/>
+        <p:txBody>
+          <a:bodyPr/>
+          <a:lstStyle/>
+          <a:p>
+            <a:fld id="{5BCAD085-E8A6-8845-BD4E-CB4CCA059FC4}" type="datetimeFigureOut">
+              <a:rPr lang="en-US" smtClean="0"/>
+              <a:t>3/9/2026</a:t>
+            </a:fld>
+            <a:endParaRPr lang="en-US"/>
+          </a:p>
+        </p:txBody>
+      </p:sp>
+      <p:sp>
+        <p:nvSpPr>
+          <p:cNvPr id="4" name="Footer Placeholder 3"/>
+          <p:cNvSpPr>
+            <a:spLocks noGrp="1"/>
+          </p:cNvSpPr>
+          <p:nvPr>
+            <p:ph type="ftr" sz="quarter" idx="11"/>
+          </p:nvPr>
+        </p:nvSpPr>
+        <p:spPr/>
+        <p:txBody>
+          <a:bodyPr/>
+          <a:lstStyle/>
+          <a:p>
+            <a:endParaRPr lang="en-US"/>
+          </a:p>
+        </p:txBody>
+      </p:sp>
+      <p:sp>
+        <p:nvSpPr>
+          <p:cNvPr id="5" name="Slide Number Placeholder 4"/>
+          <p:cNvSpPr>
+            <a:spLocks noGrp="1"/>
+          </p:cNvSpPr>
+          <p:nvPr>
+            <p:ph type="sldNum" sz="quarter" idx="12"/>
+          </p:nvPr>
+        </p:nvSpPr>
+        <p:spPr/>
+        <p:txBody>
+          <a:bodyPr/>
+          <a:lstStyle/>
+          <a:p>
+            <a:fld id="{C1FF6DA9-008F-8B48-92A6-B652298478BF}" type="slidenum">
+              <a:rPr lang="en-US" smtClean="0"/>
+              <a:t>‹#›</a:t>
+            </a:fld>
+            <a:endParaRPr lang="en-US"/>
+          </a:p>
+        </p:txBody>
+      </p:sp>
+    </p:spTree>
+    <p:extLst>
+      <p:ext uri="{BB962C8B-B14F-4D97-AF65-F5344CB8AC3E}">
+        <p14:creationId xmlns:p14="http://schemas.microsoft.com/office/powerpoint/2010/main" val="3247021124"/>
+      </p:ext>
+    </p:extLst>
+  </p:cSld>
+  <p:clrMapOvr>
+    <a:masterClrMapping/>
+  </p:clrMapOvr>
+</p:sldLayout>
+</file>
+
+<file path=ppt/slideLayouts/slideLayout15.xml><?xml version="1.0" encoding="utf-8"?>
+<p:sldLayout xmlns:a="http://schemas.openxmlformats.org/drawingml/2006/main" xmlns:r="http://schemas.openxmlformats.org/officeDocument/2006/relationships" xmlns:p="http://schemas.openxmlformats.org/presentationml/2006/main" preserve="1">
+  <p:cSld name="3 Picture Column">
+    <p:spTree>
+      <p:nvGrpSpPr>
+        <p:cNvPr id="1" name=""/>
+        <p:cNvGrpSpPr/>
+        <p:nvPr/>
+      </p:nvGrpSpPr>
+      <p:grpSpPr>
+        <a:xfrm>
+          <a:off x="0" y="0"/>
+          <a:ext cx="0" cy="0"/>
+          <a:chOff x="0" y="0"/>
+          <a:chExt cx="0" cy="0"/>
+        </a:xfrm>
+      </p:grpSpPr>
+      <p:pic>
+        <p:nvPicPr>
+          <p:cNvPr id="2" name="Picture 1" descr="Slate-V2-HD-3colPhotoInset.png"/>
+          <p:cNvPicPr>
+            <a:picLocks noChangeAspect="1"/>
+          </p:cNvPicPr>
+          <p:nvPr/>
+        </p:nvPicPr>
+        <p:blipFill>
+          <a:blip r:embed="rId2">
+            <a:extLst>
+              <a:ext uri="{28A0092B-C50C-407E-A947-70E740481C1C}">
+                <a14:useLocalDpi xmlns:a14="http://schemas.microsoft.com/office/drawing/2010/main" val="0"/>
+              </a:ext>
+            </a:extLst>
+          </a:blip>
+          <a:stretch>
+            <a:fillRect/>
+          </a:stretch>
+        </p:blipFill>
+        <p:spPr>
+          <a:xfrm>
+            <a:off x="897962" y="1818214"/>
+            <a:ext cx="3339972" cy="1847851"/>
+          </a:xfrm>
+          <a:prstGeom prst="rect">
+            <a:avLst/>
+          </a:prstGeom>
+        </p:spPr>
+      </p:pic>
+      <p:pic>
+        <p:nvPicPr>
+          <p:cNvPr id="36" name="Picture 35" descr="Slate-V2-HD-3colPhotoInset.png"/>
+          <p:cNvPicPr>
+            <a:picLocks noChangeAspect="1"/>
+          </p:cNvPicPr>
+          <p:nvPr/>
+        </p:nvPicPr>
+        <p:blipFill>
+          <a:blip r:embed="rId2">
+            <a:extLst>
+              <a:ext uri="{28A0092B-C50C-407E-A947-70E740481C1C}">
+                <a14:useLocalDpi xmlns:a14="http://schemas.microsoft.com/office/drawing/2010/main" val="0"/>
+              </a:ext>
+            </a:extLst>
+          </a:blip>
+          <a:stretch>
+            <a:fillRect/>
+          </a:stretch>
+        </p:blipFill>
+        <p:spPr>
+          <a:xfrm>
+            <a:off x="4403800" y="1818214"/>
+            <a:ext cx="3339972" cy="1847851"/>
+          </a:xfrm>
+          <a:prstGeom prst="rect">
+            <a:avLst/>
+          </a:prstGeom>
+        </p:spPr>
+      </p:pic>
+      <p:pic>
+        <p:nvPicPr>
+          <p:cNvPr id="37" name="Picture 36" descr="Slate-V2-HD-3colPhotoInset.png"/>
+          <p:cNvPicPr>
+            <a:picLocks noChangeAspect="1"/>
+          </p:cNvPicPr>
+          <p:nvPr/>
+        </p:nvPicPr>
+        <p:blipFill>
+          <a:blip r:embed="rId2">
+            <a:extLst>
+              <a:ext uri="{28A0092B-C50C-407E-A947-70E740481C1C}">
+                <a14:useLocalDpi xmlns:a14="http://schemas.microsoft.com/office/drawing/2010/main" val="0"/>
+              </a:ext>
+            </a:extLst>
+          </a:blip>
+          <a:stretch>
+            <a:fillRect/>
+          </a:stretch>
+        </p:blipFill>
+        <p:spPr>
+          <a:xfrm>
+            <a:off x="7936051" y="1818214"/>
+            <a:ext cx="3339972" cy="1847851"/>
+          </a:xfrm>
+          <a:prstGeom prst="rect">
+            <a:avLst/>
+          </a:prstGeom>
+        </p:spPr>
+      </p:pic>
+      <p:sp>
+        <p:nvSpPr>
+          <p:cNvPr id="30" name="Title 1"/>
+          <p:cNvSpPr>
+            <a:spLocks noGrp="1"/>
+          </p:cNvSpPr>
+          <p:nvPr>
+            <p:ph type="title"/>
+          </p:nvPr>
+        </p:nvSpPr>
+        <p:spPr>
+          <a:xfrm>
+            <a:off x="913794" y="609600"/>
+            <a:ext cx="10353763" cy="970450"/>
+          </a:xfrm>
+        </p:spPr>
+        <p:txBody>
+          <a:bodyPr/>
+          <a:lstStyle/>
+          <a:p>
+            <a:r>
+              <a:rPr lang="en-US"/>
+              <a:t>Click to edit Master title style</a:t>
+            </a:r>
+            <a:endParaRPr lang="en-US" dirty="0"/>
+          </a:p>
+        </p:txBody>
+      </p:sp>
+      <p:sp>
+        <p:nvSpPr>
+          <p:cNvPr id="19" name="Text Placeholder 2"/>
+          <p:cNvSpPr>
+            <a:spLocks noGrp="1"/>
+          </p:cNvSpPr>
+          <p:nvPr>
+            <p:ph type="body" idx="1"/>
+          </p:nvPr>
+        </p:nvSpPr>
+        <p:spPr>
+          <a:xfrm>
+            <a:off x="913795" y="3904106"/>
+            <a:ext cx="3300984" cy="576262"/>
+          </a:xfrm>
+        </p:spPr>
+        <p:txBody>
+          <a:bodyPr anchor="b">
+            <a:noAutofit/>
+          </a:bodyPr>
+          <a:lstStyle>
+            <a:lvl1pPr marL="0" indent="0" algn="ctr">
+              <a:buNone/>
+              <a:defRPr sz="2000" b="0">
+                <a:solidFill>
+                  <a:schemeClr val="tx1"/>
+                </a:solidFill>
+              </a:defRPr>
+            </a:lvl1pPr>
+            <a:lvl2pPr marL="457200" indent="0">
+              <a:buNone/>
+              <a:defRPr sz="2000" b="1"/>
+            </a:lvl2pPr>
+            <a:lvl3pPr marL="914400" indent="0">
+              <a:buNone/>
+              <a:defRPr sz="1800" b="1"/>
+            </a:lvl3pPr>
+            <a:lvl4pPr marL="1371600" indent="0">
+              <a:buNone/>
+              <a:defRPr sz="1600" b="1"/>
+            </a:lvl4pPr>
+            <a:lvl5pPr marL="1828800" indent="0">
+              <a:buNone/>
+              <a:defRPr sz="1600" b="1"/>
+            </a:lvl5pPr>
+            <a:lvl6pPr marL="2286000" indent="0">
+              <a:buNone/>
+              <a:defRPr sz="1600" b="1"/>
+            </a:lvl6pPr>
+            <a:lvl7pPr marL="2743200" indent="0">
+              <a:buNone/>
+              <a:defRPr sz="1600" b="1"/>
+            </a:lvl7pPr>
+            <a:lvl8pPr marL="3200400" indent="0">
+              <a:buNone/>
+              <a:defRPr sz="1600" b="1"/>
+            </a:lvl8pPr>
+            <a:lvl9pPr marL="3657600" indent="0">
+              <a:buNone/>
+              <a:defRPr sz="1600" b="1"/>
+            </a:lvl9pPr>
+          </a:lstStyle>
+          <a:p>
+            <a:pPr lvl="0"/>
+            <a:r>
+              <a:rPr lang="en-US"/>
+              <a:t>Click to edit Master text styles</a:t>
+            </a:r>
+          </a:p>
+        </p:txBody>
+      </p:sp>
+      <p:sp>
+        <p:nvSpPr>
+          <p:cNvPr id="20" name="Picture Placeholder 2"/>
+          <p:cNvSpPr>
+            <a:spLocks noGrp="1" noChangeAspect="1"/>
+          </p:cNvSpPr>
+          <p:nvPr>
+            <p:ph type="pic" idx="15"/>
+          </p:nvPr>
+        </p:nvSpPr>
+        <p:spPr>
+          <a:xfrm>
+            <a:off x="1018102" y="1938918"/>
+            <a:ext cx="3092368" cy="1602954"/>
+          </a:xfrm>
+          <a:prstGeom prst="roundRect">
+            <a:avLst>
+              <a:gd name="adj" fmla="val 1858"/>
+            </a:avLst>
+          </a:prstGeom>
+          <a:effectLst>
+            <a:outerShdw blurRad="38100" dist="25400" dir="4440000">
+              <a:srgbClr val="000000">
+                <a:alpha val="36000"/>
+              </a:srgbClr>
+            </a:outerShdw>
+          </a:effectLst>
+        </p:spPr>
+        <p:txBody>
+          <a:bodyPr anchor="t">
+            <a:normAutofit/>
+          </a:bodyPr>
+          <a:lstStyle>
+            <a:lvl1pPr marL="0" indent="0" algn="ctr">
+              <a:buNone/>
+              <a:defRPr sz="1600"/>
+            </a:lvl1pPr>
+            <a:lvl2pPr marL="457200" indent="0">
+              <a:buNone/>
+              <a:defRPr sz="1600"/>
+            </a:lvl2pPr>
+            <a:lvl3pPr marL="914400" indent="0">
+              <a:buNone/>
+              <a:defRPr sz="1600"/>
+            </a:lvl3pPr>
+            <a:lvl4pPr marL="1371600" indent="0">
+              <a:buNone/>
+              <a:defRPr sz="1600"/>
+            </a:lvl4pPr>
+            <a:lvl5pPr marL="1828800" indent="0">
+              <a:buNone/>
+              <a:defRPr sz="1600"/>
+            </a:lvl5pPr>
+            <a:lvl6pPr marL="2286000" indent="0">
+              <a:buNone/>
+              <a:defRPr sz="1600"/>
+            </a:lvl6pPr>
+            <a:lvl7pPr marL="2743200" indent="0">
+              <a:buNone/>
+              <a:defRPr sz="1600"/>
+            </a:lvl7pPr>
+            <a:lvl8pPr marL="3200400" indent="0">
+              <a:buNone/>
+              <a:defRPr sz="1600"/>
+            </a:lvl8pPr>
+            <a:lvl9pPr marL="3657600" indent="0">
+              <a:buNone/>
+              <a:defRPr sz="1600"/>
+            </a:lvl9pPr>
+          </a:lstStyle>
+          <a:p>
+            <a:r>
+              <a:rPr lang="en-US"/>
+              <a:t>Click icon to add picture</a:t>
+            </a:r>
+            <a:endParaRPr lang="en-US" dirty="0"/>
+          </a:p>
+        </p:txBody>
+      </p:sp>
+      <p:sp>
+        <p:nvSpPr>
+          <p:cNvPr id="21" name="Text Placeholder 3"/>
+          <p:cNvSpPr>
+            <a:spLocks noGrp="1"/>
+          </p:cNvSpPr>
+          <p:nvPr>
+            <p:ph type="body" sz="half" idx="18"/>
+          </p:nvPr>
+        </p:nvSpPr>
+        <p:spPr>
+          <a:xfrm>
+            <a:off x="913795" y="4480368"/>
+            <a:ext cx="3300984" cy="1310833"/>
+          </a:xfrm>
+        </p:spPr>
+        <p:txBody>
+          <a:bodyPr anchor="t">
+            <a:normAutofit/>
+          </a:bodyPr>
+          <a:lstStyle>
+            <a:lvl1pPr marL="0" indent="0" algn="ctr">
+              <a:buNone/>
+              <a:defRPr sz="1400"/>
+            </a:lvl1pPr>
+            <a:lvl2pPr marL="457200" indent="0">
+              <a:buNone/>
+              <a:defRPr sz="1200"/>
+            </a:lvl2pPr>
+            <a:lvl3pPr marL="914400" indent="0">
+              <a:buNone/>
+              <a:defRPr sz="1000"/>
+            </a:lvl3pPr>
+            <a:lvl4pPr marL="1371600" indent="0">
+              <a:buNone/>
+              <a:defRPr sz="900"/>
+            </a:lvl4pPr>
+            <a:lvl5pPr marL="1828800" indent="0">
+              <a:buNone/>
+              <a:defRPr sz="900"/>
+            </a:lvl5pPr>
+            <a:lvl6pPr marL="2286000" indent="0">
+              <a:buNone/>
+              <a:defRPr sz="900"/>
+            </a:lvl6pPr>
+            <a:lvl7pPr marL="2743200" indent="0">
+              <a:buNone/>
+              <a:defRPr sz="900"/>
+            </a:lvl7pPr>
+            <a:lvl8pPr marL="3200400" indent="0">
+              <a:buNone/>
+              <a:defRPr sz="900"/>
+            </a:lvl8pPr>
+            <a:lvl9pPr marL="3657600" indent="0">
+              <a:buNone/>
+              <a:defRPr sz="900"/>
+            </a:lvl9pPr>
+          </a:lstStyle>
+          <a:p>
+            <a:pPr lvl="0"/>
+            <a:r>
+              <a:rPr lang="en-US"/>
+              <a:t>Click to edit Master text styles</a:t>
+            </a:r>
+          </a:p>
+        </p:txBody>
+      </p:sp>
+      <p:sp>
+        <p:nvSpPr>
+          <p:cNvPr id="22" name="Text Placeholder 4"/>
+          <p:cNvSpPr>
+            <a:spLocks noGrp="1"/>
+          </p:cNvSpPr>
+          <p:nvPr>
+            <p:ph type="body" sz="quarter" idx="3"/>
+          </p:nvPr>
+        </p:nvSpPr>
+        <p:spPr>
+          <a:xfrm>
+            <a:off x="4442788" y="3904106"/>
+            <a:ext cx="3300984" cy="576262"/>
+          </a:xfrm>
+        </p:spPr>
+        <p:txBody>
+          <a:bodyPr anchor="b">
+            <a:noAutofit/>
+          </a:bodyPr>
+          <a:lstStyle>
+            <a:lvl1pPr marL="0" indent="0" algn="ctr">
+              <a:buNone/>
+              <a:defRPr sz="2000" b="0">
+                <a:solidFill>
+                  <a:schemeClr val="tx1"/>
+                </a:solidFill>
+              </a:defRPr>
+            </a:lvl1pPr>
+            <a:lvl2pPr marL="457200" indent="0">
+              <a:buNone/>
+              <a:defRPr sz="2000" b="1"/>
+            </a:lvl2pPr>
+            <a:lvl3pPr marL="914400" indent="0">
+              <a:buNone/>
+              <a:defRPr sz="1800" b="1"/>
+            </a:lvl3pPr>
+            <a:lvl4pPr marL="1371600" indent="0">
+              <a:buNone/>
+              <a:defRPr sz="1600" b="1"/>
+            </a:lvl4pPr>
+            <a:lvl5pPr marL="1828800" indent="0">
+              <a:buNone/>
+              <a:defRPr sz="1600" b="1"/>
+            </a:lvl5pPr>
+            <a:lvl6pPr marL="2286000" indent="0">
+              <a:buNone/>
+              <a:defRPr sz="1600" b="1"/>
+            </a:lvl6pPr>
+            <a:lvl7pPr marL="2743200" indent="0">
+              <a:buNone/>
+              <a:defRPr sz="1600" b="1"/>
+            </a:lvl7pPr>
+            <a:lvl8pPr marL="3200400" indent="0">
+              <a:buNone/>
+              <a:defRPr sz="1600" b="1"/>
+            </a:lvl8pPr>
+            <a:lvl9pPr marL="3657600" indent="0">
+              <a:buNone/>
+              <a:defRPr sz="1600" b="1"/>
+            </a:lvl9pPr>
+          </a:lstStyle>
+          <a:p>
+            <a:pPr lvl="0"/>
+            <a:r>
+              <a:rPr lang="en-US"/>
+              <a:t>Click to edit Master text styles</a:t>
+            </a:r>
+          </a:p>
+        </p:txBody>
+      </p:sp>
+      <p:sp>
+        <p:nvSpPr>
+          <p:cNvPr id="23" name="Picture Placeholder 2"/>
+          <p:cNvSpPr>
+            <a:spLocks noGrp="1" noChangeAspect="1"/>
+          </p:cNvSpPr>
+          <p:nvPr>
+            <p:ph type="pic" idx="21"/>
+          </p:nvPr>
+        </p:nvSpPr>
+        <p:spPr>
+          <a:xfrm>
+            <a:off x="4545743" y="1939094"/>
+            <a:ext cx="3092368" cy="1608164"/>
+          </a:xfrm>
+          <a:prstGeom prst="roundRect">
+            <a:avLst>
+              <a:gd name="adj" fmla="val 1858"/>
+            </a:avLst>
+          </a:prstGeom>
+          <a:effectLst>
+            <a:outerShdw blurRad="38100" dist="25400" dir="4440000">
+              <a:srgbClr val="000000">
+                <a:alpha val="36000"/>
+              </a:srgbClr>
+            </a:outerShdw>
+          </a:effectLst>
+        </p:spPr>
+        <p:txBody>
+          <a:bodyPr anchor="t">
+            <a:normAutofit/>
+          </a:bodyPr>
+          <a:lstStyle>
+            <a:lvl1pPr marL="0" indent="0" algn="ctr">
+              <a:buNone/>
+              <a:defRPr sz="1600"/>
+            </a:lvl1pPr>
+            <a:lvl2pPr marL="457200" indent="0">
+              <a:buNone/>
+              <a:defRPr sz="1600"/>
+            </a:lvl2pPr>
+            <a:lvl3pPr marL="914400" indent="0">
+              <a:buNone/>
+              <a:defRPr sz="1600"/>
+            </a:lvl3pPr>
+            <a:lvl4pPr marL="1371600" indent="0">
+              <a:buNone/>
+              <a:defRPr sz="1600"/>
+            </a:lvl4pPr>
+            <a:lvl5pPr marL="1828800" indent="0">
+              <a:buNone/>
+              <a:defRPr sz="1600"/>
+            </a:lvl5pPr>
+            <a:lvl6pPr marL="2286000" indent="0">
+              <a:buNone/>
+              <a:defRPr sz="1600"/>
+            </a:lvl6pPr>
+            <a:lvl7pPr marL="2743200" indent="0">
+              <a:buNone/>
+              <a:defRPr sz="1600"/>
+            </a:lvl7pPr>
+            <a:lvl8pPr marL="3200400" indent="0">
+              <a:buNone/>
+              <a:defRPr sz="1600"/>
+            </a:lvl8pPr>
+            <a:lvl9pPr marL="3657600" indent="0">
+              <a:buNone/>
+              <a:defRPr sz="1600"/>
+            </a:lvl9pPr>
+          </a:lstStyle>
+          <a:p>
+            <a:r>
+              <a:rPr lang="en-US"/>
+              <a:t>Click icon to add picture</a:t>
+            </a:r>
+            <a:endParaRPr lang="en-US" dirty="0"/>
+          </a:p>
+        </p:txBody>
+      </p:sp>
+      <p:sp>
+        <p:nvSpPr>
+          <p:cNvPr id="24" name="Text Placeholder 3"/>
+          <p:cNvSpPr>
+            <a:spLocks noGrp="1"/>
+          </p:cNvSpPr>
+          <p:nvPr>
+            <p:ph type="body" sz="half" idx="19"/>
+          </p:nvPr>
+        </p:nvSpPr>
+        <p:spPr>
+          <a:xfrm>
+            <a:off x="4441435" y="4480367"/>
+            <a:ext cx="3300984" cy="1310833"/>
+          </a:xfrm>
+        </p:spPr>
+        <p:txBody>
+          <a:bodyPr anchor="t">
+            <a:normAutofit/>
+          </a:bodyPr>
+          <a:lstStyle>
+            <a:lvl1pPr marL="0" indent="0" algn="ctr">
+              <a:buNone/>
+              <a:defRPr sz="1400"/>
+            </a:lvl1pPr>
+            <a:lvl2pPr marL="457200" indent="0">
+              <a:buNone/>
+              <a:defRPr sz="1200"/>
+            </a:lvl2pPr>
+            <a:lvl3pPr marL="914400" indent="0">
+              <a:buNone/>
+              <a:defRPr sz="1000"/>
+            </a:lvl3pPr>
+            <a:lvl4pPr marL="1371600" indent="0">
+              <a:buNone/>
+              <a:defRPr sz="900"/>
+            </a:lvl4pPr>
+            <a:lvl5pPr marL="1828800" indent="0">
+              <a:buNone/>
+              <a:defRPr sz="900"/>
+            </a:lvl5pPr>
+            <a:lvl6pPr marL="2286000" indent="0">
+              <a:buNone/>
+              <a:defRPr sz="900"/>
+            </a:lvl6pPr>
+            <a:lvl7pPr marL="2743200" indent="0">
+              <a:buNone/>
+              <a:defRPr sz="900"/>
+            </a:lvl7pPr>
+            <a:lvl8pPr marL="3200400" indent="0">
+              <a:buNone/>
+              <a:defRPr sz="900"/>
+            </a:lvl8pPr>
+            <a:lvl9pPr marL="3657600" indent="0">
+              <a:buNone/>
+              <a:defRPr sz="900"/>
+            </a:lvl9pPr>
+          </a:lstStyle>
+          <a:p>
+            <a:pPr lvl="0"/>
+            <a:r>
+              <a:rPr lang="en-US"/>
+              <a:t>Click to edit Master text styles</a:t>
+            </a:r>
+          </a:p>
+        </p:txBody>
+      </p:sp>
+      <p:sp>
+        <p:nvSpPr>
+          <p:cNvPr id="25" name="Text Placeholder 4"/>
+          <p:cNvSpPr>
+            <a:spLocks noGrp="1"/>
+          </p:cNvSpPr>
+          <p:nvPr>
+            <p:ph type="body" sz="quarter" idx="13"/>
+          </p:nvPr>
+        </p:nvSpPr>
+        <p:spPr>
+          <a:xfrm>
+            <a:off x="7966697" y="3904106"/>
+            <a:ext cx="3300984" cy="576262"/>
+          </a:xfrm>
+        </p:spPr>
+        <p:txBody>
+          <a:bodyPr anchor="b">
+            <a:noAutofit/>
+          </a:bodyPr>
+          <a:lstStyle>
+            <a:lvl1pPr marL="0" indent="0" algn="ctr">
+              <a:buNone/>
+              <a:defRPr sz="2000" b="0">
+                <a:solidFill>
+                  <a:schemeClr val="tx1"/>
+                </a:solidFill>
+              </a:defRPr>
+            </a:lvl1pPr>
+            <a:lvl2pPr marL="457200" indent="0">
+              <a:buNone/>
+              <a:defRPr sz="2000" b="1"/>
+            </a:lvl2pPr>
+            <a:lvl3pPr marL="914400" indent="0">
+              <a:buNone/>
+              <a:defRPr sz="1800" b="1"/>
+            </a:lvl3pPr>
+            <a:lvl4pPr marL="1371600" indent="0">
+              <a:buNone/>
+              <a:defRPr sz="1600" b="1"/>
+            </a:lvl4pPr>
+            <a:lvl5pPr marL="1828800" indent="0">
+              <a:buNone/>
+              <a:defRPr sz="1600" b="1"/>
+            </a:lvl5pPr>
+            <a:lvl6pPr marL="2286000" indent="0">
+              <a:buNone/>
+              <a:defRPr sz="1600" b="1"/>
+            </a:lvl6pPr>
+            <a:lvl7pPr marL="2743200" indent="0">
+              <a:buNone/>
+              <a:defRPr sz="1600" b="1"/>
+            </a:lvl7pPr>
+            <a:lvl8pPr marL="3200400" indent="0">
+              <a:buNone/>
+              <a:defRPr sz="1600" b="1"/>
+            </a:lvl8pPr>
+            <a:lvl9pPr marL="3657600" indent="0">
+              <a:buNone/>
+              <a:defRPr sz="1600" b="1"/>
+            </a:lvl9pPr>
+          </a:lstStyle>
+          <a:p>
+            <a:pPr lvl="0"/>
+            <a:r>
+              <a:rPr lang="en-US"/>
+              <a:t>Click to edit Master text styles</a:t>
+            </a:r>
+          </a:p>
+        </p:txBody>
+      </p:sp>
+      <p:sp>
+        <p:nvSpPr>
+          <p:cNvPr id="26" name="Picture Placeholder 2"/>
+          <p:cNvSpPr>
+            <a:spLocks noGrp="1" noChangeAspect="1"/>
+          </p:cNvSpPr>
+          <p:nvPr>
+            <p:ph type="pic" idx="22"/>
+          </p:nvPr>
+        </p:nvSpPr>
+        <p:spPr>
+          <a:xfrm>
+            <a:off x="8075698" y="1934432"/>
+            <a:ext cx="3092368" cy="1607294"/>
+          </a:xfrm>
+          <a:prstGeom prst="roundRect">
+            <a:avLst>
+              <a:gd name="adj" fmla="val 1858"/>
+            </a:avLst>
+          </a:prstGeom>
+          <a:effectLst>
+            <a:outerShdw blurRad="38100" dist="25400" dir="4440000">
+              <a:srgbClr val="000000">
+                <a:alpha val="36000"/>
+              </a:srgbClr>
+            </a:outerShdw>
+          </a:effectLst>
+        </p:spPr>
+        <p:txBody>
+          <a:bodyPr anchor="t">
+            <a:normAutofit/>
+          </a:bodyPr>
+          <a:lstStyle>
+            <a:lvl1pPr marL="0" indent="0" algn="ctr">
+              <a:buNone/>
+              <a:defRPr sz="1600"/>
+            </a:lvl1pPr>
+            <a:lvl2pPr marL="457200" indent="0">
+              <a:buNone/>
+              <a:defRPr sz="1600"/>
+            </a:lvl2pPr>
+            <a:lvl3pPr marL="914400" indent="0">
+              <a:buNone/>
+              <a:defRPr sz="1600"/>
+            </a:lvl3pPr>
+            <a:lvl4pPr marL="1371600" indent="0">
+              <a:buNone/>
+              <a:defRPr sz="1600"/>
+            </a:lvl4pPr>
+            <a:lvl5pPr marL="1828800" indent="0">
+              <a:buNone/>
+              <a:defRPr sz="1600"/>
+            </a:lvl5pPr>
+            <a:lvl6pPr marL="2286000" indent="0">
+              <a:buNone/>
+              <a:defRPr sz="1600"/>
+            </a:lvl6pPr>
+            <a:lvl7pPr marL="2743200" indent="0">
+              <a:buNone/>
+              <a:defRPr sz="1600"/>
+            </a:lvl7pPr>
+            <a:lvl8pPr marL="3200400" indent="0">
+              <a:buNone/>
+              <a:defRPr sz="1600"/>
+            </a:lvl8pPr>
+            <a:lvl9pPr marL="3657600" indent="0">
+              <a:buNone/>
+              <a:defRPr sz="1600"/>
+            </a:lvl9pPr>
+          </a:lstStyle>
+          <a:p>
+            <a:r>
+              <a:rPr lang="en-US"/>
+              <a:t>Click icon to add picture</a:t>
+            </a:r>
+            <a:endParaRPr lang="en-US" dirty="0"/>
+          </a:p>
+        </p:txBody>
+      </p:sp>
+      <p:sp>
+        <p:nvSpPr>
+          <p:cNvPr id="27" name="Text Placeholder 3"/>
+          <p:cNvSpPr>
+            <a:spLocks noGrp="1"/>
+          </p:cNvSpPr>
+          <p:nvPr>
+            <p:ph type="body" sz="half" idx="20"/>
+          </p:nvPr>
+        </p:nvSpPr>
+        <p:spPr>
+          <a:xfrm>
+            <a:off x="7966572" y="4480365"/>
+            <a:ext cx="3300984" cy="1310835"/>
+          </a:xfrm>
+        </p:spPr>
+        <p:txBody>
+          <a:bodyPr anchor="t">
+            <a:normAutofit/>
+          </a:bodyPr>
+          <a:lstStyle>
+            <a:lvl1pPr marL="0" indent="0" algn="ctr">
+              <a:buNone/>
+              <a:defRPr sz="1400"/>
+            </a:lvl1pPr>
+            <a:lvl2pPr marL="457200" indent="0">
+              <a:buNone/>
+              <a:defRPr sz="1200"/>
+            </a:lvl2pPr>
+            <a:lvl3pPr marL="914400" indent="0">
+              <a:buNone/>
+              <a:defRPr sz="1000"/>
+            </a:lvl3pPr>
+            <a:lvl4pPr marL="1371600" indent="0">
+              <a:buNone/>
+              <a:defRPr sz="900"/>
+            </a:lvl4pPr>
+            <a:lvl5pPr marL="1828800" indent="0">
+              <a:buNone/>
+              <a:defRPr sz="900"/>
+            </a:lvl5pPr>
+            <a:lvl6pPr marL="2286000" indent="0">
+              <a:buNone/>
+              <a:defRPr sz="900"/>
+            </a:lvl6pPr>
+            <a:lvl7pPr marL="2743200" indent="0">
+              <a:buNone/>
+              <a:defRPr sz="900"/>
+            </a:lvl7pPr>
+            <a:lvl8pPr marL="3200400" indent="0">
+              <a:buNone/>
+              <a:defRPr sz="900"/>
+            </a:lvl8pPr>
+            <a:lvl9pPr marL="3657600" indent="0">
+              <a:buNone/>
+              <a:defRPr sz="900"/>
+            </a:lvl9pPr>
+          </a:lstStyle>
+          <a:p>
+            <a:pPr lvl="0"/>
+            <a:r>
+              <a:rPr lang="en-US"/>
+              <a:t>Click to edit Master text styles</a:t>
+            </a:r>
+          </a:p>
+        </p:txBody>
+      </p:sp>
+      <p:sp>
+        <p:nvSpPr>
+          <p:cNvPr id="3" name="Date Placeholder 2"/>
+          <p:cNvSpPr>
+            <a:spLocks noGrp="1"/>
+          </p:cNvSpPr>
+          <p:nvPr>
+            <p:ph type="dt" sz="half" idx="10"/>
+          </p:nvPr>
+        </p:nvSpPr>
+        <p:spPr/>
+        <p:txBody>
+          <a:bodyPr/>
+          <a:lstStyle/>
+          <a:p>
+            <a:fld id="{5BCAD085-E8A6-8845-BD4E-CB4CCA059FC4}" type="datetimeFigureOut">
+              <a:rPr lang="en-US" smtClean="0"/>
+              <a:t>3/9/2026</a:t>
+            </a:fld>
+            <a:endParaRPr lang="en-US"/>
+          </a:p>
+        </p:txBody>
+      </p:sp>
+      <p:sp>
+        <p:nvSpPr>
+          <p:cNvPr id="4" name="Footer Placeholder 3"/>
+          <p:cNvSpPr>
+            <a:spLocks noGrp="1"/>
+          </p:cNvSpPr>
+          <p:nvPr>
+            <p:ph type="ftr" sz="quarter" idx="11"/>
+          </p:nvPr>
+        </p:nvSpPr>
+        <p:spPr/>
+        <p:txBody>
+          <a:bodyPr/>
+          <a:lstStyle/>
+          <a:p>
+            <a:endParaRPr lang="en-US"/>
+          </a:p>
+        </p:txBody>
+      </p:sp>
+      <p:sp>
+        <p:nvSpPr>
+          <p:cNvPr id="5" name="Slide Number Placeholder 4"/>
+          <p:cNvSpPr>
+            <a:spLocks noGrp="1"/>
+          </p:cNvSpPr>
+          <p:nvPr>
+            <p:ph type="sldNum" sz="quarter" idx="12"/>
+          </p:nvPr>
+        </p:nvSpPr>
+        <p:spPr/>
+        <p:txBody>
+          <a:bodyPr/>
+          <a:lstStyle/>
+          <a:p>
+            <a:fld id="{C1FF6DA9-008F-8B48-92A6-B652298478BF}" type="slidenum">
+              <a:rPr lang="en-US" smtClean="0"/>
+              <a:t>‹#›</a:t>
+            </a:fld>
+            <a:endParaRPr lang="en-US"/>
+          </a:p>
+        </p:txBody>
+      </p:sp>
+    </p:spTree>
+    <p:extLst>
+      <p:ext uri="{BB962C8B-B14F-4D97-AF65-F5344CB8AC3E}">
+        <p14:creationId xmlns:p14="http://schemas.microsoft.com/office/powerpoint/2010/main" val="3468968083"/>
+      </p:ext>
+    </p:extLst>
+  </p:cSld>
+  <p:clrMapOvr>
+    <a:masterClrMapping/>
+  </p:clrMapOvr>
+</p:sldLayout>
+</file>
+
+<file path=ppt/slideLayouts/slideLayout16.xml><?xml version="1.0" encoding="utf-8"?>
 <p:sldLayout xmlns:a="http://schemas.openxmlformats.org/drawingml/2006/main" xmlns:r="http://schemas.openxmlformats.org/officeDocument/2006/relationships" xmlns:p="http://schemas.openxmlformats.org/presentationml/2006/main" type="vertTx" preserve="1">
   <p:cSld name="Title and Vertical Text">
     <p:spTree>
@@ -403,6 +2987,7 @@
               <a:rPr lang="en-US"/>
               <a:t>Click to edit Master title style</a:t>
             </a:r>
+            <a:endParaRPr lang="en-US" dirty="0"/>
           </a:p>
         </p:txBody>
       </p:sp>
@@ -418,7 +3003,7 @@
         </p:nvSpPr>
         <p:spPr/>
         <p:txBody>
-          <a:bodyPr vert="eaVert"/>
+          <a:bodyPr vert="eaVert" anchor="t"/>
           <a:lstStyle/>
           <a:p>
             <a:pPr lvl="0"/>
@@ -454,6 +3039,7 @@
               <a:rPr lang="en-US"/>
               <a:t>Fifth level</a:t>
             </a:r>
+            <a:endParaRPr lang="en-US" dirty="0"/>
           </a:p>
         </p:txBody>
       </p:sp>
@@ -474,7 +3060,7 @@
           <a:p>
             <a:fld id="{5BCAD085-E8A6-8845-BD4E-CB4CCA059FC4}" type="datetimeFigureOut">
               <a:rPr lang="en-US" smtClean="0"/>
-              <a:t>3/8/2026</a:t>
+              <a:t>3/9/2026</a:t>
             </a:fld>
             <a:endParaRPr lang="en-US"/>
           </a:p>
@@ -525,7 +3111,7 @@
     </p:spTree>
     <p:extLst>
       <p:ext uri="{BB962C8B-B14F-4D97-AF65-F5344CB8AC3E}">
-        <p14:creationId xmlns:p14="http://schemas.microsoft.com/office/powerpoint/2010/main" val="2910927964"/>
+        <p14:creationId xmlns:p14="http://schemas.microsoft.com/office/powerpoint/2010/main" val="2757716538"/>
       </p:ext>
     </p:extLst>
   </p:cSld>
@@ -535,7 +3121,7 @@
 </p:sldLayout>
 </file>
 
-<file path=ppt/slideLayouts/slideLayout11.xml><?xml version="1.0" encoding="utf-8"?>
+<file path=ppt/slideLayouts/slideLayout17.xml><?xml version="1.0" encoding="utf-8"?>
 <p:sldLayout xmlns:a="http://schemas.openxmlformats.org/drawingml/2006/main" xmlns:r="http://schemas.openxmlformats.org/officeDocument/2006/relationships" xmlns:p="http://schemas.openxmlformats.org/presentationml/2006/main" type="vertTitleAndTx" preserve="1">
   <p:cSld name="Vertical Title and Text">
     <p:spTree>
@@ -564,18 +3150,23 @@
         </p:nvSpPr>
         <p:spPr>
           <a:xfrm>
-            <a:off x="6629400" y="274638"/>
-            <a:ext cx="2057400" cy="5851525"/>
+            <a:off x="8983068" y="609599"/>
+            <a:ext cx="2284487" cy="5181601"/>
           </a:xfrm>
         </p:spPr>
         <p:txBody>
           <a:bodyPr vert="eaVert"/>
-          <a:lstStyle/>
+          <a:lstStyle>
+            <a:lvl1pPr algn="l">
+              <a:defRPr/>
+            </a:lvl1pPr>
+          </a:lstStyle>
           <a:p>
             <a:r>
               <a:rPr lang="en-US"/>
               <a:t>Click to edit Master title style</a:t>
             </a:r>
+            <a:endParaRPr lang="en-US" dirty="0"/>
           </a:p>
         </p:txBody>
       </p:sp>
@@ -591,12 +3182,12 @@
         </p:nvSpPr>
         <p:spPr>
           <a:xfrm>
-            <a:off x="457200" y="274638"/>
-            <a:ext cx="6019800" cy="5851525"/>
+            <a:off x="913796" y="609599"/>
+            <a:ext cx="7916872" cy="5181601"/>
           </a:xfrm>
         </p:spPr>
         <p:txBody>
-          <a:bodyPr vert="eaVert"/>
+          <a:bodyPr vert="eaVert" anchor="t"/>
           <a:lstStyle/>
           <a:p>
             <a:pPr lvl="0"/>
@@ -632,6 +3223,7 @@
               <a:rPr lang="en-US"/>
               <a:t>Fifth level</a:t>
             </a:r>
+            <a:endParaRPr lang="en-US" dirty="0"/>
           </a:p>
         </p:txBody>
       </p:sp>
@@ -652,7 +3244,7 @@
           <a:p>
             <a:fld id="{5BCAD085-E8A6-8845-BD4E-CB4CCA059FC4}" type="datetimeFigureOut">
               <a:rPr lang="en-US" smtClean="0"/>
-              <a:t>3/8/2026</a:t>
+              <a:t>3/9/2026</a:t>
             </a:fld>
             <a:endParaRPr lang="en-US"/>
           </a:p>
@@ -703,7 +3295,7 @@
     </p:spTree>
     <p:extLst>
       <p:ext uri="{BB962C8B-B14F-4D97-AF65-F5344CB8AC3E}">
-        <p14:creationId xmlns:p14="http://schemas.microsoft.com/office/powerpoint/2010/main" val="3612223792"/>
+        <p14:creationId xmlns:p14="http://schemas.microsoft.com/office/powerpoint/2010/main" val="670944382"/>
       </p:ext>
     </p:extLst>
   </p:cSld>
@@ -749,6 +3341,7 @@
               <a:rPr lang="en-US"/>
               <a:t>Click to edit Master title style</a:t>
             </a:r>
+            <a:endParaRPr lang="en-US" dirty="0"/>
           </a:p>
         </p:txBody>
       </p:sp>
@@ -800,6 +3393,7 @@
               <a:rPr lang="en-US"/>
               <a:t>Fifth level</a:t>
             </a:r>
+            <a:endParaRPr lang="en-US" dirty="0"/>
           </a:p>
         </p:txBody>
       </p:sp>
@@ -820,7 +3414,7 @@
           <a:p>
             <a:fld id="{5BCAD085-E8A6-8845-BD4E-CB4CCA059FC4}" type="datetimeFigureOut">
               <a:rPr lang="en-US" smtClean="0"/>
-              <a:t>3/8/2026</a:t>
+              <a:t>3/9/2026</a:t>
             </a:fld>
             <a:endParaRPr lang="en-US"/>
           </a:p>
@@ -871,7 +3465,7 @@
     </p:spTree>
     <p:extLst>
       <p:ext uri="{BB962C8B-B14F-4D97-AF65-F5344CB8AC3E}">
-        <p14:creationId xmlns:p14="http://schemas.microsoft.com/office/powerpoint/2010/main" val="2614314258"/>
+        <p14:creationId xmlns:p14="http://schemas.microsoft.com/office/powerpoint/2010/main" val="4002904690"/>
       </p:ext>
     </p:extLst>
   </p:cSld>
@@ -910,75 +3504,84 @@
         </p:nvSpPr>
         <p:spPr>
           <a:xfrm>
-            <a:off x="722313" y="4406900"/>
-            <a:ext cx="7772400" cy="1362075"/>
+            <a:off x="1295401" y="1761067"/>
+            <a:ext cx="9590550" cy="1828813"/>
           </a:xfrm>
         </p:spPr>
         <p:txBody>
+          <a:bodyPr anchor="b"/>
+          <a:lstStyle>
+            <a:lvl1pPr algn="ctr">
+              <a:defRPr sz="4000" b="0" cap="none"/>
+            </a:lvl1pPr>
+          </a:lstStyle>
+          <a:p>
+            <a:r>
+              <a:rPr lang="en-US"/>
+              <a:t>Click to edit Master title style</a:t>
+            </a:r>
+            <a:endParaRPr lang="en-US" dirty="0"/>
+          </a:p>
+        </p:txBody>
+      </p:sp>
+      <p:sp>
+        <p:nvSpPr>
+          <p:cNvPr id="3" name="Text Placeholder 2"/>
+          <p:cNvSpPr>
+            <a:spLocks noGrp="1"/>
+          </p:cNvSpPr>
+          <p:nvPr>
+            <p:ph type="body" idx="1"/>
+          </p:nvPr>
+        </p:nvSpPr>
+        <p:spPr>
+          <a:xfrm>
+            <a:off x="1295401" y="3589879"/>
+            <a:ext cx="9590550" cy="1507054"/>
+          </a:xfrm>
+        </p:spPr>
+        <p:txBody>
           <a:bodyPr anchor="t"/>
           <a:lstStyle>
-            <a:lvl1pPr algn="l">
-              <a:defRPr sz="4000" b="1" cap="all"/>
+            <a:lvl1pPr marL="0" indent="0" algn="ctr">
+              <a:buNone/>
+              <a:defRPr sz="2000">
+                <a:solidFill>
+                  <a:schemeClr val="tx1"/>
+                </a:solidFill>
+              </a:defRPr>
             </a:lvl1pPr>
-          </a:lstStyle>
-          <a:p>
-            <a:r>
-              <a:rPr lang="en-US"/>
-              <a:t>Click to edit Master title style</a:t>
-            </a:r>
-          </a:p>
-        </p:txBody>
-      </p:sp>
-      <p:sp>
-        <p:nvSpPr>
-          <p:cNvPr id="3" name="Text Placeholder 2"/>
-          <p:cNvSpPr>
-            <a:spLocks noGrp="1"/>
-          </p:cNvSpPr>
-          <p:nvPr>
-            <p:ph type="body" idx="1"/>
-          </p:nvPr>
-        </p:nvSpPr>
-        <p:spPr>
-          <a:xfrm>
-            <a:off x="722313" y="2906713"/>
-            <a:ext cx="7772400" cy="1500187"/>
-          </a:xfrm>
-        </p:spPr>
-        <p:txBody>
-          <a:bodyPr anchor="b"/>
-          <a:lstStyle>
-            <a:lvl1pPr marL="0" indent="0">
-              <a:buNone/>
-              <a:defRPr sz="2000">
+            <a:lvl2pPr marL="457200" indent="0">
+              <a:buNone/>
+              <a:defRPr sz="1800">
                 <a:solidFill>
                   <a:schemeClr val="tx1">
                     <a:tint val="75000"/>
                   </a:schemeClr>
                 </a:solidFill>
               </a:defRPr>
-            </a:lvl1pPr>
-            <a:lvl2pPr marL="457200" indent="0">
-              <a:buNone/>
-              <a:defRPr sz="1800">
+            </a:lvl2pPr>
+            <a:lvl3pPr marL="914400" indent="0">
+              <a:buNone/>
+              <a:defRPr sz="1600">
                 <a:solidFill>
                   <a:schemeClr val="tx1">
                     <a:tint val="75000"/>
                   </a:schemeClr>
                 </a:solidFill>
               </a:defRPr>
-            </a:lvl2pPr>
-            <a:lvl3pPr marL="914400" indent="0">
-              <a:buNone/>
-              <a:defRPr sz="1600">
+            </a:lvl3pPr>
+            <a:lvl4pPr marL="1371600" indent="0">
+              <a:buNone/>
+              <a:defRPr sz="1400">
                 <a:solidFill>
                   <a:schemeClr val="tx1">
                     <a:tint val="75000"/>
                   </a:schemeClr>
                 </a:solidFill>
               </a:defRPr>
-            </a:lvl3pPr>
-            <a:lvl4pPr marL="1371600" indent="0">
+            </a:lvl4pPr>
+            <a:lvl5pPr marL="1828800" indent="0">
               <a:buNone/>
               <a:defRPr sz="1400">
                 <a:solidFill>
@@ -987,8 +3590,8 @@
                   </a:schemeClr>
                 </a:solidFill>
               </a:defRPr>
-            </a:lvl4pPr>
-            <a:lvl5pPr marL="1828800" indent="0">
+            </a:lvl5pPr>
+            <a:lvl6pPr marL="2286000" indent="0">
               <a:buNone/>
               <a:defRPr sz="1400">
                 <a:solidFill>
@@ -997,8 +3600,8 @@
                   </a:schemeClr>
                 </a:solidFill>
               </a:defRPr>
-            </a:lvl5pPr>
-            <a:lvl6pPr marL="2286000" indent="0">
+            </a:lvl6pPr>
+            <a:lvl7pPr marL="2743200" indent="0">
               <a:buNone/>
               <a:defRPr sz="1400">
                 <a:solidFill>
@@ -1007,8 +3610,8 @@
                   </a:schemeClr>
                 </a:solidFill>
               </a:defRPr>
-            </a:lvl6pPr>
-            <a:lvl7pPr marL="2743200" indent="0">
+            </a:lvl7pPr>
+            <a:lvl8pPr marL="3200400" indent="0">
               <a:buNone/>
               <a:defRPr sz="1400">
                 <a:solidFill>
@@ -1017,8 +3620,8 @@
                   </a:schemeClr>
                 </a:solidFill>
               </a:defRPr>
-            </a:lvl7pPr>
-            <a:lvl8pPr marL="3200400" indent="0">
+            </a:lvl8pPr>
+            <a:lvl9pPr marL="3657600" indent="0">
               <a:buNone/>
               <a:defRPr sz="1400">
                 <a:solidFill>
@@ -1027,16 +3630,6 @@
                   </a:schemeClr>
                 </a:solidFill>
               </a:defRPr>
-            </a:lvl8pPr>
-            <a:lvl9pPr marL="3657600" indent="0">
-              <a:buNone/>
-              <a:defRPr sz="1400">
-                <a:solidFill>
-                  <a:schemeClr val="tx1">
-                    <a:tint val="75000"/>
-                  </a:schemeClr>
-                </a:solidFill>
-              </a:defRPr>
             </a:lvl9pPr>
           </a:lstStyle>
           <a:p>
@@ -1065,7 +3658,7 @@
           <a:p>
             <a:fld id="{5BCAD085-E8A6-8845-BD4E-CB4CCA059FC4}" type="datetimeFigureOut">
               <a:rPr lang="en-US" smtClean="0"/>
-              <a:t>3/8/2026</a:t>
+              <a:t>3/9/2026</a:t>
             </a:fld>
             <a:endParaRPr lang="en-US"/>
           </a:p>
@@ -1116,7 +3709,7 @@
     </p:spTree>
     <p:extLst>
       <p:ext uri="{BB962C8B-B14F-4D97-AF65-F5344CB8AC3E}">
-        <p14:creationId xmlns:p14="http://schemas.microsoft.com/office/powerpoint/2010/main" val="960648375"/>
+        <p14:creationId xmlns:p14="http://schemas.microsoft.com/office/powerpoint/2010/main" val="1310811524"/>
       </p:ext>
     </p:extLst>
   </p:cSld>
@@ -1162,6 +3755,7 @@
               <a:rPr lang="en-US"/>
               <a:t>Click to edit Master title style</a:t>
             </a:r>
+            <a:endParaRPr lang="en-US" dirty="0"/>
           </a:p>
         </p:txBody>
       </p:sp>
@@ -1177,41 +3771,15 @@
         </p:nvSpPr>
         <p:spPr>
           <a:xfrm>
-            <a:off x="457200" y="1600200"/>
-            <a:ext cx="4038600" cy="4525963"/>
+            <a:off x="913795" y="1732449"/>
+            <a:ext cx="5060497" cy="4058750"/>
           </a:xfrm>
         </p:spPr>
         <p:txBody>
-          <a:bodyPr/>
-          <a:lstStyle>
-            <a:lvl1pPr>
-              <a:defRPr sz="2800"/>
-            </a:lvl1pPr>
-            <a:lvl2pPr>
-              <a:defRPr sz="2400"/>
-            </a:lvl2pPr>
-            <a:lvl3pPr>
-              <a:defRPr sz="2000"/>
-            </a:lvl3pPr>
-            <a:lvl4pPr>
-              <a:defRPr sz="1800"/>
-            </a:lvl4pPr>
-            <a:lvl5pPr>
-              <a:defRPr sz="1800"/>
-            </a:lvl5pPr>
-            <a:lvl6pPr>
-              <a:defRPr sz="1800"/>
-            </a:lvl6pPr>
-            <a:lvl7pPr>
-              <a:defRPr sz="1800"/>
-            </a:lvl7pPr>
-            <a:lvl8pPr>
-              <a:defRPr sz="1800"/>
-            </a:lvl8pPr>
-            <a:lvl9pPr>
-              <a:defRPr sz="1800"/>
-            </a:lvl9pPr>
-          </a:lstStyle>
+          <a:bodyPr anchor="t">
+            <a:normAutofit/>
+          </a:bodyPr>
+          <a:lstStyle/>
           <a:p>
             <a:pPr lvl="0"/>
             <a:r>
@@ -1246,6 +3814,7 @@
               <a:rPr lang="en-US"/>
               <a:t>Fifth level</a:t>
             </a:r>
+            <a:endParaRPr lang="en-US" dirty="0"/>
           </a:p>
         </p:txBody>
       </p:sp>
@@ -1261,41 +3830,15 @@
         </p:nvSpPr>
         <p:spPr>
           <a:xfrm>
-            <a:off x="4648200" y="1600200"/>
-            <a:ext cx="4038600" cy="4525963"/>
+            <a:off x="6202892" y="1732449"/>
+            <a:ext cx="5064665" cy="4058751"/>
           </a:xfrm>
         </p:spPr>
         <p:txBody>
-          <a:bodyPr/>
-          <a:lstStyle>
-            <a:lvl1pPr>
-              <a:defRPr sz="2800"/>
-            </a:lvl1pPr>
-            <a:lvl2pPr>
-              <a:defRPr sz="2400"/>
-            </a:lvl2pPr>
-            <a:lvl3pPr>
-              <a:defRPr sz="2000"/>
-            </a:lvl3pPr>
-            <a:lvl4pPr>
-              <a:defRPr sz="1800"/>
-            </a:lvl4pPr>
-            <a:lvl5pPr>
-              <a:defRPr sz="1800"/>
-            </a:lvl5pPr>
-            <a:lvl6pPr>
-              <a:defRPr sz="1800"/>
-            </a:lvl6pPr>
-            <a:lvl7pPr>
-              <a:defRPr sz="1800"/>
-            </a:lvl7pPr>
-            <a:lvl8pPr>
-              <a:defRPr sz="1800"/>
-            </a:lvl8pPr>
-            <a:lvl9pPr>
-              <a:defRPr sz="1800"/>
-            </a:lvl9pPr>
-          </a:lstStyle>
+          <a:bodyPr anchor="t">
+            <a:normAutofit/>
+          </a:bodyPr>
+          <a:lstStyle/>
           <a:p>
             <a:pPr lvl="0"/>
             <a:r>
@@ -1330,6 +3873,7 @@
               <a:rPr lang="en-US"/>
               <a:t>Fifth level</a:t>
             </a:r>
+            <a:endParaRPr lang="en-US" dirty="0"/>
           </a:p>
         </p:txBody>
       </p:sp>
@@ -1350,7 +3894,7 @@
           <a:p>
             <a:fld id="{5BCAD085-E8A6-8845-BD4E-CB4CCA059FC4}" type="datetimeFigureOut">
               <a:rPr lang="en-US" smtClean="0"/>
-              <a:t>3/8/2026</a:t>
+              <a:t>3/9/2026</a:t>
             </a:fld>
             <a:endParaRPr lang="en-US"/>
           </a:p>
@@ -1401,7 +3945,7 @@
     </p:spTree>
     <p:extLst>
       <p:ext uri="{BB962C8B-B14F-4D97-AF65-F5344CB8AC3E}">
-        <p14:creationId xmlns:p14="http://schemas.microsoft.com/office/powerpoint/2010/main" val="2782244947"/>
+        <p14:creationId xmlns:p14="http://schemas.microsoft.com/office/powerpoint/2010/main" val="1939963602"/>
       </p:ext>
     </p:extLst>
   </p:cSld>
@@ -1428,6 +3972,66 @@
           <a:chExt cx="0" cy="0"/>
         </a:xfrm>
       </p:grpSpPr>
+      <p:pic>
+        <p:nvPicPr>
+          <p:cNvPr id="20" name="Picture 19" descr="Slate-V2-HD-compPhotoInset.png"/>
+          <p:cNvPicPr>
+            <a:picLocks noChangeAspect="1"/>
+          </p:cNvPicPr>
+          <p:nvPr/>
+        </p:nvPicPr>
+        <p:blipFill>
+          <a:blip r:embed="rId2">
+            <a:extLst>
+              <a:ext uri="{28A0092B-C50C-407E-A947-70E740481C1C}">
+                <a14:useLocalDpi xmlns:a14="http://schemas.microsoft.com/office/drawing/2010/main" val="0"/>
+              </a:ext>
+            </a:extLst>
+          </a:blip>
+          <a:stretch>
+            <a:fillRect/>
+          </a:stretch>
+        </p:blipFill>
+        <p:spPr>
+          <a:xfrm>
+            <a:off x="913795" y="1734506"/>
+            <a:ext cx="5089072" cy="4148769"/>
+          </a:xfrm>
+          <a:prstGeom prst="rect">
+            <a:avLst/>
+          </a:prstGeom>
+        </p:spPr>
+      </p:pic>
+      <p:pic>
+        <p:nvPicPr>
+          <p:cNvPr id="21" name="Picture 20" descr="Slate-V2-HD-compPhotoInset.png"/>
+          <p:cNvPicPr>
+            <a:picLocks noChangeAspect="1"/>
+          </p:cNvPicPr>
+          <p:nvPr/>
+        </p:nvPicPr>
+        <p:blipFill>
+          <a:blip r:embed="rId2">
+            <a:extLst>
+              <a:ext uri="{28A0092B-C50C-407E-A947-70E740481C1C}">
+                <a14:useLocalDpi xmlns:a14="http://schemas.microsoft.com/office/drawing/2010/main" val="0"/>
+              </a:ext>
+            </a:extLst>
+          </a:blip>
+          <a:stretch>
+            <a:fillRect/>
+          </a:stretch>
+        </p:blipFill>
+        <p:spPr>
+          <a:xfrm>
+            <a:off x="6178485" y="1734506"/>
+            <a:ext cx="5089072" cy="4148769"/>
+          </a:xfrm>
+          <a:prstGeom prst="rect">
+            <a:avLst/>
+          </a:prstGeom>
+        </p:spPr>
+      </p:pic>
       <p:sp>
         <p:nvSpPr>
           <p:cNvPr id="2" name="Title 1"/>
@@ -1451,6 +4055,7 @@
               <a:rPr lang="en-US"/>
               <a:t>Click to edit Master title style</a:t>
             </a:r>
+            <a:endParaRPr lang="en-US" dirty="0"/>
           </a:p>
         </p:txBody>
       </p:sp>
@@ -1466,16 +4071,18 @@
         </p:nvSpPr>
         <p:spPr>
           <a:xfrm>
-            <a:off x="457200" y="1535113"/>
-            <a:ext cx="4040188" cy="639762"/>
+            <a:off x="1005872" y="1835254"/>
+            <a:ext cx="4876344" cy="544884"/>
           </a:xfrm>
         </p:spPr>
         <p:txBody>
-          <a:bodyPr anchor="b"/>
+          <a:bodyPr anchor="b">
+            <a:noAutofit/>
+          </a:bodyPr>
           <a:lstStyle>
-            <a:lvl1pPr marL="0" indent="0">
-              <a:buNone/>
-              <a:defRPr sz="2400" b="1"/>
+            <a:lvl1pPr marL="0" indent="0" algn="ctr">
+              <a:buNone/>
+              <a:defRPr sz="2400" b="0"/>
             </a:lvl1pPr>
             <a:lvl2pPr marL="457200" indent="0">
               <a:buNone/>
@@ -1531,40 +4138,30 @@
         </p:nvSpPr>
         <p:spPr>
           <a:xfrm>
-            <a:off x="457200" y="2174875"/>
-            <a:ext cx="4040188" cy="3951288"/>
+            <a:off x="1005872" y="2380137"/>
+            <a:ext cx="4876344" cy="3411063"/>
           </a:xfrm>
         </p:spPr>
         <p:txBody>
-          <a:bodyPr/>
+          <a:bodyPr anchor="t">
+            <a:normAutofit/>
+          </a:bodyPr>
           <a:lstStyle>
             <a:lvl1pPr>
-              <a:defRPr sz="2400"/>
+              <a:defRPr sz="1800"/>
             </a:lvl1pPr>
             <a:lvl2pPr>
-              <a:defRPr sz="2000"/>
+              <a:defRPr sz="1600"/>
             </a:lvl2pPr>
             <a:lvl3pPr>
-              <a:defRPr sz="1800"/>
+              <a:defRPr sz="1400"/>
             </a:lvl3pPr>
             <a:lvl4pPr>
-              <a:defRPr sz="1600"/>
+              <a:defRPr sz="1200"/>
             </a:lvl4pPr>
             <a:lvl5pPr>
-              <a:defRPr sz="1600"/>
+              <a:defRPr sz="1200"/>
             </a:lvl5pPr>
-            <a:lvl6pPr>
-              <a:defRPr sz="1600"/>
-            </a:lvl6pPr>
-            <a:lvl7pPr>
-              <a:defRPr sz="1600"/>
-            </a:lvl7pPr>
-            <a:lvl8pPr>
-              <a:defRPr sz="1600"/>
-            </a:lvl8pPr>
-            <a:lvl9pPr>
-              <a:defRPr sz="1600"/>
-            </a:lvl9pPr>
           </a:lstStyle>
           <a:p>
             <a:pPr lvl="0"/>
@@ -1600,6 +4197,7 @@
               <a:rPr lang="en-US"/>
               <a:t>Fifth level</a:t>
             </a:r>
+            <a:endParaRPr lang="en-US" dirty="0"/>
           </a:p>
         </p:txBody>
       </p:sp>
@@ -1615,16 +4213,18 @@
         </p:nvSpPr>
         <p:spPr>
           <a:xfrm>
-            <a:off x="4645025" y="1535113"/>
-            <a:ext cx="4041775" cy="639762"/>
+            <a:off x="6294967" y="1835254"/>
+            <a:ext cx="4895330" cy="544883"/>
           </a:xfrm>
         </p:spPr>
         <p:txBody>
-          <a:bodyPr anchor="b"/>
+          <a:bodyPr anchor="b">
+            <a:noAutofit/>
+          </a:bodyPr>
           <a:lstStyle>
-            <a:lvl1pPr marL="0" indent="0">
-              <a:buNone/>
-              <a:defRPr sz="2400" b="1"/>
+            <a:lvl1pPr marL="0" indent="0" algn="ctr">
+              <a:buNone/>
+              <a:defRPr sz="2400" b="0"/>
             </a:lvl1pPr>
             <a:lvl2pPr marL="457200" indent="0">
               <a:buNone/>
@@ -1680,40 +4280,30 @@
         </p:nvSpPr>
         <p:spPr>
           <a:xfrm>
-            <a:off x="4645025" y="2174875"/>
-            <a:ext cx="4041775" cy="3951288"/>
+            <a:off x="6294967" y="2380137"/>
+            <a:ext cx="4895330" cy="3411063"/>
           </a:xfrm>
         </p:spPr>
         <p:txBody>
-          <a:bodyPr/>
+          <a:bodyPr anchor="t">
+            <a:normAutofit/>
+          </a:bodyPr>
           <a:lstStyle>
             <a:lvl1pPr>
-              <a:defRPr sz="2400"/>
+              <a:defRPr sz="1800"/>
             </a:lvl1pPr>
             <a:lvl2pPr>
-              <a:defRPr sz="2000"/>
+              <a:defRPr sz="1600"/>
             </a:lvl2pPr>
             <a:lvl3pPr>
-              <a:defRPr sz="1800"/>
+              <a:defRPr sz="1400"/>
             </a:lvl3pPr>
             <a:lvl4pPr>
-              <a:defRPr sz="1600"/>
+              <a:defRPr sz="1200"/>
             </a:lvl4pPr>
             <a:lvl5pPr>
-              <a:defRPr sz="1600"/>
+              <a:defRPr sz="1200"/>
             </a:lvl5pPr>
-            <a:lvl6pPr>
-              <a:defRPr sz="1600"/>
-            </a:lvl6pPr>
-            <a:lvl7pPr>
-              <a:defRPr sz="1600"/>
-            </a:lvl7pPr>
-            <a:lvl8pPr>
-              <a:defRPr sz="1600"/>
-            </a:lvl8pPr>
-            <a:lvl9pPr>
-              <a:defRPr sz="1600"/>
-            </a:lvl9pPr>
           </a:lstStyle>
           <a:p>
             <a:pPr lvl="0"/>
@@ -1749,6 +4339,7 @@
               <a:rPr lang="en-US"/>
               <a:t>Fifth level</a:t>
             </a:r>
+            <a:endParaRPr lang="en-US" dirty="0"/>
           </a:p>
         </p:txBody>
       </p:sp>
@@ -1769,7 +4360,7 @@
           <a:p>
             <a:fld id="{5BCAD085-E8A6-8845-BD4E-CB4CCA059FC4}" type="datetimeFigureOut">
               <a:rPr lang="en-US" smtClean="0"/>
-              <a:t>3/8/2026</a:t>
+              <a:t>3/9/2026</a:t>
             </a:fld>
             <a:endParaRPr lang="en-US"/>
           </a:p>
@@ -1820,7 +4411,7 @@
     </p:spTree>
     <p:extLst>
       <p:ext uri="{BB962C8B-B14F-4D97-AF65-F5344CB8AC3E}">
-        <p14:creationId xmlns:p14="http://schemas.microsoft.com/office/powerpoint/2010/main" val="990158736"/>
+        <p14:creationId xmlns:p14="http://schemas.microsoft.com/office/powerpoint/2010/main" val="597631813"/>
       </p:ext>
     </p:extLst>
   </p:cSld>
@@ -1866,6 +4457,7 @@
               <a:rPr lang="en-US"/>
               <a:t>Click to edit Master title style</a:t>
             </a:r>
+            <a:endParaRPr lang="en-US" dirty="0"/>
           </a:p>
         </p:txBody>
       </p:sp>
@@ -1886,7 +4478,7 @@
           <a:p>
             <a:fld id="{5BCAD085-E8A6-8845-BD4E-CB4CCA059FC4}" type="datetimeFigureOut">
               <a:rPr lang="en-US" smtClean="0"/>
-              <a:t>3/8/2026</a:t>
+              <a:t>3/9/2026</a:t>
             </a:fld>
             <a:endParaRPr lang="en-US"/>
           </a:p>
@@ -1937,7 +4529,7 @@
     </p:spTree>
     <p:extLst>
       <p:ext uri="{BB962C8B-B14F-4D97-AF65-F5344CB8AC3E}">
-        <p14:creationId xmlns:p14="http://schemas.microsoft.com/office/powerpoint/2010/main" val="727027711"/>
+        <p14:creationId xmlns:p14="http://schemas.microsoft.com/office/powerpoint/2010/main" val="257219834"/>
       </p:ext>
     </p:extLst>
   </p:cSld>
@@ -1981,7 +4573,7 @@
           <a:p>
             <a:fld id="{5BCAD085-E8A6-8845-BD4E-CB4CCA059FC4}" type="datetimeFigureOut">
               <a:rPr lang="en-US" smtClean="0"/>
-              <a:t>3/8/2026</a:t>
+              <a:t>3/9/2026</a:t>
             </a:fld>
             <a:endParaRPr lang="en-US"/>
           </a:p>
@@ -2032,7 +4624,7 @@
     </p:spTree>
     <p:extLst>
       <p:ext uri="{BB962C8B-B14F-4D97-AF65-F5344CB8AC3E}">
-        <p14:creationId xmlns:p14="http://schemas.microsoft.com/office/powerpoint/2010/main" val="1212999818"/>
+        <p14:creationId xmlns:p14="http://schemas.microsoft.com/office/powerpoint/2010/main" val="2441371210"/>
       </p:ext>
     </p:extLst>
   </p:cSld>
@@ -2071,15 +4663,17 @@
         </p:nvSpPr>
         <p:spPr>
           <a:xfrm>
-            <a:off x="457200" y="273050"/>
-            <a:ext cx="3008313" cy="1162050"/>
+            <a:off x="913795" y="609600"/>
+            <a:ext cx="3706889" cy="1821918"/>
           </a:xfrm>
         </p:spPr>
         <p:txBody>
-          <a:bodyPr anchor="b"/>
+          <a:bodyPr anchor="b">
+            <a:normAutofit/>
+          </a:bodyPr>
           <a:lstStyle>
-            <a:lvl1pPr algn="l">
-              <a:defRPr sz="2000" b="1"/>
+            <a:lvl1pPr algn="ctr">
+              <a:defRPr sz="2400" b="0"/>
             </a:lvl1pPr>
           </a:lstStyle>
           <a:p>
@@ -2087,6 +4681,7 @@
               <a:rPr lang="en-US"/>
               <a:t>Click to edit Master title style</a:t>
             </a:r>
+            <a:endParaRPr lang="en-US" dirty="0"/>
           </a:p>
         </p:txBody>
       </p:sp>
@@ -2102,41 +4697,15 @@
         </p:nvSpPr>
         <p:spPr>
           <a:xfrm>
-            <a:off x="3575050" y="273050"/>
-            <a:ext cx="5111750" cy="5853113"/>
+            <a:off x="4855633" y="609600"/>
+            <a:ext cx="6411924" cy="5181600"/>
           </a:xfrm>
         </p:spPr>
         <p:txBody>
-          <a:bodyPr/>
-          <a:lstStyle>
-            <a:lvl1pPr>
-              <a:defRPr sz="3200"/>
-            </a:lvl1pPr>
-            <a:lvl2pPr>
-              <a:defRPr sz="2800"/>
-            </a:lvl2pPr>
-            <a:lvl3pPr>
-              <a:defRPr sz="2400"/>
-            </a:lvl3pPr>
-            <a:lvl4pPr>
-              <a:defRPr sz="2000"/>
-            </a:lvl4pPr>
-            <a:lvl5pPr>
-              <a:defRPr sz="2000"/>
-            </a:lvl5pPr>
-            <a:lvl6pPr>
-              <a:defRPr sz="2000"/>
-            </a:lvl6pPr>
-            <a:lvl7pPr>
-              <a:defRPr sz="2000"/>
-            </a:lvl7pPr>
-            <a:lvl8pPr>
-              <a:defRPr sz="2000"/>
-            </a:lvl8pPr>
-            <a:lvl9pPr>
-              <a:defRPr sz="2000"/>
-            </a:lvl9pPr>
-          </a:lstStyle>
+          <a:bodyPr>
+            <a:normAutofit/>
+          </a:bodyPr>
+          <a:lstStyle/>
           <a:p>
             <a:pPr lvl="0"/>
             <a:r>
@@ -2171,6 +4740,7 @@
               <a:rPr lang="en-US"/>
               <a:t>Fifth level</a:t>
             </a:r>
+            <a:endParaRPr lang="en-US" dirty="0"/>
           </a:p>
         </p:txBody>
       </p:sp>
@@ -2186,16 +4756,18 @@
         </p:nvSpPr>
         <p:spPr>
           <a:xfrm>
-            <a:off x="457200" y="1435100"/>
-            <a:ext cx="3008313" cy="4691063"/>
+            <a:off x="913795" y="2431518"/>
+            <a:ext cx="3706889" cy="3359681"/>
           </a:xfrm>
         </p:spPr>
         <p:txBody>
-          <a:bodyPr/>
+          <a:bodyPr anchor="t">
+            <a:normAutofit/>
+          </a:bodyPr>
           <a:lstStyle>
-            <a:lvl1pPr marL="0" indent="0">
-              <a:buNone/>
-              <a:defRPr sz="1400"/>
+            <a:lvl1pPr marL="0" indent="0" algn="ctr">
+              <a:buNone/>
+              <a:defRPr sz="1600"/>
             </a:lvl1pPr>
             <a:lvl2pPr marL="457200" indent="0">
               <a:buNone/>
@@ -2256,7 +4828,7 @@
           <a:p>
             <a:fld id="{5BCAD085-E8A6-8845-BD4E-CB4CCA059FC4}" type="datetimeFigureOut">
               <a:rPr lang="en-US" smtClean="0"/>
-              <a:t>3/8/2026</a:t>
+              <a:t>3/9/2026</a:t>
             </a:fld>
             <a:endParaRPr lang="en-US"/>
           </a:p>
@@ -2307,7 +4879,7 @@
     </p:spTree>
     <p:extLst>
       <p:ext uri="{BB962C8B-B14F-4D97-AF65-F5344CB8AC3E}">
-        <p14:creationId xmlns:p14="http://schemas.microsoft.com/office/powerpoint/2010/main" val="1840726560"/>
+        <p14:creationId xmlns:p14="http://schemas.microsoft.com/office/powerpoint/2010/main" val="2657718699"/>
       </p:ext>
     </p:extLst>
   </p:cSld>
@@ -2334,27 +4906,59 @@
           <a:chExt cx="0" cy="0"/>
         </a:xfrm>
       </p:grpSpPr>
-      <p:sp>
-        <p:nvSpPr>
-          <p:cNvPr id="2" name="Title 1"/>
-          <p:cNvSpPr>
-            <a:spLocks noGrp="1"/>
-          </p:cNvSpPr>
-          <p:nvPr>
-            <p:ph type="title"/>
-          </p:nvPr>
-        </p:nvSpPr>
+      <p:pic>
+        <p:nvPicPr>
+          <p:cNvPr id="22" name="Picture 21" descr="Slate-V2-HD-vertPhotoInset.png"/>
+          <p:cNvPicPr>
+            <a:picLocks noChangeAspect="1"/>
+          </p:cNvPicPr>
+          <p:nvPr/>
+        </p:nvPicPr>
+        <p:blipFill>
+          <a:blip r:embed="rId2">
+            <a:extLst>
+              <a:ext uri="{28A0092B-C50C-407E-A947-70E740481C1C}">
+                <a14:useLocalDpi xmlns:a14="http://schemas.microsoft.com/office/drawing/2010/main" val="0"/>
+              </a:ext>
+            </a:extLst>
+          </a:blip>
+          <a:stretch>
+            <a:fillRect/>
+          </a:stretch>
+        </p:blipFill>
         <p:spPr>
           <a:xfrm>
-            <a:off x="1792288" y="4800600"/>
-            <a:ext cx="5486400" cy="566738"/>
+            <a:off x="7293665" y="609600"/>
+            <a:ext cx="3584166" cy="5204832"/>
+          </a:xfrm>
+          <a:prstGeom prst="rect">
+            <a:avLst/>
+          </a:prstGeom>
+        </p:spPr>
+      </p:pic>
+      <p:sp>
+        <p:nvSpPr>
+          <p:cNvPr id="2" name="Title 1"/>
+          <p:cNvSpPr>
+            <a:spLocks noGrp="1"/>
+          </p:cNvSpPr>
+          <p:nvPr>
+            <p:ph type="title"/>
+          </p:nvPr>
+        </p:nvSpPr>
+        <p:spPr>
+          <a:xfrm>
+            <a:off x="913795" y="609923"/>
+            <a:ext cx="5934949" cy="1829338"/>
           </a:xfrm>
         </p:spPr>
         <p:txBody>
-          <a:bodyPr anchor="b"/>
+          <a:bodyPr anchor="b">
+            <a:noAutofit/>
+          </a:bodyPr>
           <a:lstStyle>
-            <a:lvl1pPr algn="l">
-              <a:defRPr sz="2000" b="1"/>
+            <a:lvl1pPr algn="ctr">
+              <a:defRPr sz="3200" b="0"/>
             </a:lvl1pPr>
           </a:lstStyle>
           <a:p>
@@ -2362,6 +4966,7 @@
               <a:rPr lang="en-US"/>
               <a:t>Click to edit Master title style</a:t>
             </a:r>
+            <a:endParaRPr lang="en-US" dirty="0"/>
           </a:p>
         </p:txBody>
       </p:sp>
@@ -2369,7 +4974,7 @@
         <p:nvSpPr>
           <p:cNvPr id="3" name="Picture Placeholder 2"/>
           <p:cNvSpPr>
-            <a:spLocks noGrp="1"/>
+            <a:spLocks noGrp="1" noChangeAspect="1"/>
           </p:cNvSpPr>
           <p:nvPr>
             <p:ph type="pic" idx="1"/>
@@ -2377,77 +4982,92 @@
         </p:nvSpPr>
         <p:spPr>
           <a:xfrm>
-            <a:off x="1792288" y="612775"/>
-            <a:ext cx="5486400" cy="4114800"/>
+            <a:off x="7442551" y="763702"/>
+            <a:ext cx="3275751" cy="4912822"/>
+          </a:xfrm>
+          <a:effectLst>
+            <a:outerShdw blurRad="38100" dist="25400" dir="4440000">
+              <a:srgbClr val="000000">
+                <a:alpha val="36000"/>
+              </a:srgbClr>
+            </a:outerShdw>
+          </a:effectLst>
+        </p:spPr>
+        <p:txBody>
+          <a:bodyPr anchor="t">
+            <a:normAutofit/>
+          </a:bodyPr>
+          <a:lstStyle>
+            <a:lvl1pPr marL="0" indent="0" algn="ctr">
+              <a:buNone/>
+              <a:defRPr sz="1600"/>
+            </a:lvl1pPr>
+            <a:lvl2pPr marL="457200" indent="0">
+              <a:buNone/>
+              <a:defRPr sz="1600"/>
+            </a:lvl2pPr>
+            <a:lvl3pPr marL="914400" indent="0">
+              <a:buNone/>
+              <a:defRPr sz="1600"/>
+            </a:lvl3pPr>
+            <a:lvl4pPr marL="1371600" indent="0">
+              <a:buNone/>
+              <a:defRPr sz="1600"/>
+            </a:lvl4pPr>
+            <a:lvl5pPr marL="1828800" indent="0">
+              <a:buNone/>
+              <a:defRPr sz="1600"/>
+            </a:lvl5pPr>
+            <a:lvl6pPr marL="2286000" indent="0">
+              <a:buNone/>
+              <a:defRPr sz="1600"/>
+            </a:lvl6pPr>
+            <a:lvl7pPr marL="2743200" indent="0">
+              <a:buNone/>
+              <a:defRPr sz="1600"/>
+            </a:lvl7pPr>
+            <a:lvl8pPr marL="3200400" indent="0">
+              <a:buNone/>
+              <a:defRPr sz="1600"/>
+            </a:lvl8pPr>
+            <a:lvl9pPr marL="3657600" indent="0">
+              <a:buNone/>
+              <a:defRPr sz="1600"/>
+            </a:lvl9pPr>
+          </a:lstStyle>
+          <a:p>
+            <a:r>
+              <a:rPr lang="en-US"/>
+              <a:t>Click icon to add picture</a:t>
+            </a:r>
+            <a:endParaRPr lang="en-US" dirty="0"/>
+          </a:p>
+        </p:txBody>
+      </p:sp>
+      <p:sp>
+        <p:nvSpPr>
+          <p:cNvPr id="4" name="Text Placeholder 3"/>
+          <p:cNvSpPr>
+            <a:spLocks noGrp="1"/>
+          </p:cNvSpPr>
+          <p:nvPr>
+            <p:ph type="body" sz="half" idx="2"/>
+          </p:nvPr>
+        </p:nvSpPr>
+        <p:spPr>
+          <a:xfrm>
+            <a:off x="913795" y="2439261"/>
+            <a:ext cx="5934949" cy="3376134"/>
           </a:xfrm>
         </p:spPr>
         <p:txBody>
-          <a:bodyPr/>
+          <a:bodyPr anchor="t">
+            <a:normAutofit/>
+          </a:bodyPr>
           <a:lstStyle>
-            <a:lvl1pPr marL="0" indent="0">
-              <a:buNone/>
-              <a:defRPr sz="3200"/>
-            </a:lvl1pPr>
-            <a:lvl2pPr marL="457200" indent="0">
-              <a:buNone/>
-              <a:defRPr sz="2800"/>
-            </a:lvl2pPr>
-            <a:lvl3pPr marL="914400" indent="0">
-              <a:buNone/>
-              <a:defRPr sz="2400"/>
-            </a:lvl3pPr>
-            <a:lvl4pPr marL="1371600" indent="0">
-              <a:buNone/>
-              <a:defRPr sz="2000"/>
-            </a:lvl4pPr>
-            <a:lvl5pPr marL="1828800" indent="0">
-              <a:buNone/>
-              <a:defRPr sz="2000"/>
-            </a:lvl5pPr>
-            <a:lvl6pPr marL="2286000" indent="0">
-              <a:buNone/>
-              <a:defRPr sz="2000"/>
-            </a:lvl6pPr>
-            <a:lvl7pPr marL="2743200" indent="0">
-              <a:buNone/>
-              <a:defRPr sz="2000"/>
-            </a:lvl7pPr>
-            <a:lvl8pPr marL="3200400" indent="0">
-              <a:buNone/>
-              <a:defRPr sz="2000"/>
-            </a:lvl8pPr>
-            <a:lvl9pPr marL="3657600" indent="0">
-              <a:buNone/>
-              <a:defRPr sz="2000"/>
-            </a:lvl9pPr>
-          </a:lstStyle>
-          <a:p>
-            <a:endParaRPr lang="en-US"/>
-          </a:p>
-        </p:txBody>
-      </p:sp>
-      <p:sp>
-        <p:nvSpPr>
-          <p:cNvPr id="4" name="Text Placeholder 3"/>
-          <p:cNvSpPr>
-            <a:spLocks noGrp="1"/>
-          </p:cNvSpPr>
-          <p:nvPr>
-            <p:ph type="body" sz="half" idx="2"/>
-          </p:nvPr>
-        </p:nvSpPr>
-        <p:spPr>
-          <a:xfrm>
-            <a:off x="1792288" y="5367338"/>
-            <a:ext cx="5486400" cy="804862"/>
-          </a:xfrm>
-        </p:spPr>
-        <p:txBody>
-          <a:bodyPr/>
-          <a:lstStyle>
-            <a:lvl1pPr marL="0" indent="0">
-              <a:buNone/>
-              <a:defRPr sz="1400"/>
+            <a:lvl1pPr marL="0" indent="0" algn="ctr">
+              <a:buNone/>
+              <a:defRPr sz="1600"/>
             </a:lvl1pPr>
             <a:lvl2pPr marL="457200" indent="0">
               <a:buNone/>
@@ -2508,7 +5128,7 @@
           <a:p>
             <a:fld id="{5BCAD085-E8A6-8845-BD4E-CB4CCA059FC4}" type="datetimeFigureOut">
               <a:rPr lang="en-US" smtClean="0"/>
-              <a:t>3/8/2026</a:t>
+              <a:t>3/9/2026</a:t>
             </a:fld>
             <a:endParaRPr lang="en-US"/>
           </a:p>
@@ -2529,7 +5149,7 @@
           <a:bodyPr/>
           <a:lstStyle/>
           <a:p>
-            <a:endParaRPr lang="en-US"/>
+            <a:endParaRPr lang="en-US" dirty="0"/>
           </a:p>
         </p:txBody>
       </p:sp>
@@ -2559,7 +5179,7 @@
     </p:spTree>
     <p:extLst>
       <p:ext uri="{BB962C8B-B14F-4D97-AF65-F5344CB8AC3E}">
-        <p14:creationId xmlns:p14="http://schemas.microsoft.com/office/powerpoint/2010/main" val="3889236939"/>
+        <p14:creationId xmlns:p14="http://schemas.microsoft.com/office/powerpoint/2010/main" val="2013042676"/>
       </p:ext>
     </p:extLst>
   </p:cSld>
@@ -2573,8 +5193,8 @@
 <p:sldMaster xmlns:a="http://schemas.openxmlformats.org/drawingml/2006/main" xmlns:r="http://schemas.openxmlformats.org/officeDocument/2006/relationships" xmlns:p="http://schemas.openxmlformats.org/presentationml/2006/main">
   <p:cSld>
     <p:bg>
-      <p:bgRef idx="1001">
-        <a:schemeClr val="bg1"/>
+      <p:bgRef idx="1003">
+        <a:schemeClr val="bg2"/>
       </p:bgRef>
     </p:bg>
     <p:spTree>
@@ -2603,101 +5223,209 @@
         </p:nvSpPr>
         <p:spPr>
           <a:xfrm>
-            <a:off x="457200" y="274638"/>
-            <a:ext cx="8229600" cy="1143000"/>
+            <a:off x="913795" y="609600"/>
+            <a:ext cx="10353762" cy="970450"/>
+          </a:xfrm>
+          <a:prstGeom prst="rect">
+            <a:avLst/>
+          </a:prstGeom>
+          <a:effectLst>
+            <a:outerShdw blurRad="25400" dir="17880000">
+              <a:srgbClr val="000000">
+                <a:alpha val="46000"/>
+              </a:srgbClr>
+            </a:outerShdw>
+          </a:effectLst>
+        </p:spPr>
+        <p:txBody>
+          <a:bodyPr vert="horz" lIns="91440" tIns="45720" rIns="91440" bIns="45720" rtlCol="0" anchor="ctr">
+            <a:normAutofit/>
+          </a:bodyPr>
+          <a:lstStyle/>
+          <a:p>
+            <a:r>
+              <a:rPr lang="en-US"/>
+              <a:t>Click to edit Master title style</a:t>
+            </a:r>
+            <a:endParaRPr lang="en-US" dirty="0"/>
+          </a:p>
+        </p:txBody>
+      </p:sp>
+      <p:sp>
+        <p:nvSpPr>
+          <p:cNvPr id="3" name="Text Placeholder 2"/>
+          <p:cNvSpPr>
+            <a:spLocks noGrp="1"/>
+          </p:cNvSpPr>
+          <p:nvPr>
+            <p:ph type="body" idx="1"/>
+          </p:nvPr>
+        </p:nvSpPr>
+        <p:spPr>
+          <a:xfrm>
+            <a:off x="913795" y="1732449"/>
+            <a:ext cx="10353762" cy="4058751"/>
+          </a:xfrm>
+          <a:prstGeom prst="rect">
+            <a:avLst/>
+          </a:prstGeom>
+          <a:effectLst>
+            <a:outerShdw blurRad="25400" dir="17880000">
+              <a:srgbClr val="000000">
+                <a:alpha val="46000"/>
+              </a:srgbClr>
+            </a:outerShdw>
+          </a:effectLst>
+        </p:spPr>
+        <p:txBody>
+          <a:bodyPr vert="horz" lIns="91440" tIns="45720" rIns="91440" bIns="45720" rtlCol="0" anchor="t">
+            <a:normAutofit/>
+          </a:bodyPr>
+          <a:lstStyle/>
+          <a:p>
+            <a:pPr lvl="0"/>
+            <a:r>
+              <a:rPr lang="en-US"/>
+              <a:t>Click to edit Master text styles</a:t>
+            </a:r>
+          </a:p>
+          <a:p>
+            <a:pPr lvl="1"/>
+            <a:r>
+              <a:rPr lang="en-US"/>
+              <a:t>Second level</a:t>
+            </a:r>
+          </a:p>
+          <a:p>
+            <a:pPr lvl="2"/>
+            <a:r>
+              <a:rPr lang="en-US"/>
+              <a:t>Third level</a:t>
+            </a:r>
+          </a:p>
+          <a:p>
+            <a:pPr lvl="3"/>
+            <a:r>
+              <a:rPr lang="en-US"/>
+              <a:t>Fourth level</a:t>
+            </a:r>
+          </a:p>
+          <a:p>
+            <a:pPr lvl="4"/>
+            <a:r>
+              <a:rPr lang="en-US"/>
+              <a:t>Fifth level</a:t>
+            </a:r>
+            <a:endParaRPr lang="en-US" dirty="0"/>
+          </a:p>
+        </p:txBody>
+      </p:sp>
+      <p:sp>
+        <p:nvSpPr>
+          <p:cNvPr id="4" name="Date Placeholder 3"/>
+          <p:cNvSpPr>
+            <a:spLocks noGrp="1"/>
+          </p:cNvSpPr>
+          <p:nvPr>
+            <p:ph type="dt" sz="half" idx="2"/>
+          </p:nvPr>
+        </p:nvSpPr>
+        <p:spPr>
+          <a:xfrm>
+            <a:off x="7678736" y="5883275"/>
+            <a:ext cx="2743200" cy="365125"/>
           </a:xfrm>
           <a:prstGeom prst="rect">
             <a:avLst/>
           </a:prstGeom>
         </p:spPr>
         <p:txBody>
-          <a:bodyPr vert="horz" lIns="91440" tIns="45720" rIns="91440" bIns="45720" rtlCol="0" anchor="ctr">
-            <a:normAutofit/>
-          </a:bodyPr>
-          <a:lstStyle/>
-          <a:p>
-            <a:r>
-              <a:rPr lang="en-US"/>
-              <a:t>Click to edit Master title style</a:t>
-            </a:r>
-          </a:p>
-        </p:txBody>
-      </p:sp>
-      <p:sp>
-        <p:nvSpPr>
-          <p:cNvPr id="3" name="Text Placeholder 2"/>
-          <p:cNvSpPr>
-            <a:spLocks noGrp="1"/>
-          </p:cNvSpPr>
-          <p:nvPr>
-            <p:ph type="body" idx="1"/>
+          <a:bodyPr vert="horz" lIns="91440" tIns="45720" rIns="91440" bIns="45720" rtlCol="0" anchor="ctr"/>
+          <a:lstStyle>
+            <a:lvl1pPr algn="r">
+              <a:defRPr sz="1000">
+                <a:solidFill>
+                  <a:schemeClr val="tx1">
+                    <a:lumMod val="95000"/>
+                  </a:schemeClr>
+                </a:solidFill>
+                <a:effectLst>
+                  <a:outerShdw blurRad="50800" dist="38100" dir="2700000" algn="tl" rotWithShape="0">
+                    <a:schemeClr val="bg1">
+                      <a:alpha val="43000"/>
+                    </a:schemeClr>
+                  </a:outerShdw>
+                </a:effectLst>
+              </a:defRPr>
+            </a:lvl1pPr>
+          </a:lstStyle>
+          <a:p>
+            <a:fld id="{5BCAD085-E8A6-8845-BD4E-CB4CCA059FC4}" type="datetimeFigureOut">
+              <a:rPr lang="en-US" smtClean="0"/>
+              <a:t>3/9/2026</a:t>
+            </a:fld>
+            <a:endParaRPr lang="en-US"/>
+          </a:p>
+        </p:txBody>
+      </p:sp>
+      <p:sp>
+        <p:nvSpPr>
+          <p:cNvPr id="5" name="Footer Placeholder 4"/>
+          <p:cNvSpPr>
+            <a:spLocks noGrp="1"/>
+          </p:cNvSpPr>
+          <p:nvPr>
+            <p:ph type="ftr" sz="quarter" idx="3"/>
           </p:nvPr>
         </p:nvSpPr>
         <p:spPr>
           <a:xfrm>
-            <a:off x="457200" y="1600200"/>
-            <a:ext cx="8229600" cy="4525963"/>
+            <a:off x="913795" y="5883275"/>
+            <a:ext cx="6672865" cy="365125"/>
           </a:xfrm>
           <a:prstGeom prst="rect">
             <a:avLst/>
           </a:prstGeom>
         </p:spPr>
         <p:txBody>
-          <a:bodyPr vert="horz" lIns="91440" tIns="45720" rIns="91440" bIns="45720" rtlCol="0">
-            <a:normAutofit/>
-          </a:bodyPr>
-          <a:lstStyle/>
-          <a:p>
-            <a:pPr lvl="0"/>
-            <a:r>
-              <a:rPr lang="en-US"/>
-              <a:t>Click to edit Master text styles</a:t>
-            </a:r>
-          </a:p>
-          <a:p>
-            <a:pPr lvl="1"/>
-            <a:r>
-              <a:rPr lang="en-US"/>
-              <a:t>Second level</a:t>
-            </a:r>
-          </a:p>
-          <a:p>
-            <a:pPr lvl="2"/>
-            <a:r>
-              <a:rPr lang="en-US"/>
-              <a:t>Third level</a:t>
-            </a:r>
-          </a:p>
-          <a:p>
-            <a:pPr lvl="3"/>
-            <a:r>
-              <a:rPr lang="en-US"/>
-              <a:t>Fourth level</a:t>
-            </a:r>
-          </a:p>
-          <a:p>
-            <a:pPr lvl="4"/>
-            <a:r>
-              <a:rPr lang="en-US"/>
-              <a:t>Fifth level</a:t>
-            </a:r>
-          </a:p>
-        </p:txBody>
-      </p:sp>
-      <p:sp>
-        <p:nvSpPr>
-          <p:cNvPr id="4" name="Date Placeholder 3"/>
-          <p:cNvSpPr>
-            <a:spLocks noGrp="1"/>
-          </p:cNvSpPr>
-          <p:nvPr>
-            <p:ph type="dt" sz="half" idx="2"/>
+          <a:bodyPr vert="horz" lIns="91440" tIns="45720" rIns="91440" bIns="45720" rtlCol="0" anchor="ctr"/>
+          <a:lstStyle>
+            <a:lvl1pPr algn="l">
+              <a:defRPr sz="1000">
+                <a:solidFill>
+                  <a:schemeClr val="tx1">
+                    <a:lumMod val="95000"/>
+                  </a:schemeClr>
+                </a:solidFill>
+                <a:effectLst>
+                  <a:outerShdw blurRad="50800" dist="38100" dir="2700000" algn="tl" rotWithShape="0">
+                    <a:schemeClr val="bg1">
+                      <a:alpha val="43000"/>
+                    </a:schemeClr>
+                  </a:outerShdw>
+                </a:effectLst>
+              </a:defRPr>
+            </a:lvl1pPr>
+          </a:lstStyle>
+          <a:p>
+            <a:endParaRPr lang="en-US"/>
+          </a:p>
+        </p:txBody>
+      </p:sp>
+      <p:sp>
+        <p:nvSpPr>
+          <p:cNvPr id="6" name="Slide Number Placeholder 5"/>
+          <p:cNvSpPr>
+            <a:spLocks noGrp="1"/>
+          </p:cNvSpPr>
+          <p:nvPr>
+            <p:ph type="sldNum" sz="quarter" idx="4"/>
           </p:nvPr>
         </p:nvSpPr>
         <p:spPr>
           <a:xfrm>
-            <a:off x="457200" y="6356350"/>
-            <a:ext cx="2133600" cy="365125"/>
+            <a:off x="10514011" y="5883275"/>
+            <a:ext cx="753545" cy="365125"/>
           </a:xfrm>
           <a:prstGeom prst="rect">
             <a:avLst/>
@@ -2706,91 +5434,20 @@
         <p:txBody>
           <a:bodyPr vert="horz" lIns="91440" tIns="45720" rIns="91440" bIns="45720" rtlCol="0" anchor="ctr"/>
           <a:lstStyle>
-            <a:lvl1pPr algn="l">
-              <a:defRPr sz="1200">
+            <a:lvl1pPr algn="r">
+              <a:defRPr sz="1000">
                 <a:solidFill>
                   <a:schemeClr val="tx1">
-                    <a:tint val="75000"/>
+                    <a:lumMod val="95000"/>
                   </a:schemeClr>
                 </a:solidFill>
-              </a:defRPr>
-            </a:lvl1pPr>
-          </a:lstStyle>
-          <a:p>
-            <a:fld id="{5BCAD085-E8A6-8845-BD4E-CB4CCA059FC4}" type="datetimeFigureOut">
-              <a:rPr lang="en-US" smtClean="0"/>
-              <a:t>3/8/2026</a:t>
-            </a:fld>
-            <a:endParaRPr lang="en-US"/>
-          </a:p>
-        </p:txBody>
-      </p:sp>
-      <p:sp>
-        <p:nvSpPr>
-          <p:cNvPr id="5" name="Footer Placeholder 4"/>
-          <p:cNvSpPr>
-            <a:spLocks noGrp="1"/>
-          </p:cNvSpPr>
-          <p:nvPr>
-            <p:ph type="ftr" sz="quarter" idx="3"/>
-          </p:nvPr>
-        </p:nvSpPr>
-        <p:spPr>
-          <a:xfrm>
-            <a:off x="3124200" y="6356350"/>
-            <a:ext cx="2895600" cy="365125"/>
-          </a:xfrm>
-          <a:prstGeom prst="rect">
-            <a:avLst/>
-          </a:prstGeom>
-        </p:spPr>
-        <p:txBody>
-          <a:bodyPr vert="horz" lIns="91440" tIns="45720" rIns="91440" bIns="45720" rtlCol="0" anchor="ctr"/>
-          <a:lstStyle>
-            <a:lvl1pPr algn="ctr">
-              <a:defRPr sz="1200">
-                <a:solidFill>
-                  <a:schemeClr val="tx1">
-                    <a:tint val="75000"/>
-                  </a:schemeClr>
-                </a:solidFill>
-              </a:defRPr>
-            </a:lvl1pPr>
-          </a:lstStyle>
-          <a:p>
-            <a:endParaRPr lang="en-US"/>
-          </a:p>
-        </p:txBody>
-      </p:sp>
-      <p:sp>
-        <p:nvSpPr>
-          <p:cNvPr id="6" name="Slide Number Placeholder 5"/>
-          <p:cNvSpPr>
-            <a:spLocks noGrp="1"/>
-          </p:cNvSpPr>
-          <p:nvPr>
-            <p:ph type="sldNum" sz="quarter" idx="4"/>
-          </p:nvPr>
-        </p:nvSpPr>
-        <p:spPr>
-          <a:xfrm>
-            <a:off x="6553200" y="6356350"/>
-            <a:ext cx="2133600" cy="365125"/>
-          </a:xfrm>
-          <a:prstGeom prst="rect">
-            <a:avLst/>
-          </a:prstGeom>
-        </p:spPr>
-        <p:txBody>
-          <a:bodyPr vert="horz" lIns="91440" tIns="45720" rIns="91440" bIns="45720" rtlCol="0" anchor="ctr"/>
-          <a:lstStyle>
-            <a:lvl1pPr algn="r">
-              <a:defRPr sz="1200">
-                <a:solidFill>
-                  <a:schemeClr val="tx1">
-                    <a:tint val="75000"/>
-                  </a:schemeClr>
-                </a:solidFill>
+                <a:effectLst>
+                  <a:outerShdw blurRad="50800" dist="38100" dir="2700000" algn="tl" rotWithShape="0">
+                    <a:schemeClr val="bg1">
+                      <a:alpha val="43000"/>
+                    </a:schemeClr>
+                  </a:outerShdw>
+                </a:effectLst>
               </a:defRPr>
             </a:lvl1pPr>
           </a:lstStyle>
@@ -2806,23 +5463,29 @@
     </p:spTree>
     <p:extLst>
       <p:ext uri="{BB962C8B-B14F-4D97-AF65-F5344CB8AC3E}">
-        <p14:creationId xmlns:p14="http://schemas.microsoft.com/office/powerpoint/2010/main" val="2209977519"/>
+        <p14:creationId xmlns:p14="http://schemas.microsoft.com/office/powerpoint/2010/main" val="3876559306"/>
       </p:ext>
     </p:extLst>
   </p:cSld>
-  <p:clrMap bg1="lt1" tx1="dk1" bg2="lt2" tx2="dk2" accent1="accent1" accent2="accent2" accent3="accent3" accent4="accent4" accent5="accent5" accent6="accent6" hlink="hlink" folHlink="folHlink"/>
+  <p:clrMap bg1="dk1" tx1="lt1" bg2="dk2" tx2="lt2" accent1="accent1" accent2="accent2" accent3="accent3" accent4="accent4" accent5="accent5" accent6="accent6" hlink="hlink" folHlink="folHlink"/>
   <p:sldLayoutIdLst>
-    <p:sldLayoutId id="2147483649" r:id="rId1"/>
-    <p:sldLayoutId id="2147483650" r:id="rId2"/>
-    <p:sldLayoutId id="2147483651" r:id="rId3"/>
-    <p:sldLayoutId id="2147483652" r:id="rId4"/>
-    <p:sldLayoutId id="2147483653" r:id="rId5"/>
-    <p:sldLayoutId id="2147483654" r:id="rId6"/>
-    <p:sldLayoutId id="2147483655" r:id="rId7"/>
-    <p:sldLayoutId id="2147483656" r:id="rId8"/>
-    <p:sldLayoutId id="2147483657" r:id="rId9"/>
-    <p:sldLayoutId id="2147483658" r:id="rId10"/>
-    <p:sldLayoutId id="2147483659" r:id="rId11"/>
+    <p:sldLayoutId id="2147483904" r:id="rId1"/>
+    <p:sldLayoutId id="2147483905" r:id="rId2"/>
+    <p:sldLayoutId id="2147483906" r:id="rId3"/>
+    <p:sldLayoutId id="2147483907" r:id="rId4"/>
+    <p:sldLayoutId id="2147483908" r:id="rId5"/>
+    <p:sldLayoutId id="2147483909" r:id="rId6"/>
+    <p:sldLayoutId id="2147483910" r:id="rId7"/>
+    <p:sldLayoutId id="2147483911" r:id="rId8"/>
+    <p:sldLayoutId id="2147483912" r:id="rId9"/>
+    <p:sldLayoutId id="2147483913" r:id="rId10"/>
+    <p:sldLayoutId id="2147483914" r:id="rId11"/>
+    <p:sldLayoutId id="2147483915" r:id="rId12"/>
+    <p:sldLayoutId id="2147483916" r:id="rId13"/>
+    <p:sldLayoutId id="2147483917" r:id="rId14"/>
+    <p:sldLayoutId id="2147483918" r:id="rId15"/>
+    <p:sldLayoutId id="2147483919" r:id="rId16"/>
+    <p:sldLayoutId id="2147483920" r:id="rId17"/>
   </p:sldLayoutIdLst>
   <p:txStyles>
     <p:titleStyle>
@@ -2831,147 +5494,426 @@
           <a:spcPct val="0"/>
         </a:spcBef>
         <a:buNone/>
-        <a:defRPr sz="4400" kern="1200">
+        <a:defRPr sz="4000" kern="1200">
+          <a:ln>
+            <a:solidFill>
+              <a:schemeClr val="bg1">
+                <a:lumMod val="75000"/>
+                <a:lumOff val="25000"/>
+                <a:alpha val="10000"/>
+              </a:schemeClr>
+            </a:solidFill>
+          </a:ln>
           <a:solidFill>
-            <a:schemeClr val="tx1"/>
+            <a:schemeClr val="tx2"/>
           </a:solidFill>
+          <a:effectLst>
+            <a:outerShdw blurRad="9525" dist="25400" dir="14640000" algn="tl" rotWithShape="0">
+              <a:schemeClr val="bg1">
+                <a:alpha val="30000"/>
+              </a:schemeClr>
+            </a:outerShdw>
+          </a:effectLst>
           <a:latin typeface="+mj-lt"/>
           <a:ea typeface="+mj-ea"/>
-          <a:cs typeface="+mj-cs"/>
+          <a:cs typeface="Trebuchet MS"/>
         </a:defRPr>
       </a:lvl1pPr>
+      <a:lvl2pPr eaLnBrk="1" hangingPunct="1">
+        <a:defRPr>
+          <a:solidFill>
+            <a:schemeClr val="tx2"/>
+          </a:solidFill>
+        </a:defRPr>
+      </a:lvl2pPr>
+      <a:lvl3pPr eaLnBrk="1" hangingPunct="1">
+        <a:defRPr>
+          <a:solidFill>
+            <a:schemeClr val="tx2"/>
+          </a:solidFill>
+        </a:defRPr>
+      </a:lvl3pPr>
+      <a:lvl4pPr eaLnBrk="1" hangingPunct="1">
+        <a:defRPr>
+          <a:solidFill>
+            <a:schemeClr val="tx2"/>
+          </a:solidFill>
+        </a:defRPr>
+      </a:lvl4pPr>
+      <a:lvl5pPr eaLnBrk="1" hangingPunct="1">
+        <a:defRPr>
+          <a:solidFill>
+            <a:schemeClr val="tx2"/>
+          </a:solidFill>
+        </a:defRPr>
+      </a:lvl5pPr>
+      <a:lvl6pPr eaLnBrk="1" hangingPunct="1">
+        <a:defRPr>
+          <a:solidFill>
+            <a:schemeClr val="tx2"/>
+          </a:solidFill>
+        </a:defRPr>
+      </a:lvl6pPr>
+      <a:lvl7pPr eaLnBrk="1" hangingPunct="1">
+        <a:defRPr>
+          <a:solidFill>
+            <a:schemeClr val="tx2"/>
+          </a:solidFill>
+        </a:defRPr>
+      </a:lvl7pPr>
+      <a:lvl8pPr eaLnBrk="1" hangingPunct="1">
+        <a:defRPr>
+          <a:solidFill>
+            <a:schemeClr val="tx2"/>
+          </a:solidFill>
+        </a:defRPr>
+      </a:lvl8pPr>
+      <a:lvl9pPr eaLnBrk="1" hangingPunct="1">
+        <a:defRPr>
+          <a:solidFill>
+            <a:schemeClr val="tx2"/>
+          </a:solidFill>
+        </a:defRPr>
+      </a:lvl9pPr>
     </p:titleStyle>
     <p:bodyStyle>
-      <a:lvl1pPr marL="342900" indent="-342900" algn="l" defTabSz="457200" rtl="0" eaLnBrk="1" latinLnBrk="0" hangingPunct="1">
+      <a:lvl1pPr marL="342900" indent="-306000" algn="l" defTabSz="457200" rtl="0" eaLnBrk="1" latinLnBrk="0" hangingPunct="1">
         <a:spcBef>
           <a:spcPct val="20000"/>
         </a:spcBef>
-        <a:buFont typeface="Arial"/>
-        <a:buChar char="•"/>
-        <a:defRPr sz="3200" kern="1200">
+        <a:spcAft>
+          <a:spcPts val="600"/>
+        </a:spcAft>
+        <a:buClr>
+          <a:schemeClr val="tx2"/>
+        </a:buClr>
+        <a:buSzPct val="70000"/>
+        <a:buFont typeface="Wingdings 2" charset="2"/>
+        <a:buChar char=""/>
+        <a:defRPr sz="2000" kern="1200">
+          <a:ln>
+            <a:solidFill>
+              <a:schemeClr val="bg1">
+                <a:lumMod val="75000"/>
+                <a:lumOff val="25000"/>
+                <a:alpha val="10000"/>
+              </a:schemeClr>
+            </a:solidFill>
+          </a:ln>
           <a:solidFill>
-            <a:schemeClr val="tx1"/>
+            <a:schemeClr val="tx2"/>
           </a:solidFill>
+          <a:effectLst>
+            <a:outerShdw blurRad="9525" dist="25400" dir="14640000" algn="tl" rotWithShape="0">
+              <a:schemeClr val="bg1">
+                <a:alpha val="30000"/>
+              </a:schemeClr>
+            </a:outerShdw>
+          </a:effectLst>
           <a:latin typeface="+mn-lt"/>
           <a:ea typeface="+mn-ea"/>
           <a:cs typeface="+mn-cs"/>
         </a:defRPr>
       </a:lvl1pPr>
-      <a:lvl2pPr marL="742950" indent="-285750" algn="l" defTabSz="457200" rtl="0" eaLnBrk="1" latinLnBrk="0" hangingPunct="1">
+      <a:lvl2pPr marL="720000" indent="-270000" algn="l" defTabSz="457200" rtl="0" eaLnBrk="1" latinLnBrk="0" hangingPunct="1">
         <a:spcBef>
           <a:spcPct val="20000"/>
         </a:spcBef>
-        <a:buFont typeface="Arial"/>
-        <a:buChar char="–"/>
-        <a:defRPr sz="2800" kern="1200">
+        <a:spcAft>
+          <a:spcPts val="600"/>
+        </a:spcAft>
+        <a:buClr>
+          <a:schemeClr val="tx2"/>
+        </a:buClr>
+        <a:buSzPct val="70000"/>
+        <a:buFont typeface="Wingdings 2" charset="2"/>
+        <a:buChar char=""/>
+        <a:defRPr sz="1800" kern="1200">
+          <a:ln>
+            <a:solidFill>
+              <a:schemeClr val="bg1">
+                <a:lumMod val="75000"/>
+                <a:lumOff val="25000"/>
+                <a:alpha val="10000"/>
+              </a:schemeClr>
+            </a:solidFill>
+          </a:ln>
           <a:solidFill>
-            <a:schemeClr val="tx1"/>
+            <a:schemeClr val="tx2"/>
           </a:solidFill>
+          <a:effectLst>
+            <a:outerShdw blurRad="9525" dist="25400" dir="14640000" algn="tl" rotWithShape="0">
+              <a:schemeClr val="bg1">
+                <a:alpha val="30000"/>
+              </a:schemeClr>
+            </a:outerShdw>
+          </a:effectLst>
           <a:latin typeface="+mn-lt"/>
           <a:ea typeface="+mn-ea"/>
           <a:cs typeface="+mn-cs"/>
         </a:defRPr>
       </a:lvl2pPr>
-      <a:lvl3pPr marL="1143000" indent="-228600" algn="l" defTabSz="457200" rtl="0" eaLnBrk="1" latinLnBrk="0" hangingPunct="1">
+      <a:lvl3pPr marL="1026000" indent="-216000" algn="l" defTabSz="457200" rtl="0" eaLnBrk="1" latinLnBrk="0" hangingPunct="1">
         <a:spcBef>
           <a:spcPct val="20000"/>
         </a:spcBef>
-        <a:buFont typeface="Arial"/>
-        <a:buChar char="•"/>
-        <a:defRPr sz="2400" kern="1200">
+        <a:spcAft>
+          <a:spcPts val="600"/>
+        </a:spcAft>
+        <a:buClr>
+          <a:schemeClr val="tx2"/>
+        </a:buClr>
+        <a:buSzPct val="70000"/>
+        <a:buFont typeface="Wingdings 2" charset="2"/>
+        <a:buChar char=""/>
+        <a:defRPr sz="1600" kern="1200">
+          <a:ln>
+            <a:solidFill>
+              <a:schemeClr val="bg1">
+                <a:lumMod val="75000"/>
+                <a:lumOff val="25000"/>
+                <a:alpha val="10000"/>
+              </a:schemeClr>
+            </a:solidFill>
+          </a:ln>
           <a:solidFill>
-            <a:schemeClr val="tx1"/>
+            <a:schemeClr val="tx2"/>
           </a:solidFill>
+          <a:effectLst>
+            <a:outerShdw blurRad="9525" dist="25400" dir="14640000" algn="tl" rotWithShape="0">
+              <a:schemeClr val="bg1">
+                <a:alpha val="30000"/>
+              </a:schemeClr>
+            </a:outerShdw>
+          </a:effectLst>
           <a:latin typeface="+mn-lt"/>
           <a:ea typeface="+mn-ea"/>
           <a:cs typeface="+mn-cs"/>
         </a:defRPr>
       </a:lvl3pPr>
-      <a:lvl4pPr marL="1600200" indent="-228600" algn="l" defTabSz="457200" rtl="0" eaLnBrk="1" latinLnBrk="0" hangingPunct="1">
+      <a:lvl4pPr marL="1386000" indent="-216000" algn="l" defTabSz="457200" rtl="0" eaLnBrk="1" latinLnBrk="0" hangingPunct="1">
         <a:spcBef>
           <a:spcPct val="20000"/>
         </a:spcBef>
-        <a:buFont typeface="Arial"/>
-        <a:buChar char="–"/>
-        <a:defRPr sz="2000" kern="1200">
+        <a:spcAft>
+          <a:spcPts val="600"/>
+        </a:spcAft>
+        <a:buClr>
+          <a:schemeClr val="tx2"/>
+        </a:buClr>
+        <a:buSzPct val="70000"/>
+        <a:buFont typeface="Wingdings 2" charset="2"/>
+        <a:buChar char=""/>
+        <a:defRPr sz="1400" kern="1200">
+          <a:ln>
+            <a:solidFill>
+              <a:schemeClr val="bg1">
+                <a:lumMod val="75000"/>
+                <a:lumOff val="25000"/>
+                <a:alpha val="10000"/>
+              </a:schemeClr>
+            </a:solidFill>
+          </a:ln>
           <a:solidFill>
-            <a:schemeClr val="tx1"/>
+            <a:schemeClr val="tx2"/>
           </a:solidFill>
+          <a:effectLst>
+            <a:outerShdw blurRad="9525" dist="25400" dir="14640000" algn="tl" rotWithShape="0">
+              <a:schemeClr val="bg1">
+                <a:alpha val="30000"/>
+              </a:schemeClr>
+            </a:outerShdw>
+          </a:effectLst>
           <a:latin typeface="+mn-lt"/>
           <a:ea typeface="+mn-ea"/>
           <a:cs typeface="+mn-cs"/>
         </a:defRPr>
       </a:lvl4pPr>
-      <a:lvl5pPr marL="2057400" indent="-228600" algn="l" defTabSz="457200" rtl="0" eaLnBrk="1" latinLnBrk="0" hangingPunct="1">
+      <a:lvl5pPr marL="1674000" indent="-216000" algn="l" defTabSz="457200" rtl="0" eaLnBrk="1" latinLnBrk="0" hangingPunct="1">
         <a:spcBef>
           <a:spcPct val="20000"/>
         </a:spcBef>
-        <a:buFont typeface="Arial"/>
-        <a:buChar char="»"/>
-        <a:defRPr sz="2000" kern="1200">
+        <a:spcAft>
+          <a:spcPts val="600"/>
+        </a:spcAft>
+        <a:buClr>
+          <a:schemeClr val="tx2"/>
+        </a:buClr>
+        <a:buSzPct val="70000"/>
+        <a:buFont typeface="Wingdings 2" charset="2"/>
+        <a:buChar char=""/>
+        <a:defRPr sz="1400" kern="1200">
+          <a:ln>
+            <a:solidFill>
+              <a:schemeClr val="bg1">
+                <a:lumMod val="75000"/>
+                <a:lumOff val="25000"/>
+                <a:alpha val="10000"/>
+              </a:schemeClr>
+            </a:solidFill>
+          </a:ln>
           <a:solidFill>
-            <a:schemeClr val="tx1"/>
+            <a:schemeClr val="tx2"/>
           </a:solidFill>
+          <a:effectLst>
+            <a:outerShdw blurRad="9525" dist="25400" dir="14640000" algn="tl" rotWithShape="0">
+              <a:schemeClr val="bg1">
+                <a:alpha val="30000"/>
+              </a:schemeClr>
+            </a:outerShdw>
+          </a:effectLst>
           <a:latin typeface="+mn-lt"/>
           <a:ea typeface="+mn-ea"/>
           <a:cs typeface="+mn-cs"/>
         </a:defRPr>
       </a:lvl5pPr>
-      <a:lvl6pPr marL="2514600" indent="-228600" algn="l" defTabSz="457200" rtl="0" eaLnBrk="1" latinLnBrk="0" hangingPunct="1">
+      <a:lvl6pPr marL="2014600" indent="-228600" algn="l" defTabSz="457200" rtl="0" eaLnBrk="1" latinLnBrk="0" hangingPunct="1">
         <a:spcBef>
           <a:spcPct val="20000"/>
         </a:spcBef>
-        <a:buFont typeface="Arial"/>
-        <a:buChar char="•"/>
-        <a:defRPr sz="2000" kern="1200">
+        <a:spcAft>
+          <a:spcPts val="600"/>
+        </a:spcAft>
+        <a:buClr>
+          <a:schemeClr val="tx2"/>
+        </a:buClr>
+        <a:buSzPct val="70000"/>
+        <a:buFont typeface="Wingdings 2" charset="2"/>
+        <a:buChar char=""/>
+        <a:defRPr sz="1400" kern="1200">
+          <a:ln>
+            <a:solidFill>
+              <a:schemeClr val="bg1">
+                <a:lumMod val="75000"/>
+                <a:lumOff val="25000"/>
+                <a:alpha val="10000"/>
+              </a:schemeClr>
+            </a:solidFill>
+          </a:ln>
           <a:solidFill>
-            <a:schemeClr val="tx1"/>
+            <a:schemeClr val="tx2"/>
           </a:solidFill>
+          <a:effectLst>
+            <a:outerShdw blurRad="9525" dist="25400" dir="14640000" algn="tl" rotWithShape="0">
+              <a:schemeClr val="bg1">
+                <a:alpha val="30000"/>
+              </a:schemeClr>
+            </a:outerShdw>
+          </a:effectLst>
           <a:latin typeface="+mn-lt"/>
           <a:ea typeface="+mn-ea"/>
           <a:cs typeface="+mn-cs"/>
         </a:defRPr>
       </a:lvl6pPr>
-      <a:lvl7pPr marL="2971800" indent="-228600" algn="l" defTabSz="457200" rtl="0" eaLnBrk="1" latinLnBrk="0" hangingPunct="1">
+      <a:lvl7pPr marL="2401800" indent="-228600" algn="l" defTabSz="457200" rtl="0" eaLnBrk="1" latinLnBrk="0" hangingPunct="1">
         <a:spcBef>
           <a:spcPct val="20000"/>
         </a:spcBef>
-        <a:buFont typeface="Arial"/>
-        <a:buChar char="•"/>
-        <a:defRPr sz="2000" kern="1200">
+        <a:spcAft>
+          <a:spcPts val="600"/>
+        </a:spcAft>
+        <a:buClr>
+          <a:schemeClr val="tx2"/>
+        </a:buClr>
+        <a:buSzPct val="70000"/>
+        <a:buFont typeface="Wingdings 2" charset="2"/>
+        <a:buChar char=""/>
+        <a:defRPr sz="1400" kern="1200">
+          <a:ln>
+            <a:solidFill>
+              <a:schemeClr val="bg1">
+                <a:lumMod val="75000"/>
+                <a:lumOff val="25000"/>
+                <a:alpha val="10000"/>
+              </a:schemeClr>
+            </a:solidFill>
+          </a:ln>
           <a:solidFill>
-            <a:schemeClr val="tx1"/>
+            <a:schemeClr val="tx2"/>
           </a:solidFill>
+          <a:effectLst>
+            <a:outerShdw blurRad="9525" dist="25400" dir="14640000" algn="tl" rotWithShape="0">
+              <a:schemeClr val="bg1">
+                <a:alpha val="30000"/>
+              </a:schemeClr>
+            </a:outerShdw>
+          </a:effectLst>
           <a:latin typeface="+mn-lt"/>
           <a:ea typeface="+mn-ea"/>
           <a:cs typeface="+mn-cs"/>
         </a:defRPr>
       </a:lvl7pPr>
-      <a:lvl8pPr marL="3429000" indent="-228600" algn="l" defTabSz="457200" rtl="0" eaLnBrk="1" latinLnBrk="0" hangingPunct="1">
+      <a:lvl8pPr marL="2789000" indent="-228600" algn="l" defTabSz="457200" rtl="0" eaLnBrk="1" latinLnBrk="0" hangingPunct="1">
         <a:spcBef>
           <a:spcPct val="20000"/>
         </a:spcBef>
-        <a:buFont typeface="Arial"/>
-        <a:buChar char="•"/>
-        <a:defRPr sz="2000" kern="1200">
+        <a:spcAft>
+          <a:spcPts val="600"/>
+        </a:spcAft>
+        <a:buClr>
+          <a:schemeClr val="tx2"/>
+        </a:buClr>
+        <a:buSzPct val="70000"/>
+        <a:buFont typeface="Wingdings 2" charset="2"/>
+        <a:buChar char=""/>
+        <a:defRPr sz="1400" kern="1200">
+          <a:ln>
+            <a:solidFill>
+              <a:schemeClr val="bg1">
+                <a:lumMod val="75000"/>
+                <a:lumOff val="25000"/>
+                <a:alpha val="10000"/>
+              </a:schemeClr>
+            </a:solidFill>
+          </a:ln>
           <a:solidFill>
-            <a:schemeClr val="tx1"/>
+            <a:schemeClr val="tx2"/>
           </a:solidFill>
+          <a:effectLst>
+            <a:outerShdw blurRad="9525" dist="25400" dir="14640000" algn="tl" rotWithShape="0">
+              <a:schemeClr val="bg1">
+                <a:alpha val="30000"/>
+              </a:schemeClr>
+            </a:outerShdw>
+          </a:effectLst>
           <a:latin typeface="+mn-lt"/>
           <a:ea typeface="+mn-ea"/>
           <a:cs typeface="+mn-cs"/>
         </a:defRPr>
       </a:lvl8pPr>
-      <a:lvl9pPr marL="3886200" indent="-228600" algn="l" defTabSz="457200" rtl="0" eaLnBrk="1" latinLnBrk="0" hangingPunct="1">
+      <a:lvl9pPr marL="3106200" indent="-228600" algn="l" defTabSz="457200" rtl="0" eaLnBrk="1" latinLnBrk="0" hangingPunct="1">
         <a:spcBef>
           <a:spcPct val="20000"/>
         </a:spcBef>
-        <a:buFont typeface="Arial"/>
-        <a:buChar char="•"/>
-        <a:defRPr sz="2000" kern="1200">
+        <a:spcAft>
+          <a:spcPts val="600"/>
+        </a:spcAft>
+        <a:buClr>
+          <a:schemeClr val="tx2"/>
+        </a:buClr>
+        <a:buSzPct val="70000"/>
+        <a:buFont typeface="Wingdings 2" charset="2"/>
+        <a:buChar char=""/>
+        <a:defRPr sz="1400" kern="1200">
+          <a:ln>
+            <a:solidFill>
+              <a:schemeClr val="bg1">
+                <a:lumMod val="75000"/>
+                <a:lumOff val="25000"/>
+                <a:alpha val="10000"/>
+              </a:schemeClr>
+            </a:solidFill>
+          </a:ln>
           <a:solidFill>
-            <a:schemeClr val="tx1"/>
+            <a:schemeClr val="tx2"/>
           </a:solidFill>
+          <a:effectLst>
+            <a:outerShdw blurRad="9525" dist="25400" dir="14640000" algn="tl" rotWithShape="0">
+              <a:schemeClr val="bg1">
+                <a:alpha val="30000"/>
+              </a:schemeClr>
+            </a:outerShdw>
+          </a:effectLst>
           <a:latin typeface="+mn-lt"/>
           <a:ea typeface="+mn-ea"/>
           <a:cs typeface="+mn-cs"/>
@@ -3110,8 +6052,8 @@
         </p:nvSpPr>
         <p:spPr>
           <a:xfrm>
-            <a:off x="914400" y="2011680"/>
-            <a:ext cx="10362895" cy="1828800"/>
+            <a:off x="3172968" y="1913200"/>
+            <a:ext cx="5645392" cy="3031599"/>
           </a:xfrm>
           <a:prstGeom prst="rect">
             <a:avLst/>
@@ -3160,15 +6102,12 @@
             <a:br>
               <a:rPr dirty="0"/>
             </a:br>
-            <a:r>
-              <a:rPr sz="2400" b="0" dirty="0">
-                <a:solidFill>
-                  <a:srgbClr val="646464"/>
-                </a:solidFill>
-                <a:latin typeface="Segoe UI"/>
-              </a:rPr>
-              <a:t>By: Gopal Maurya</a:t>
-            </a:r>
+            <a:endParaRPr sz="2400" b="0" dirty="0">
+              <a:solidFill>
+                <a:srgbClr val="646464"/>
+              </a:solidFill>
+              <a:latin typeface="Segoe UI"/>
+            </a:endParaRPr>
           </a:p>
         </p:txBody>
       </p:sp>
@@ -3227,11 +6166,11 @@
           </a:bodyPr>
           <a:lstStyle/>
           <a:p>
-            <a:endParaRPr/>
-          </a:p>
-          <a:p>
-            <a:r>
-              <a:rPr sz="4800" b="1">
+            <a:endParaRPr dirty="0"/>
+          </a:p>
+          <a:p>
+            <a:r>
+              <a:rPr sz="4800" b="1" dirty="0">
                 <a:solidFill>
                   <a:srgbClr val="003366"/>
                 </a:solidFill>
@@ -3619,44 +6558,6 @@
           </a:p>
         </p:txBody>
       </p:sp>
-      <p:sp>
-        <p:nvSpPr>
-          <p:cNvPr id="5" name="TextBox 4">
-            <a:extLst>
-              <a:ext uri="{FF2B5EF4-FFF2-40B4-BE49-F238E27FC236}">
-                <a16:creationId xmlns:a16="http://schemas.microsoft.com/office/drawing/2014/main" id="{B3716ECE-3898-DCA7-20EF-A25AF7107625}"/>
-              </a:ext>
-            </a:extLst>
-          </p:cNvPr>
-          <p:cNvSpPr txBox="1"/>
-          <p:nvPr/>
-        </p:nvSpPr>
-        <p:spPr>
-          <a:xfrm>
-            <a:off x="9708204" y="6581001"/>
-            <a:ext cx="3699753" cy="276999"/>
-          </a:xfrm>
-          <a:prstGeom prst="rect">
-            <a:avLst/>
-          </a:prstGeom>
-          <a:noFill/>
-        </p:spPr>
-        <p:txBody>
-          <a:bodyPr wrap="square" rtlCol="0">
-            <a:spAutoFit/>
-          </a:bodyPr>
-          <a:lstStyle/>
-          <a:p>
-            <a:r>
-              <a:rPr lang="en-IN" sz="1200" dirty="0">
-                <a:hlinkClick r:id="rId2"/>
-              </a:rPr>
-              <a:t>https://nexora-1-bjh6.onrender.com/</a:t>
-            </a:r>
-            <a:endParaRPr lang="en-IN" sz="1200" dirty="0"/>
-          </a:p>
-        </p:txBody>
-      </p:sp>
     </p:spTree>
   </p:cSld>
   <p:clrMapOvr>
@@ -3795,7 +6696,7 @@
       </p:sp>
       <p:pic>
         <p:nvPicPr>
-          <p:cNvPr id="4" name="Picture 3" descr="click_feedback_1772879799918.png"/>
+          <p:cNvPr id="4" name="Picture 3"/>
           <p:cNvPicPr>
             <a:picLocks noChangeAspect="1"/>
           </p:cNvPicPr>
@@ -3803,14 +6704,13 @@
         </p:nvPicPr>
         <p:blipFill>
           <a:blip r:embed="rId2"/>
-          <a:stretch>
-            <a:fillRect/>
-          </a:stretch>
+          <a:srcRect/>
+          <a:stretch/>
         </p:blipFill>
         <p:spPr>
           <a:xfrm>
-            <a:off x="5205293" y="1828800"/>
-            <a:ext cx="6864787" cy="4206240"/>
+            <a:off x="5311302" y="1663430"/>
+            <a:ext cx="6711894" cy="3939701"/>
           </a:xfrm>
           <a:prstGeom prst="rect">
             <a:avLst/>
@@ -3836,6 +6736,250 @@
     <p:bg>
       <p:bgPr>
         <a:solidFill>
+          <a:schemeClr val="tx1"/>
+        </a:solidFill>
+        <a:effectLst/>
+      </p:bgPr>
+    </p:bg>
+    <p:spTree>
+      <p:nvGrpSpPr>
+        <p:cNvPr id="1" name=""/>
+        <p:cNvGrpSpPr/>
+        <p:nvPr/>
+      </p:nvGrpSpPr>
+      <p:grpSpPr>
+        <a:xfrm>
+          <a:off x="0" y="0"/>
+          <a:ext cx="0" cy="0"/>
+          <a:chOff x="0" y="0"/>
+          <a:chExt cx="0" cy="0"/>
+        </a:xfrm>
+      </p:grpSpPr>
+      <p:sp>
+        <p:nvSpPr>
+          <p:cNvPr id="3" name="TextBox 2">
+            <a:extLst>
+              <a:ext uri="{FF2B5EF4-FFF2-40B4-BE49-F238E27FC236}">
+                <a16:creationId xmlns:a16="http://schemas.microsoft.com/office/drawing/2014/main" id="{D50913A1-20FC-E426-9578-F535833EDFE9}"/>
+              </a:ext>
+            </a:extLst>
+          </p:cNvPr>
+          <p:cNvSpPr txBox="1"/>
+          <p:nvPr/>
+        </p:nvSpPr>
+        <p:spPr>
+          <a:xfrm>
+            <a:off x="24821" y="1361996"/>
+            <a:ext cx="5856051" cy="4883388"/>
+          </a:xfrm>
+          <a:prstGeom prst="rect">
+            <a:avLst/>
+          </a:prstGeom>
+          <a:noFill/>
+        </p:spPr>
+        <p:txBody>
+          <a:bodyPr wrap="square">
+            <a:spAutoFit/>
+          </a:bodyPr>
+          <a:lstStyle/>
+          <a:p>
+            <a:pPr marL="342900" indent="-342900">
+              <a:buFont typeface="Arial" panose="020B0604020202020204" pitchFamily="34" charset="0"/>
+              <a:buChar char="•"/>
+            </a:pPr>
+            <a:r>
+              <a:rPr sz="2400" b="0" dirty="0">
+                <a:solidFill>
+                  <a:srgbClr val="212529"/>
+                </a:solidFill>
+                <a:latin typeface="Segoe UI"/>
+              </a:rPr>
+              <a:t>Dedicated Volunteer View: Rescuers get a clean dashboard of active cries for help.</a:t>
+            </a:r>
+            <a:endParaRPr lang="en-US" sz="2400" b="0" dirty="0">
+              <a:solidFill>
+                <a:srgbClr val="212529"/>
+              </a:solidFill>
+              <a:latin typeface="Segoe UI"/>
+            </a:endParaRPr>
+          </a:p>
+          <a:p>
+            <a:pPr marL="342900" indent="-342900">
+              <a:buFont typeface="Arial" panose="020B0604020202020204" pitchFamily="34" charset="0"/>
+              <a:buChar char="•"/>
+            </a:pPr>
+            <a:r>
+              <a:rPr lang="en-IN" sz="2400" dirty="0" err="1">
+                <a:solidFill>
+                  <a:srgbClr val="212529"/>
+                </a:solidFill>
+                <a:latin typeface="Segoe UI"/>
+              </a:rPr>
+              <a:t>Filturing</a:t>
+            </a:r>
+            <a:r>
+              <a:rPr lang="en-IN" sz="2400" dirty="0">
+                <a:solidFill>
+                  <a:srgbClr val="212529"/>
+                </a:solidFill>
+                <a:latin typeface="Segoe UI"/>
+              </a:rPr>
+              <a:t> : Rescuers can filter reports by searching location and </a:t>
+            </a:r>
+            <a:r>
+              <a:rPr lang="en-IN" sz="2400" dirty="0" err="1">
+                <a:solidFill>
+                  <a:srgbClr val="212529"/>
+                </a:solidFill>
+                <a:latin typeface="Segoe UI"/>
+              </a:rPr>
+              <a:t>chossing</a:t>
+            </a:r>
+            <a:r>
+              <a:rPr lang="en-IN" sz="2400" dirty="0">
+                <a:solidFill>
+                  <a:srgbClr val="212529"/>
+                </a:solidFill>
+                <a:latin typeface="Segoe UI"/>
+              </a:rPr>
+              <a:t> categories.</a:t>
+            </a:r>
+            <a:endParaRPr sz="2400" b="0" dirty="0">
+              <a:solidFill>
+                <a:srgbClr val="212529"/>
+              </a:solidFill>
+              <a:latin typeface="Segoe UI"/>
+            </a:endParaRPr>
+          </a:p>
+          <a:p>
+            <a:pPr marL="342900" indent="-342900">
+              <a:spcBef>
+                <a:spcPts val="1400"/>
+              </a:spcBef>
+              <a:buFont typeface="Arial" panose="020B0604020202020204" pitchFamily="34" charset="0"/>
+              <a:buChar char="•"/>
+            </a:pPr>
+            <a:r>
+              <a:rPr sz="2400" b="0" dirty="0">
+                <a:solidFill>
+                  <a:srgbClr val="212529"/>
+                </a:solidFill>
+                <a:latin typeface="Segoe UI"/>
+              </a:rPr>
+              <a:t>Status Tracking: One-click actions to mark a signal as 'En Route' or 'Resolved'.</a:t>
+            </a:r>
+          </a:p>
+          <a:p>
+            <a:pPr marL="342900" indent="-342900">
+              <a:spcBef>
+                <a:spcPts val="1400"/>
+              </a:spcBef>
+              <a:buFont typeface="Arial" panose="020B0604020202020204" pitchFamily="34" charset="0"/>
+              <a:buChar char="•"/>
+            </a:pPr>
+            <a:r>
+              <a:rPr sz="2400" b="0" dirty="0">
+                <a:solidFill>
+                  <a:srgbClr val="212529"/>
+                </a:solidFill>
+                <a:latin typeface="Segoe UI"/>
+              </a:rPr>
+              <a:t> Global Synchronization: Once a rescuer targets a mission, all other teams see it live, preventing duplicate efforts.</a:t>
+            </a:r>
+          </a:p>
+        </p:txBody>
+      </p:sp>
+      <p:sp>
+        <p:nvSpPr>
+          <p:cNvPr id="4" name="TextBox 3">
+            <a:extLst>
+              <a:ext uri="{FF2B5EF4-FFF2-40B4-BE49-F238E27FC236}">
+                <a16:creationId xmlns:a16="http://schemas.microsoft.com/office/drawing/2014/main" id="{BD2555B4-4D72-32AA-D99D-88D068E0EFAD}"/>
+              </a:ext>
+            </a:extLst>
+          </p:cNvPr>
+          <p:cNvSpPr txBox="1"/>
+          <p:nvPr/>
+        </p:nvSpPr>
+        <p:spPr>
+          <a:xfrm>
+            <a:off x="202100" y="209886"/>
+            <a:ext cx="10204315" cy="1323439"/>
+          </a:xfrm>
+          <a:prstGeom prst="rect">
+            <a:avLst/>
+          </a:prstGeom>
+          <a:noFill/>
+        </p:spPr>
+        <p:txBody>
+          <a:bodyPr wrap="square" rtlCol="0">
+            <a:spAutoFit/>
+          </a:bodyPr>
+          <a:lstStyle/>
+          <a:p>
+            <a:r>
+              <a:rPr lang="en-IN" sz="4000" b="1" dirty="0">
+                <a:solidFill>
+                  <a:srgbClr val="003366"/>
+                </a:solidFill>
+                <a:latin typeface="Segoe UI"/>
+              </a:rPr>
+              <a:t>4. Rescuer Dashboard &amp; Collaboration</a:t>
+            </a:r>
+          </a:p>
+          <a:p>
+            <a:endParaRPr lang="en-IN" sz="4000" dirty="0"/>
+          </a:p>
+        </p:txBody>
+      </p:sp>
+      <p:pic>
+        <p:nvPicPr>
+          <p:cNvPr id="6" name="Picture 5">
+            <a:extLst>
+              <a:ext uri="{FF2B5EF4-FFF2-40B4-BE49-F238E27FC236}">
+                <a16:creationId xmlns:a16="http://schemas.microsoft.com/office/drawing/2014/main" id="{CD96C579-BF1C-C142-5321-C1CE9DB196E8}"/>
+              </a:ext>
+            </a:extLst>
+          </p:cNvPr>
+          <p:cNvPicPr>
+            <a:picLocks noChangeAspect="1"/>
+          </p:cNvPicPr>
+          <p:nvPr/>
+        </p:nvPicPr>
+        <p:blipFill>
+          <a:blip r:embed="rId2"/>
+          <a:srcRect/>
+          <a:stretch/>
+        </p:blipFill>
+        <p:spPr>
+          <a:xfrm>
+            <a:off x="5880872" y="1704654"/>
+            <a:ext cx="6223579" cy="3802066"/>
+          </a:xfrm>
+          <a:prstGeom prst="rect">
+            <a:avLst/>
+          </a:prstGeom>
+        </p:spPr>
+      </p:pic>
+    </p:spTree>
+    <p:extLst>
+      <p:ext uri="{BB962C8B-B14F-4D97-AF65-F5344CB8AC3E}">
+        <p14:creationId xmlns:p14="http://schemas.microsoft.com/office/powerpoint/2010/main" val="1091918109"/>
+      </p:ext>
+    </p:extLst>
+  </p:cSld>
+  <p:clrMapOvr>
+    <a:masterClrMapping/>
+  </p:clrMapOvr>
+</p:sld>
+</file>
+
+<file path=ppt/slides/slide6.xml><?xml version="1.0" encoding="utf-8"?>
+<p:sld xmlns:a="http://schemas.openxmlformats.org/drawingml/2006/main" xmlns:r="http://schemas.openxmlformats.org/officeDocument/2006/relationships" xmlns:p="http://schemas.openxmlformats.org/presentationml/2006/main">
+  <p:cSld>
+    <p:bg>
+      <p:bgPr>
+        <a:solidFill>
           <a:srgbClr val="FAFAFA"/>
         </a:solidFill>
         <a:effectLst/>
@@ -3864,7 +7008,7 @@
         <p:spPr>
           <a:xfrm>
             <a:off x="457200" y="457200"/>
-            <a:ext cx="11277295" cy="1097280"/>
+            <a:ext cx="5220853" cy="1107996"/>
           </a:xfrm>
           <a:prstGeom prst="rect">
             <a:avLst/>
@@ -3881,13 +7025,22 @@
           </a:p>
           <a:p>
             <a:r>
-              <a:rPr sz="4800" b="1" dirty="0">
+              <a:rPr lang="en-US" sz="4800" b="1" dirty="0">
                 <a:solidFill>
                   <a:srgbClr val="003366"/>
                 </a:solidFill>
                 <a:latin typeface="Segoe UI"/>
               </a:rPr>
-              <a:t>4. Why It Matters</a:t>
+              <a:t>5</a:t>
+            </a:r>
+            <a:r>
+              <a:rPr sz="4800" b="1" dirty="0">
+                <a:solidFill>
+                  <a:srgbClr val="003366"/>
+                </a:solidFill>
+                <a:latin typeface="Segoe UI"/>
+              </a:rPr>
+              <a:t>. Why It Matters</a:t>
             </a:r>
           </a:p>
         </p:txBody>
@@ -4022,10 +7175,98 @@
 </p:sld>
 </file>
 
+<file path=ppt/slides/slide7.xml><?xml version="1.0" encoding="utf-8"?>
+<p:sld xmlns:a="http://schemas.openxmlformats.org/drawingml/2006/main" xmlns:r="http://schemas.openxmlformats.org/officeDocument/2006/relationships" xmlns:p="http://schemas.openxmlformats.org/presentationml/2006/main">
+  <p:cSld>
+    <p:bg>
+      <p:bgPr>
+        <a:solidFill>
+          <a:schemeClr val="tx1"/>
+        </a:solidFill>
+        <a:effectLst/>
+      </p:bgPr>
+    </p:bg>
+    <p:spTree>
+      <p:nvGrpSpPr>
+        <p:cNvPr id="1" name=""/>
+        <p:cNvGrpSpPr/>
+        <p:nvPr/>
+      </p:nvGrpSpPr>
+      <p:grpSpPr>
+        <a:xfrm>
+          <a:off x="0" y="0"/>
+          <a:ext cx="0" cy="0"/>
+          <a:chOff x="0" y="0"/>
+          <a:chExt cx="0" cy="0"/>
+        </a:xfrm>
+      </p:grpSpPr>
+      <p:sp>
+        <p:nvSpPr>
+          <p:cNvPr id="2" name="TextBox 1">
+            <a:extLst>
+              <a:ext uri="{FF2B5EF4-FFF2-40B4-BE49-F238E27FC236}">
+                <a16:creationId xmlns:a16="http://schemas.microsoft.com/office/drawing/2014/main" id="{BAE07C47-992A-8881-5739-B6D9EF690CE4}"/>
+              </a:ext>
+            </a:extLst>
+          </p:cNvPr>
+          <p:cNvSpPr txBox="1"/>
+          <p:nvPr/>
+        </p:nvSpPr>
+        <p:spPr>
+          <a:xfrm>
+            <a:off x="3760232" y="2636196"/>
+            <a:ext cx="4671535" cy="1015663"/>
+          </a:xfrm>
+          <a:prstGeom prst="rect">
+            <a:avLst/>
+          </a:prstGeom>
+          <a:noFill/>
+        </p:spPr>
+        <p:txBody>
+          <a:bodyPr wrap="none" rtlCol="0">
+            <a:spAutoFit/>
+          </a:bodyPr>
+          <a:lstStyle/>
+          <a:p>
+            <a:r>
+              <a:rPr lang="en-US" sz="6000" b="1" dirty="0">
+                <a:solidFill>
+                  <a:srgbClr val="003366"/>
+                </a:solidFill>
+                <a:latin typeface="Segoe UI"/>
+              </a:rPr>
+              <a:t>T</a:t>
+            </a:r>
+            <a:r>
+              <a:rPr lang="en-IN" sz="6000" b="1" dirty="0">
+                <a:solidFill>
+                  <a:srgbClr val="003366"/>
+                </a:solidFill>
+                <a:latin typeface="Segoe UI"/>
+              </a:rPr>
+              <a:t>HANK YOU</a:t>
+            </a:r>
+            <a:endParaRPr lang="en-IN" sz="6000" dirty="0"/>
+          </a:p>
+        </p:txBody>
+      </p:sp>
+    </p:spTree>
+    <p:extLst>
+      <p:ext uri="{BB962C8B-B14F-4D97-AF65-F5344CB8AC3E}">
+        <p14:creationId xmlns:p14="http://schemas.microsoft.com/office/powerpoint/2010/main" val="1223787713"/>
+      </p:ext>
+    </p:extLst>
+  </p:cSld>
+  <p:clrMapOvr>
+    <a:masterClrMapping/>
+  </p:clrMapOvr>
+</p:sld>
+</file>
+
 <file path=ppt/theme/theme1.xml><?xml version="1.0" encoding="utf-8"?>
-<a:theme xmlns:a="http://schemas.openxmlformats.org/drawingml/2006/main" name="Office Theme">
+<a:theme xmlns:a="http://schemas.openxmlformats.org/drawingml/2006/main" name="Slate">
   <a:themeElements>
-    <a:clrScheme name="Office">
+    <a:clrScheme name="Slate">
       <a:dk1>
         <a:sysClr val="windowText" lastClr="000000"/>
       </a:dk1>
@@ -4033,52 +7274,52 @@
         <a:sysClr val="window" lastClr="FFFFFF"/>
       </a:lt1>
       <a:dk2>
-        <a:srgbClr val="1F497D"/>
+        <a:srgbClr val="212123"/>
       </a:dk2>
       <a:lt2>
-        <a:srgbClr val="EEECE1"/>
+        <a:srgbClr val="DADADA"/>
       </a:lt2>
       <a:accent1>
-        <a:srgbClr val="4F81BD"/>
+        <a:srgbClr val="BC451B"/>
       </a:accent1>
       <a:accent2>
-        <a:srgbClr val="C0504D"/>
+        <a:srgbClr val="D3BA68"/>
       </a:accent2>
       <a:accent3>
-        <a:srgbClr val="9BBB59"/>
+        <a:srgbClr val="BB8640"/>
       </a:accent3>
       <a:accent4>
-        <a:srgbClr val="8064A2"/>
+        <a:srgbClr val="AD9277"/>
       </a:accent4>
       <a:accent5>
-        <a:srgbClr val="4BACC6"/>
+        <a:srgbClr val="A55A43"/>
       </a:accent5>
       <a:accent6>
-        <a:srgbClr val="F79646"/>
+        <a:srgbClr val="AD9D7B"/>
       </a:accent6>
       <a:hlink>
-        <a:srgbClr val="0000FF"/>
+        <a:srgbClr val="E98052"/>
       </a:hlink>
       <a:folHlink>
-        <a:srgbClr val="800080"/>
+        <a:srgbClr val="F4B69B"/>
       </a:folHlink>
     </a:clrScheme>
-    <a:fontScheme name="Office">
+    <a:fontScheme name="Slate">
       <a:majorFont>
-        <a:latin typeface="Calibri"/>
+        <a:latin typeface="Calisto MT" panose="02040603050505030304"/>
         <a:ea typeface=""/>
         <a:cs typeface=""/>
         <a:font script="Jpan" typeface="ＭＳ Ｐゴシック"/>
-        <a:font script="Hang" typeface="맑은 고딕"/>
-        <a:font script="Hans" typeface="宋体"/>
-        <a:font script="Hant" typeface="新細明體"/>
-        <a:font script="Arab" typeface="Times New Roman"/>
-        <a:font script="Hebr" typeface="Times New Roman"/>
-        <a:font script="Thai" typeface="Angsana New"/>
+        <a:font script="Hang" typeface="돋움"/>
+        <a:font script="Hans" typeface="方正舒体"/>
+        <a:font script="Hant" typeface="微軟正黑體"/>
+        <a:font script="Arab" typeface="Arial"/>
+        <a:font script="Hebr" typeface="Arial"/>
+        <a:font script="Thai" typeface="Cordia New"/>
         <a:font script="Ethi" typeface="Nyala"/>
         <a:font script="Beng" typeface="Vrinda"/>
         <a:font script="Gujr" typeface="Shruti"/>
-        <a:font script="Khmr" typeface="MoolBoran"/>
+        <a:font script="Khmr" typeface="DaunPenh"/>
         <a:font script="Knda" typeface="Tunga"/>
         <a:font script="Guru" typeface="Raavi"/>
         <a:font script="Cans" typeface="Euphemia"/>
@@ -4095,18 +7336,18 @@
         <a:font script="Laoo" typeface="DokChampa"/>
         <a:font script="Sinh" typeface="Iskoola Pota"/>
         <a:font script="Mong" typeface="Mongolian Baiti"/>
-        <a:font script="Viet" typeface="Times New Roman"/>
+        <a:font script="Viet" typeface="Arial"/>
         <a:font script="Uigh" typeface="Microsoft Uighur"/>
         <a:font script="Geor" typeface="Sylfaen"/>
       </a:majorFont>
       <a:minorFont>
-        <a:latin typeface="Calibri"/>
+        <a:latin typeface="Calisto MT" panose="02040603050505030304"/>
         <a:ea typeface=""/>
         <a:cs typeface=""/>
         <a:font script="Jpan" typeface="ＭＳ Ｐゴシック"/>
-        <a:font script="Hang" typeface="맑은 고딕"/>
-        <a:font script="Hans" typeface="宋体"/>
-        <a:font script="Hant" typeface="新細明體"/>
+        <a:font script="Hang" typeface="돋움"/>
+        <a:font script="Hans" typeface="方正舒体"/>
+        <a:font script="Hant" typeface="微軟正黑體"/>
         <a:font script="Arab" typeface="Arial"/>
         <a:font script="Hebr" typeface="Arial"/>
         <a:font script="Thai" typeface="Cordia New"/>
@@ -4135,7 +7376,7 @@
         <a:font script="Geor" typeface="Sylfaen"/>
       </a:minorFont>
     </a:fontScheme>
-    <a:fmtScheme name="Office">
+    <a:fmtScheme name="Slate">
       <a:fillStyleLst>
         <a:solidFill>
           <a:schemeClr val="phClr"/>
@@ -4144,62 +7385,52 @@
           <a:gsLst>
             <a:gs pos="0">
               <a:schemeClr val="phClr">
-                <a:tint val="50000"/>
-                <a:satMod val="300000"/>
-              </a:schemeClr>
-            </a:gs>
-            <a:gs pos="35000">
-              <a:schemeClr val="phClr">
-                <a:tint val="37000"/>
-                <a:satMod val="300000"/>
+                <a:tint val="60000"/>
+                <a:lumMod val="110000"/>
               </a:schemeClr>
             </a:gs>
             <a:gs pos="100000">
               <a:schemeClr val="phClr">
-                <a:tint val="15000"/>
-                <a:satMod val="350000"/>
+                <a:tint val="88000"/>
               </a:schemeClr>
             </a:gs>
           </a:gsLst>
-          <a:lin ang="16200000" scaled="1"/>
+          <a:lin ang="5400000" scaled="0"/>
         </a:gradFill>
         <a:gradFill rotWithShape="1">
           <a:gsLst>
             <a:gs pos="0">
               <a:schemeClr val="phClr">
-                <a:tint val="100000"/>
-                <a:shade val="100000"/>
-                <a:satMod val="130000"/>
+                <a:tint val="96000"/>
+                <a:lumMod val="104000"/>
               </a:schemeClr>
             </a:gs>
             <a:gs pos="100000">
               <a:schemeClr val="phClr">
-                <a:tint val="50000"/>
-                <a:shade val="100000"/>
-                <a:satMod val="350000"/>
+                <a:shade val="90000"/>
+                <a:lumMod val="90000"/>
               </a:schemeClr>
             </a:gs>
           </a:gsLst>
-          <a:lin ang="16200000" scaled="0"/>
+          <a:lin ang="5400000" scaled="0"/>
         </a:gradFill>
       </a:fillStyleLst>
       <a:lnStyleLst>
-        <a:ln w="9525" cap="flat" cmpd="sng" algn="ctr">
+        <a:ln w="9525" cap="rnd" cmpd="sng" algn="ctr">
           <a:solidFill>
             <a:schemeClr val="phClr">
-              <a:shade val="95000"/>
-              <a:satMod val="105000"/>
+              <a:shade val="90000"/>
             </a:schemeClr>
           </a:solidFill>
           <a:prstDash val="solid"/>
         </a:ln>
-        <a:ln w="25400" cap="flat" cmpd="sng" algn="ctr">
+        <a:ln w="15875" cap="rnd" cmpd="sng" algn="ctr">
           <a:solidFill>
             <a:schemeClr val="phClr"/>
           </a:solidFill>
           <a:prstDash val="solid"/>
         </a:ln>
-        <a:ln w="38100" cap="flat" cmpd="sng" algn="ctr">
+        <a:ln w="25400" cap="rnd" cmpd="sng" algn="ctr">
           <a:solidFill>
             <a:schemeClr val="phClr"/>
           </a:solidFill>
@@ -4208,28 +7439,22 @@
       </a:lnStyleLst>
       <a:effectStyleLst>
         <a:effectStyle>
+          <a:effectLst/>
+        </a:effectStyle>
+        <a:effectStyle>
           <a:effectLst>
-            <a:outerShdw blurRad="40000" dist="20000" dir="5400000" rotWithShape="0">
+            <a:outerShdw blurRad="63500" dist="25400" dir="5400000" rotWithShape="0">
               <a:srgbClr val="000000">
-                <a:alpha val="38000"/>
+                <a:alpha val="60000"/>
               </a:srgbClr>
             </a:outerShdw>
           </a:effectLst>
         </a:effectStyle>
         <a:effectStyle>
           <a:effectLst>
-            <a:outerShdw blurRad="40000" dist="23000" dir="5400000" rotWithShape="0">
+            <a:outerShdw blurRad="76200" dist="38100" dir="5400000" rotWithShape="0">
               <a:srgbClr val="000000">
-                <a:alpha val="35000"/>
-              </a:srgbClr>
-            </a:outerShdw>
-          </a:effectLst>
-        </a:effectStyle>
-        <a:effectStyle>
-          <a:effectLst>
-            <a:outerShdw blurRad="40000" dist="23000" dir="5400000" rotWithShape="0">
-              <a:srgbClr val="000000">
-                <a:alpha val="35000"/>
+                <a:alpha val="75000"/>
               </a:srgbClr>
             </a:outerShdw>
           </a:effectLst>
@@ -4242,7 +7467,7 @@
             </a:lightRig>
           </a:scene3d>
           <a:sp3d>
-            <a:bevelT w="63500" h="25400"/>
+            <a:bevelT w="63500" h="25400" prst="hardEdge"/>
           </a:sp3d>
         </a:effectStyle>
       </a:effectStyleLst>
@@ -4250,94 +7475,32 @@
         <a:solidFill>
           <a:schemeClr val="phClr"/>
         </a:solidFill>
-        <a:gradFill rotWithShape="1">
-          <a:gsLst>
-            <a:gs pos="0">
+        <a:solidFill>
+          <a:schemeClr val="phClr"/>
+        </a:solidFill>
+        <a:blipFill rotWithShape="1">
+          <a:blip xmlns:r="http://schemas.openxmlformats.org/officeDocument/2006/relationships" r:embed="rId1">
+            <a:duotone>
               <a:schemeClr val="phClr">
-                <a:tint val="40000"/>
-                <a:satMod val="350000"/>
+                <a:shade val="80000"/>
+                <a:lumMod val="80000"/>
               </a:schemeClr>
-            </a:gs>
-            <a:gs pos="40000">
               <a:schemeClr val="phClr">
-                <a:tint val="45000"/>
-                <a:shade val="99000"/>
-                <a:satMod val="350000"/>
+                <a:tint val="98000"/>
               </a:schemeClr>
-            </a:gs>
-            <a:gs pos="100000">
-              <a:schemeClr val="phClr">
-                <a:shade val="20000"/>
-                <a:satMod val="255000"/>
-              </a:schemeClr>
-            </a:gs>
-          </a:gsLst>
-          <a:path path="circle">
-            <a:fillToRect l="50000" t="-80000" r="50000" b="180000"/>
-          </a:path>
-        </a:gradFill>
-        <a:gradFill rotWithShape="1">
-          <a:gsLst>
-            <a:gs pos="0">
-              <a:schemeClr val="phClr">
-                <a:tint val="80000"/>
-                <a:satMod val="300000"/>
-              </a:schemeClr>
-            </a:gs>
-            <a:gs pos="100000">
-              <a:schemeClr val="phClr">
-                <a:shade val="30000"/>
-                <a:satMod val="200000"/>
-              </a:schemeClr>
-            </a:gs>
-          </a:gsLst>
-          <a:path path="circle">
-            <a:fillToRect l="50000" t="50000" r="50000" b="50000"/>
-          </a:path>
-        </a:gradFill>
+            </a:duotone>
+          </a:blip>
+          <a:stretch/>
+        </a:blipFill>
       </a:bgFillStyleLst>
     </a:fmtScheme>
   </a:themeElements>
-  <a:objectDefaults>
-    <a:spDef>
-      <a:spPr/>
-      <a:bodyPr/>
-      <a:lstStyle/>
-      <a:style>
-        <a:lnRef idx="1">
-          <a:schemeClr val="accent1"/>
-        </a:lnRef>
-        <a:fillRef idx="3">
-          <a:schemeClr val="accent1"/>
-        </a:fillRef>
-        <a:effectRef idx="2">
-          <a:schemeClr val="accent1"/>
-        </a:effectRef>
-        <a:fontRef idx="minor">
-          <a:schemeClr val="lt1"/>
-        </a:fontRef>
-      </a:style>
-    </a:spDef>
-    <a:lnDef>
-      <a:spPr/>
-      <a:bodyPr/>
-      <a:lstStyle/>
-      <a:style>
-        <a:lnRef idx="2">
-          <a:schemeClr val="accent1"/>
-        </a:lnRef>
-        <a:fillRef idx="0">
-          <a:schemeClr val="accent1"/>
-        </a:fillRef>
-        <a:effectRef idx="1">
-          <a:schemeClr val="accent1"/>
-        </a:effectRef>
-        <a:fontRef idx="minor">
-          <a:schemeClr val="tx1"/>
-        </a:fontRef>
-      </a:style>
-    </a:lnDef>
-  </a:objectDefaults>
+  <a:objectDefaults/>
   <a:extraClrSchemeLst/>
+  <a:extLst>
+    <a:ext uri="{05A4C25C-085E-4340-85A3-A5531E510DB2}">
+      <thm15:themeFamily xmlns:thm15="http://schemas.microsoft.com/office/thememl/2012/main" name="Slate" id="{C3F70B94-7CE9-428E-ADC1-3269CC2C3385}" vid="{3F2DE9A5-64E6-437C-A389-CC4477E817E8}"/>
+    </a:ext>
+  </a:extLst>
 </a:theme>
 </file>